--- a/slides/modules/m13-observability-health-scale.pptx
+++ b/slides/modules/m13-observability-health-scale.pptx
@@ -14,6 +14,11 @@
     <p:sldId id="262" r:id="rId14"/>
     <p:sldId id="263" r:id="rId15"/>
     <p:sldId id="264" r:id="rId16"/>
+    <p:sldId id="265" r:id="rId17"/>
+    <p:sldId id="266" r:id="rId18"/>
+    <p:sldId id="267" r:id="rId19"/>
+    <p:sldId id="268" r:id="rId20"/>
+    <p:sldId id="269" r:id="rId21"/>
   </p:sldIdLst>
   <p:sldSz cx="12191695" cy="6858000" type="screen4x3"/>
   <p:notesSz cx="6858000" cy="9144000"/>
@@ -535,6 +540,286 @@
 </p:notes>
 </file>
 
+<file path=ppt/notesSlides/notesSlide10.xml><?xml version="1.0" encoding="utf-8"?>
+<p:notes xmlns:a="http://schemas.openxmlformats.org/drawingml/2006/main" xmlns:p="http://schemas.openxmlformats.org/presentationml/2006/main" xmlns:r="http://schemas.openxmlformats.org/officeDocument/2006/relationships">
+  <p:cSld>
+    <p:spTree>
+      <p:nvGrpSpPr>
+        <p:cNvPr id="1" name=""/>
+        <p:cNvGrpSpPr/>
+        <p:nvPr/>
+      </p:nvGrpSpPr>
+      <p:grpSpPr>
+        <a:xfrm>
+          <a:off x="0" y="0"/>
+          <a:ext cx="0" cy="0"/>
+          <a:chOff x="0" y="0"/>
+          <a:chExt cx="0" cy="0"/>
+        </a:xfrm>
+      </p:grpSpPr>
+      <p:sp>
+        <p:nvSpPr>
+          <p:cNvPr id="2" name="Slide Image Placeholder 1"/>
+          <p:cNvSpPr>
+            <a:spLocks noGrp="1"/>
+          </p:cNvSpPr>
+          <p:nvPr>
+            <p:ph type="sldImg" idx="2"/>
+          </p:nvPr>
+        </p:nvSpPr>
+        <p:spPr/>
+      </p:sp>
+      <p:sp>
+        <p:nvSpPr>
+          <p:cNvPr id="3" name="Notes Placeholder 2"/>
+          <p:cNvSpPr>
+            <a:spLocks noGrp="1"/>
+          </p:cNvSpPr>
+          <p:nvPr>
+            <p:ph type="body" idx="3" sz="quarter"/>
+          </p:nvPr>
+        </p:nvSpPr>
+        <p:spPr/>
+        <p:txBody>
+          <a:bodyPr/>
+          <a:lstStyle/>
+          <a:p>
+            <a:r>
+              <a:t>Concept diagram: Servicemonitor bridge.</a:t>
+            </a:r>
+          </a:p>
+        </p:txBody>
+      </p:sp>
+      <p:sp>
+        <p:nvSpPr>
+          <p:cNvPr id="4" name="Slide Number Placeholder 3"/>
+          <p:cNvSpPr>
+            <a:spLocks noGrp="1"/>
+          </p:cNvSpPr>
+          <p:nvPr>
+            <p:ph type="sldNum" idx="5" sz="quarter"/>
+          </p:nvPr>
+        </p:nvSpPr>
+        <p:spPr/>
+      </p:sp>
+    </p:spTree>
+  </p:cSld>
+  <p:clrMapOvr>
+    <a:masterClrMapping/>
+  </p:clrMapOvr>
+</p:notes>
+</file>
+
+<file path=ppt/notesSlides/notesSlide11.xml><?xml version="1.0" encoding="utf-8"?>
+<p:notes xmlns:a="http://schemas.openxmlformats.org/drawingml/2006/main" xmlns:p="http://schemas.openxmlformats.org/presentationml/2006/main" xmlns:r="http://schemas.openxmlformats.org/officeDocument/2006/relationships">
+  <p:cSld>
+    <p:spTree>
+      <p:nvGrpSpPr>
+        <p:cNvPr id="1" name=""/>
+        <p:cNvGrpSpPr/>
+        <p:nvPr/>
+      </p:nvGrpSpPr>
+      <p:grpSpPr>
+        <a:xfrm>
+          <a:off x="0" y="0"/>
+          <a:ext cx="0" cy="0"/>
+          <a:chOff x="0" y="0"/>
+          <a:chExt cx="0" cy="0"/>
+        </a:xfrm>
+      </p:grpSpPr>
+      <p:sp>
+        <p:nvSpPr>
+          <p:cNvPr id="2" name="Slide Image Placeholder 1"/>
+          <p:cNvSpPr>
+            <a:spLocks noGrp="1"/>
+          </p:cNvSpPr>
+          <p:nvPr>
+            <p:ph type="sldImg" idx="2"/>
+          </p:nvPr>
+        </p:nvSpPr>
+        <p:spPr/>
+      </p:sp>
+      <p:sp>
+        <p:nvSpPr>
+          <p:cNvPr id="3" name="Notes Placeholder 2"/>
+          <p:cNvSpPr>
+            <a:spLocks noGrp="1"/>
+          </p:cNvSpPr>
+          <p:nvPr>
+            <p:ph type="body" idx="3" sz="quarter"/>
+          </p:nvPr>
+        </p:nvSpPr>
+        <p:spPr/>
+        <p:txBody>
+          <a:bodyPr/>
+          <a:lstStyle/>
+          <a:p>
+            <a:r>
+              <a:t>Concept diagram: Scaling decision tree.</a:t>
+            </a:r>
+          </a:p>
+        </p:txBody>
+      </p:sp>
+      <p:sp>
+        <p:nvSpPr>
+          <p:cNvPr id="4" name="Slide Number Placeholder 3"/>
+          <p:cNvSpPr>
+            <a:spLocks noGrp="1"/>
+          </p:cNvSpPr>
+          <p:nvPr>
+            <p:ph type="sldNum" idx="5" sz="quarter"/>
+          </p:nvPr>
+        </p:nvSpPr>
+        <p:spPr/>
+      </p:sp>
+    </p:spTree>
+  </p:cSld>
+  <p:clrMapOvr>
+    <a:masterClrMapping/>
+  </p:clrMapOvr>
+</p:notes>
+</file>
+
+<file path=ppt/notesSlides/notesSlide12.xml><?xml version="1.0" encoding="utf-8"?>
+<p:notes xmlns:a="http://schemas.openxmlformats.org/drawingml/2006/main" xmlns:p="http://schemas.openxmlformats.org/presentationml/2006/main" xmlns:r="http://schemas.openxmlformats.org/officeDocument/2006/relationships">
+  <p:cSld>
+    <p:spTree>
+      <p:nvGrpSpPr>
+        <p:cNvPr id="1" name=""/>
+        <p:cNvGrpSpPr/>
+        <p:nvPr/>
+      </p:nvGrpSpPr>
+      <p:grpSpPr>
+        <a:xfrm>
+          <a:off x="0" y="0"/>
+          <a:ext cx="0" cy="0"/>
+          <a:chOff x="0" y="0"/>
+          <a:chExt cx="0" cy="0"/>
+        </a:xfrm>
+      </p:grpSpPr>
+      <p:sp>
+        <p:nvSpPr>
+          <p:cNvPr id="2" name="Slide Image Placeholder 1"/>
+          <p:cNvSpPr>
+            <a:spLocks noGrp="1"/>
+          </p:cNvSpPr>
+          <p:nvPr>
+            <p:ph type="sldImg" idx="2"/>
+          </p:nvPr>
+        </p:nvSpPr>
+        <p:spPr/>
+      </p:sp>
+      <p:sp>
+        <p:nvSpPr>
+          <p:cNvPr id="3" name="Notes Placeholder 2"/>
+          <p:cNvSpPr>
+            <a:spLocks noGrp="1"/>
+          </p:cNvSpPr>
+          <p:nvPr>
+            <p:ph type="body" idx="3" sz="quarter"/>
+          </p:nvPr>
+        </p:nvSpPr>
+        <p:spPr/>
+        <p:txBody>
+          <a:bodyPr/>
+          <a:lstStyle/>
+          <a:p>
+            <a:r>
+              <a:t>Concept diagram: Platform accretion.</a:t>
+            </a:r>
+          </a:p>
+        </p:txBody>
+      </p:sp>
+      <p:sp>
+        <p:nvSpPr>
+          <p:cNvPr id="4" name="Slide Number Placeholder 3"/>
+          <p:cNvSpPr>
+            <a:spLocks noGrp="1"/>
+          </p:cNvSpPr>
+          <p:nvPr>
+            <p:ph type="sldNum" idx="5" sz="quarter"/>
+          </p:nvPr>
+        </p:nvSpPr>
+        <p:spPr/>
+      </p:sp>
+    </p:spTree>
+  </p:cSld>
+  <p:clrMapOvr>
+    <a:masterClrMapping/>
+  </p:clrMapOvr>
+</p:notes>
+</file>
+
+<file path=ppt/notesSlides/notesSlide13.xml><?xml version="1.0" encoding="utf-8"?>
+<p:notes xmlns:a="http://schemas.openxmlformats.org/drawingml/2006/main" xmlns:p="http://schemas.openxmlformats.org/presentationml/2006/main" xmlns:r="http://schemas.openxmlformats.org/officeDocument/2006/relationships">
+  <p:cSld>
+    <p:spTree>
+      <p:nvGrpSpPr>
+        <p:cNvPr id="1" name=""/>
+        <p:cNvGrpSpPr/>
+        <p:nvPr/>
+      </p:nvGrpSpPr>
+      <p:grpSpPr>
+        <a:xfrm>
+          <a:off x="0" y="0"/>
+          <a:ext cx="0" cy="0"/>
+          <a:chOff x="0" y="0"/>
+          <a:chExt cx="0" cy="0"/>
+        </a:xfrm>
+      </p:grpSpPr>
+      <p:sp>
+        <p:nvSpPr>
+          <p:cNvPr id="2" name="Slide Image Placeholder 1"/>
+          <p:cNvSpPr>
+            <a:spLocks noGrp="1"/>
+          </p:cNvSpPr>
+          <p:nvPr>
+            <p:ph type="sldImg" idx="2"/>
+          </p:nvPr>
+        </p:nvSpPr>
+        <p:spPr/>
+      </p:sp>
+      <p:sp>
+        <p:nvSpPr>
+          <p:cNvPr id="3" name="Notes Placeholder 2"/>
+          <p:cNvSpPr>
+            <a:spLocks noGrp="1"/>
+          </p:cNvSpPr>
+          <p:nvPr>
+            <p:ph type="body" idx="3" sz="quarter"/>
+          </p:nvPr>
+        </p:nvSpPr>
+        <p:spPr/>
+        <p:txBody>
+          <a:bodyPr/>
+          <a:lstStyle/>
+          <a:p>
+            <a:r>
+              <a:t>Concept diagram: What you built.</a:t>
+            </a:r>
+          </a:p>
+        </p:txBody>
+      </p:sp>
+      <p:sp>
+        <p:nvSpPr>
+          <p:cNvPr id="4" name="Slide Number Placeholder 3"/>
+          <p:cNvSpPr>
+            <a:spLocks noGrp="1"/>
+          </p:cNvSpPr>
+          <p:nvPr>
+            <p:ph type="sldNum" idx="5" sz="quarter"/>
+          </p:nvPr>
+        </p:nvSpPr>
+        <p:spPr/>
+      </p:sp>
+    </p:spTree>
+  </p:cSld>
+  <p:clrMapOvr>
+    <a:masterClrMapping/>
+  </p:clrMapOvr>
+</p:notes>
+</file>
+
 <file path=ppt/notesSlides/notesSlide2.xml><?xml version="1.0" encoding="utf-8"?>
 <p:notes xmlns:a="http://schemas.openxmlformats.org/drawingml/2006/main" xmlns:p="http://schemas.openxmlformats.org/presentationml/2006/main" xmlns:r="http://schemas.openxmlformats.org/officeDocument/2006/relationships">
   <p:cSld>
@@ -1001,6 +1286,76 @@
           <a:p>
             <a:r>
               <a:t>Close by connecting it back. You instrumented nothing and consumed everything: golden signals and a business metric, an alert you made fire, a trace, an HPA, a PDB — the observability, health and scale layer over the platform you'd built through the earlier modules. And the punchline for the room's leadership: user-workload monitoring, the Cluster Observability Operator, Tempo and OpenTelemetry all ship with OpenShift. Teams that treat "add monitoring" as a procurement project are usually re-buying what their subscription already includes.</a:t>
+            </a:r>
+          </a:p>
+        </p:txBody>
+      </p:sp>
+      <p:sp>
+        <p:nvSpPr>
+          <p:cNvPr id="4" name="Slide Number Placeholder 3"/>
+          <p:cNvSpPr>
+            <a:spLocks noGrp="1"/>
+          </p:cNvSpPr>
+          <p:nvPr>
+            <p:ph type="sldNum" idx="5" sz="quarter"/>
+          </p:nvPr>
+        </p:nvSpPr>
+        <p:spPr/>
+      </p:sp>
+    </p:spTree>
+  </p:cSld>
+  <p:clrMapOvr>
+    <a:masterClrMapping/>
+  </p:clrMapOvr>
+</p:notes>
+</file>
+
+<file path=ppt/notesSlides/notesSlide9.xml><?xml version="1.0" encoding="utf-8"?>
+<p:notes xmlns:a="http://schemas.openxmlformats.org/drawingml/2006/main" xmlns:p="http://schemas.openxmlformats.org/presentationml/2006/main" xmlns:r="http://schemas.openxmlformats.org/officeDocument/2006/relationships">
+  <p:cSld>
+    <p:spTree>
+      <p:nvGrpSpPr>
+        <p:cNvPr id="1" name=""/>
+        <p:cNvGrpSpPr/>
+        <p:nvPr/>
+      </p:nvGrpSpPr>
+      <p:grpSpPr>
+        <a:xfrm>
+          <a:off x="0" y="0"/>
+          <a:ext cx="0" cy="0"/>
+          <a:chOff x="0" y="0"/>
+          <a:chExt cx="0" cy="0"/>
+        </a:xfrm>
+      </p:grpSpPr>
+      <p:sp>
+        <p:nvSpPr>
+          <p:cNvPr id="2" name="Slide Image Placeholder 1"/>
+          <p:cNvSpPr>
+            <a:spLocks noGrp="1"/>
+          </p:cNvSpPr>
+          <p:nvPr>
+            <p:ph type="sldImg" idx="2"/>
+          </p:nvPr>
+        </p:nvSpPr>
+        <p:spPr/>
+      </p:sp>
+      <p:sp>
+        <p:nvSpPr>
+          <p:cNvPr id="3" name="Notes Placeholder 2"/>
+          <p:cNvSpPr>
+            <a:spLocks noGrp="1"/>
+          </p:cNvSpPr>
+          <p:nvPr>
+            <p:ph type="body" idx="3" sz="quarter"/>
+          </p:nvPr>
+        </p:nvSpPr>
+        <p:spPr/>
+        <p:txBody>
+          <a:bodyPr/>
+          <a:lstStyle/>
+          <a:p>
+            <a:r>
+              <a:t>Concept diagram: Three signals.</a:t>
             </a:r>
           </a:p>
         </p:txBody>
@@ -4209,6 +4564,1836 @@
 </p:sld>
 </file>
 
+<file path=ppt/slides/slide10.xml><?xml version="1.0" encoding="utf-8"?>
+<p:sld xmlns:a="http://schemas.openxmlformats.org/drawingml/2006/main" xmlns:p="http://schemas.openxmlformats.org/presentationml/2006/main" xmlns:r="http://schemas.openxmlformats.org/officeDocument/2006/relationships">
+  <p:cSld>
+    <p:spTree>
+      <p:nvGrpSpPr>
+        <p:cNvPr id="1" name=""/>
+        <p:cNvGrpSpPr/>
+        <p:nvPr/>
+      </p:nvGrpSpPr>
+      <p:grpSpPr/>
+      <p:pic>
+        <p:nvPicPr>
+          <p:cNvPr id="2" name="Picture 1" descr="redhat_logo.jpg"/>
+          <p:cNvPicPr>
+            <a:picLocks noChangeAspect="1"/>
+          </p:cNvPicPr>
+          <p:nvPr/>
+        </p:nvPicPr>
+        <p:blipFill>
+          <a:blip r:embed="rId2"/>
+          <a:stretch>
+            <a:fillRect/>
+          </a:stretch>
+        </p:blipFill>
+        <p:spPr>
+          <a:xfrm>
+            <a:off x="10326319" y="475488"/>
+            <a:ext cx="1024128" cy="242248"/>
+          </a:xfrm>
+          <a:prstGeom prst="rect">
+            <a:avLst/>
+          </a:prstGeom>
+        </p:spPr>
+      </p:pic>
+      <p:sp>
+        <p:nvSpPr>
+          <p:cNvPr id="3" name="TextBox 2"/>
+          <p:cNvSpPr txBox="1"/>
+          <p:nvPr/>
+        </p:nvSpPr>
+        <p:spPr>
+          <a:xfrm>
+            <a:off x="841248" y="548640"/>
+            <a:ext cx="8595360" cy="274320"/>
+          </a:xfrm>
+          <a:prstGeom prst="rect">
+            <a:avLst/>
+          </a:prstGeom>
+          <a:noFill/>
+        </p:spPr>
+        <p:txBody>
+          <a:bodyPr wrap="square" anchor="t" lIns="0" rIns="0" tIns="0" bIns="0">
+            <a:spAutoFit/>
+          </a:bodyPr>
+          <a:lstStyle/>
+          <a:p>
+            <a:pPr algn="l">
+              <a:lnSpc>
+                <a:spcPct val="106000"/>
+              </a:lnSpc>
+              <a:spcBef>
+                <a:spcPts val="0"/>
+              </a:spcBef>
+              <a:spcAft>
+                <a:spcPts val="0"/>
+              </a:spcAft>
+            </a:pPr>
+            <a:r>
+              <a:rPr sz="1250" b="1" spc="220">
+                <a:solidFill>
+                  <a:srgbClr val="EE0000"/>
+                </a:solidFill>
+                <a:latin typeface="Red Hat Display"/>
+              </a:rPr>
+              <a:t>M13 · OBSERVABILITY, HEALTH &amp; SCALE</a:t>
+            </a:r>
+          </a:p>
+        </p:txBody>
+      </p:sp>
+      <p:sp>
+        <p:nvSpPr>
+          <p:cNvPr id="4" name="TextBox 3"/>
+          <p:cNvSpPr txBox="1"/>
+          <p:nvPr/>
+        </p:nvSpPr>
+        <p:spPr>
+          <a:xfrm>
+            <a:off x="841248" y="877824"/>
+            <a:ext cx="10515600" cy="548640"/>
+          </a:xfrm>
+          <a:prstGeom prst="rect">
+            <a:avLst/>
+          </a:prstGeom>
+          <a:noFill/>
+        </p:spPr>
+        <p:txBody>
+          <a:bodyPr wrap="none" anchor="t" lIns="0" rIns="0" tIns="0" bIns="0">
+            <a:spAutoFit/>
+          </a:bodyPr>
+          <a:lstStyle/>
+          <a:p>
+            <a:pPr algn="l">
+              <a:lnSpc>
+                <a:spcPct val="100000"/>
+              </a:lnSpc>
+              <a:spcBef>
+                <a:spcPts val="0"/>
+              </a:spcBef>
+              <a:spcAft>
+                <a:spcPts val="0"/>
+              </a:spcAft>
+            </a:pPr>
+            <a:r>
+              <a:rPr sz="2500" b="1">
+                <a:solidFill>
+                  <a:srgbClr val="1A1A1A"/>
+                </a:solidFill>
+                <a:latin typeface="Red Hat Display"/>
+              </a:rPr>
+              <a:t>Three signals</a:t>
+            </a:r>
+          </a:p>
+        </p:txBody>
+      </p:sp>
+      <p:cxnSp>
+        <p:nvCxnSpPr>
+          <p:cNvPr id="5" name="Connector 4"/>
+          <p:cNvCxnSpPr/>
+          <p:nvPr/>
+        </p:nvCxnSpPr>
+        <p:spPr>
+          <a:xfrm>
+            <a:off x="841248" y="1554480"/>
+            <a:ext cx="1371600" cy="0"/>
+          </a:xfrm>
+          <a:prstGeom prst="bentConnector3">
+            <a:avLst/>
+          </a:prstGeom>
+          <a:ln w="31750">
+            <a:solidFill>
+              <a:srgbClr val="EE0000"/>
+            </a:solidFill>
+          </a:ln>
+          <a:effectLst/>
+        </p:spPr>
+        <p:style>
+          <a:lnRef idx="2">
+            <a:schemeClr val="accent1"/>
+          </a:lnRef>
+          <a:fillRef idx="0">
+            <a:schemeClr val="accent1"/>
+          </a:fillRef>
+          <a:effectRef idx="1">
+            <a:schemeClr val="accent1"/>
+          </a:effectRef>
+          <a:fontRef idx="minor">
+            <a:schemeClr val="tx1"/>
+          </a:fontRef>
+        </p:style>
+      </p:cxnSp>
+      <p:sp>
+        <p:nvSpPr>
+          <p:cNvPr id="6" name="Rounded Rectangle 5"/>
+          <p:cNvSpPr/>
+          <p:nvPr/>
+        </p:nvSpPr>
+        <p:spPr>
+          <a:xfrm>
+            <a:off x="841248" y="2331720"/>
+            <a:ext cx="10509199" cy="3794760"/>
+          </a:xfrm>
+          <a:prstGeom prst="roundRect">
+            <a:avLst>
+              <a:gd name="adj" fmla="val 4000"/>
+            </a:avLst>
+          </a:prstGeom>
+          <a:solidFill>
+            <a:srgbClr val="FFFFFF"/>
+          </a:solidFill>
+          <a:ln w="15240">
+            <a:solidFill>
+              <a:srgbClr val="DDE1E6"/>
+            </a:solidFill>
+          </a:ln>
+          <a:effectLst/>
+        </p:spPr>
+        <p:style>
+          <a:lnRef idx="1">
+            <a:schemeClr val="accent1"/>
+          </a:lnRef>
+          <a:fillRef idx="3">
+            <a:schemeClr val="accent1"/>
+          </a:fillRef>
+          <a:effectRef idx="2">
+            <a:schemeClr val="accent1"/>
+          </a:effectRef>
+          <a:fontRef idx="minor">
+            <a:schemeClr val="lt1"/>
+          </a:fontRef>
+        </p:style>
+        <p:txBody>
+          <a:bodyPr rtlCol="0" anchor="ctr"/>
+          <a:lstStyle/>
+          <a:p>
+            <a:pPr algn="ctr"/>
+          </a:p>
+        </p:txBody>
+      </p:sp>
+      <p:pic>
+        <p:nvPicPr>
+          <p:cNvPr id="7" name="Picture 6" descr="01-three-signals.png"/>
+          <p:cNvPicPr>
+            <a:picLocks noChangeAspect="1"/>
+          </p:cNvPicPr>
+          <p:nvPr/>
+        </p:nvPicPr>
+        <p:blipFill>
+          <a:blip r:embed="rId3"/>
+          <a:stretch>
+            <a:fillRect/>
+          </a:stretch>
+        </p:blipFill>
+        <p:spPr>
+          <a:xfrm>
+            <a:off x="2857256" y="2532887"/>
+            <a:ext cx="6477181" cy="3392424"/>
+          </a:xfrm>
+          <a:prstGeom prst="rect">
+            <a:avLst/>
+          </a:prstGeom>
+        </p:spPr>
+      </p:pic>
+      <p:cxnSp>
+        <p:nvCxnSpPr>
+          <p:cNvPr id="8" name="Connector 7"/>
+          <p:cNvCxnSpPr/>
+          <p:nvPr/>
+        </p:nvCxnSpPr>
+        <p:spPr>
+          <a:xfrm>
+            <a:off x="841248" y="6437376"/>
+            <a:ext cx="10509199" cy="0"/>
+          </a:xfrm>
+          <a:prstGeom prst="bentConnector3">
+            <a:avLst/>
+          </a:prstGeom>
+          <a:ln w="12700">
+            <a:solidFill>
+              <a:srgbClr val="DDE1E6"/>
+            </a:solidFill>
+          </a:ln>
+          <a:effectLst/>
+        </p:spPr>
+        <p:style>
+          <a:lnRef idx="2">
+            <a:schemeClr val="accent1"/>
+          </a:lnRef>
+          <a:fillRef idx="0">
+            <a:schemeClr val="accent1"/>
+          </a:fillRef>
+          <a:effectRef idx="1">
+            <a:schemeClr val="accent1"/>
+          </a:effectRef>
+          <a:fontRef idx="minor">
+            <a:schemeClr val="tx1"/>
+          </a:fontRef>
+        </p:style>
+      </p:cxnSp>
+      <p:sp>
+        <p:nvSpPr>
+          <p:cNvPr id="9" name="TextBox 8"/>
+          <p:cNvSpPr txBox="1"/>
+          <p:nvPr/>
+        </p:nvSpPr>
+        <p:spPr>
+          <a:xfrm>
+            <a:off x="841248" y="6473952"/>
+            <a:ext cx="7315200" cy="274320"/>
+          </a:xfrm>
+          <a:prstGeom prst="rect">
+            <a:avLst/>
+          </a:prstGeom>
+          <a:noFill/>
+        </p:spPr>
+        <p:txBody>
+          <a:bodyPr wrap="square" anchor="t" lIns="0" rIns="0" tIns="0" bIns="0">
+            <a:spAutoFit/>
+          </a:bodyPr>
+          <a:lstStyle/>
+          <a:p>
+            <a:pPr algn="l">
+              <a:lnSpc>
+                <a:spcPct val="106000"/>
+              </a:lnSpc>
+              <a:spcBef>
+                <a:spcPts val="0"/>
+              </a:spcBef>
+              <a:spcAft>
+                <a:spcPts val="0"/>
+              </a:spcAft>
+            </a:pPr>
+            <a:r>
+              <a:rPr sz="950" b="0">
+                <a:solidFill>
+                  <a:srgbClr val="8A9099"/>
+                </a:solidFill>
+                <a:latin typeface="Red Hat Text"/>
+              </a:rPr>
+              <a:t>CONFIDENTIAL</a:t>
+            </a:r>
+          </a:p>
+        </p:txBody>
+      </p:sp>
+      <p:sp>
+        <p:nvSpPr>
+          <p:cNvPr id="10" name="TextBox 9"/>
+          <p:cNvSpPr txBox="1"/>
+          <p:nvPr/>
+        </p:nvSpPr>
+        <p:spPr>
+          <a:xfrm>
+            <a:off x="10801807" y="6473952"/>
+            <a:ext cx="548640" cy="274320"/>
+          </a:xfrm>
+          <a:prstGeom prst="rect">
+            <a:avLst/>
+          </a:prstGeom>
+          <a:noFill/>
+        </p:spPr>
+        <p:txBody>
+          <a:bodyPr wrap="square" anchor="t" lIns="0" rIns="0" tIns="0" bIns="0">
+            <a:spAutoFit/>
+          </a:bodyPr>
+          <a:lstStyle/>
+          <a:p>
+            <a:pPr algn="r">
+              <a:lnSpc>
+                <a:spcPct val="106000"/>
+              </a:lnSpc>
+              <a:spcBef>
+                <a:spcPts val="0"/>
+              </a:spcBef>
+              <a:spcAft>
+                <a:spcPts val="0"/>
+              </a:spcAft>
+            </a:pPr>
+            <a:r>
+              <a:rPr sz="950" b="0">
+                <a:solidFill>
+                  <a:srgbClr val="8A9099"/>
+                </a:solidFill>
+                <a:latin typeface="Red Hat Text"/>
+              </a:rPr>
+              <a:t>9</a:t>
+            </a:r>
+          </a:p>
+        </p:txBody>
+      </p:sp>
+    </p:spTree>
+  </p:cSld>
+  <p:clrMapOvr>
+    <a:masterClrMapping/>
+  </p:clrMapOvr>
+</p:sld>
+</file>
+
+<file path=ppt/slides/slide11.xml><?xml version="1.0" encoding="utf-8"?>
+<p:sld xmlns:a="http://schemas.openxmlformats.org/drawingml/2006/main" xmlns:p="http://schemas.openxmlformats.org/presentationml/2006/main" xmlns:r="http://schemas.openxmlformats.org/officeDocument/2006/relationships">
+  <p:cSld>
+    <p:spTree>
+      <p:nvGrpSpPr>
+        <p:cNvPr id="1" name=""/>
+        <p:cNvGrpSpPr/>
+        <p:nvPr/>
+      </p:nvGrpSpPr>
+      <p:grpSpPr/>
+      <p:pic>
+        <p:nvPicPr>
+          <p:cNvPr id="2" name="Picture 1" descr="redhat_logo.jpg"/>
+          <p:cNvPicPr>
+            <a:picLocks noChangeAspect="1"/>
+          </p:cNvPicPr>
+          <p:nvPr/>
+        </p:nvPicPr>
+        <p:blipFill>
+          <a:blip r:embed="rId2"/>
+          <a:stretch>
+            <a:fillRect/>
+          </a:stretch>
+        </p:blipFill>
+        <p:spPr>
+          <a:xfrm>
+            <a:off x="10326319" y="475488"/>
+            <a:ext cx="1024128" cy="242248"/>
+          </a:xfrm>
+          <a:prstGeom prst="rect">
+            <a:avLst/>
+          </a:prstGeom>
+        </p:spPr>
+      </p:pic>
+      <p:sp>
+        <p:nvSpPr>
+          <p:cNvPr id="3" name="TextBox 2"/>
+          <p:cNvSpPr txBox="1"/>
+          <p:nvPr/>
+        </p:nvSpPr>
+        <p:spPr>
+          <a:xfrm>
+            <a:off x="841248" y="548640"/>
+            <a:ext cx="8595360" cy="274320"/>
+          </a:xfrm>
+          <a:prstGeom prst="rect">
+            <a:avLst/>
+          </a:prstGeom>
+          <a:noFill/>
+        </p:spPr>
+        <p:txBody>
+          <a:bodyPr wrap="square" anchor="t" lIns="0" rIns="0" tIns="0" bIns="0">
+            <a:spAutoFit/>
+          </a:bodyPr>
+          <a:lstStyle/>
+          <a:p>
+            <a:pPr algn="l">
+              <a:lnSpc>
+                <a:spcPct val="106000"/>
+              </a:lnSpc>
+              <a:spcBef>
+                <a:spcPts val="0"/>
+              </a:spcBef>
+              <a:spcAft>
+                <a:spcPts val="0"/>
+              </a:spcAft>
+            </a:pPr>
+            <a:r>
+              <a:rPr sz="1250" b="1" spc="220">
+                <a:solidFill>
+                  <a:srgbClr val="EE0000"/>
+                </a:solidFill>
+                <a:latin typeface="Red Hat Display"/>
+              </a:rPr>
+              <a:t>M13 · OBSERVABILITY, HEALTH &amp; SCALE</a:t>
+            </a:r>
+          </a:p>
+        </p:txBody>
+      </p:sp>
+      <p:sp>
+        <p:nvSpPr>
+          <p:cNvPr id="4" name="TextBox 3"/>
+          <p:cNvSpPr txBox="1"/>
+          <p:nvPr/>
+        </p:nvSpPr>
+        <p:spPr>
+          <a:xfrm>
+            <a:off x="841248" y="877824"/>
+            <a:ext cx="10515600" cy="548640"/>
+          </a:xfrm>
+          <a:prstGeom prst="rect">
+            <a:avLst/>
+          </a:prstGeom>
+          <a:noFill/>
+        </p:spPr>
+        <p:txBody>
+          <a:bodyPr wrap="none" anchor="t" lIns="0" rIns="0" tIns="0" bIns="0">
+            <a:spAutoFit/>
+          </a:bodyPr>
+          <a:lstStyle/>
+          <a:p>
+            <a:pPr algn="l">
+              <a:lnSpc>
+                <a:spcPct val="100000"/>
+              </a:lnSpc>
+              <a:spcBef>
+                <a:spcPts val="0"/>
+              </a:spcBef>
+              <a:spcAft>
+                <a:spcPts val="0"/>
+              </a:spcAft>
+            </a:pPr>
+            <a:r>
+              <a:rPr sz="2500" b="1">
+                <a:solidFill>
+                  <a:srgbClr val="1A1A1A"/>
+                </a:solidFill>
+                <a:latin typeface="Red Hat Display"/>
+              </a:rPr>
+              <a:t>Servicemonitor bridge</a:t>
+            </a:r>
+          </a:p>
+        </p:txBody>
+      </p:sp>
+      <p:cxnSp>
+        <p:nvCxnSpPr>
+          <p:cNvPr id="5" name="Connector 4"/>
+          <p:cNvCxnSpPr/>
+          <p:nvPr/>
+        </p:nvCxnSpPr>
+        <p:spPr>
+          <a:xfrm>
+            <a:off x="841248" y="1554480"/>
+            <a:ext cx="1371600" cy="0"/>
+          </a:xfrm>
+          <a:prstGeom prst="bentConnector3">
+            <a:avLst/>
+          </a:prstGeom>
+          <a:ln w="31750">
+            <a:solidFill>
+              <a:srgbClr val="EE0000"/>
+            </a:solidFill>
+          </a:ln>
+          <a:effectLst/>
+        </p:spPr>
+        <p:style>
+          <a:lnRef idx="2">
+            <a:schemeClr val="accent1"/>
+          </a:lnRef>
+          <a:fillRef idx="0">
+            <a:schemeClr val="accent1"/>
+          </a:fillRef>
+          <a:effectRef idx="1">
+            <a:schemeClr val="accent1"/>
+          </a:effectRef>
+          <a:fontRef idx="minor">
+            <a:schemeClr val="tx1"/>
+          </a:fontRef>
+        </p:style>
+      </p:cxnSp>
+      <p:sp>
+        <p:nvSpPr>
+          <p:cNvPr id="6" name="Rounded Rectangle 5"/>
+          <p:cNvSpPr/>
+          <p:nvPr/>
+        </p:nvSpPr>
+        <p:spPr>
+          <a:xfrm>
+            <a:off x="841248" y="2331720"/>
+            <a:ext cx="10509199" cy="3794760"/>
+          </a:xfrm>
+          <a:prstGeom prst="roundRect">
+            <a:avLst>
+              <a:gd name="adj" fmla="val 4000"/>
+            </a:avLst>
+          </a:prstGeom>
+          <a:solidFill>
+            <a:srgbClr val="FFFFFF"/>
+          </a:solidFill>
+          <a:ln w="15240">
+            <a:solidFill>
+              <a:srgbClr val="DDE1E6"/>
+            </a:solidFill>
+          </a:ln>
+          <a:effectLst/>
+        </p:spPr>
+        <p:style>
+          <a:lnRef idx="1">
+            <a:schemeClr val="accent1"/>
+          </a:lnRef>
+          <a:fillRef idx="3">
+            <a:schemeClr val="accent1"/>
+          </a:fillRef>
+          <a:effectRef idx="2">
+            <a:schemeClr val="accent1"/>
+          </a:effectRef>
+          <a:fontRef idx="minor">
+            <a:schemeClr val="lt1"/>
+          </a:fontRef>
+        </p:style>
+        <p:txBody>
+          <a:bodyPr rtlCol="0" anchor="ctr"/>
+          <a:lstStyle/>
+          <a:p>
+            <a:pPr algn="ctr"/>
+          </a:p>
+        </p:txBody>
+      </p:sp>
+      <p:pic>
+        <p:nvPicPr>
+          <p:cNvPr id="7" name="Picture 6" descr="02-servicemonitor-bridge.png"/>
+          <p:cNvPicPr>
+            <a:picLocks noChangeAspect="1"/>
+          </p:cNvPicPr>
+          <p:nvPr/>
+        </p:nvPicPr>
+        <p:blipFill>
+          <a:blip r:embed="rId3"/>
+          <a:stretch>
+            <a:fillRect/>
+          </a:stretch>
+        </p:blipFill>
+        <p:spPr>
+          <a:xfrm>
+            <a:off x="1042416" y="2984692"/>
+            <a:ext cx="10106863" cy="2488815"/>
+          </a:xfrm>
+          <a:prstGeom prst="rect">
+            <a:avLst/>
+          </a:prstGeom>
+        </p:spPr>
+      </p:pic>
+      <p:cxnSp>
+        <p:nvCxnSpPr>
+          <p:cNvPr id="8" name="Connector 7"/>
+          <p:cNvCxnSpPr/>
+          <p:nvPr/>
+        </p:nvCxnSpPr>
+        <p:spPr>
+          <a:xfrm>
+            <a:off x="841248" y="6437376"/>
+            <a:ext cx="10509199" cy="0"/>
+          </a:xfrm>
+          <a:prstGeom prst="bentConnector3">
+            <a:avLst/>
+          </a:prstGeom>
+          <a:ln w="12700">
+            <a:solidFill>
+              <a:srgbClr val="DDE1E6"/>
+            </a:solidFill>
+          </a:ln>
+          <a:effectLst/>
+        </p:spPr>
+        <p:style>
+          <a:lnRef idx="2">
+            <a:schemeClr val="accent1"/>
+          </a:lnRef>
+          <a:fillRef idx="0">
+            <a:schemeClr val="accent1"/>
+          </a:fillRef>
+          <a:effectRef idx="1">
+            <a:schemeClr val="accent1"/>
+          </a:effectRef>
+          <a:fontRef idx="minor">
+            <a:schemeClr val="tx1"/>
+          </a:fontRef>
+        </p:style>
+      </p:cxnSp>
+      <p:sp>
+        <p:nvSpPr>
+          <p:cNvPr id="9" name="TextBox 8"/>
+          <p:cNvSpPr txBox="1"/>
+          <p:nvPr/>
+        </p:nvSpPr>
+        <p:spPr>
+          <a:xfrm>
+            <a:off x="841248" y="6473952"/>
+            <a:ext cx="7315200" cy="274320"/>
+          </a:xfrm>
+          <a:prstGeom prst="rect">
+            <a:avLst/>
+          </a:prstGeom>
+          <a:noFill/>
+        </p:spPr>
+        <p:txBody>
+          <a:bodyPr wrap="square" anchor="t" lIns="0" rIns="0" tIns="0" bIns="0">
+            <a:spAutoFit/>
+          </a:bodyPr>
+          <a:lstStyle/>
+          <a:p>
+            <a:pPr algn="l">
+              <a:lnSpc>
+                <a:spcPct val="106000"/>
+              </a:lnSpc>
+              <a:spcBef>
+                <a:spcPts val="0"/>
+              </a:spcBef>
+              <a:spcAft>
+                <a:spcPts val="0"/>
+              </a:spcAft>
+            </a:pPr>
+            <a:r>
+              <a:rPr sz="950" b="0">
+                <a:solidFill>
+                  <a:srgbClr val="8A9099"/>
+                </a:solidFill>
+                <a:latin typeface="Red Hat Text"/>
+              </a:rPr>
+              <a:t>CONFIDENTIAL</a:t>
+            </a:r>
+          </a:p>
+        </p:txBody>
+      </p:sp>
+      <p:sp>
+        <p:nvSpPr>
+          <p:cNvPr id="10" name="TextBox 9"/>
+          <p:cNvSpPr txBox="1"/>
+          <p:nvPr/>
+        </p:nvSpPr>
+        <p:spPr>
+          <a:xfrm>
+            <a:off x="10801807" y="6473952"/>
+            <a:ext cx="548640" cy="274320"/>
+          </a:xfrm>
+          <a:prstGeom prst="rect">
+            <a:avLst/>
+          </a:prstGeom>
+          <a:noFill/>
+        </p:spPr>
+        <p:txBody>
+          <a:bodyPr wrap="square" anchor="t" lIns="0" rIns="0" tIns="0" bIns="0">
+            <a:spAutoFit/>
+          </a:bodyPr>
+          <a:lstStyle/>
+          <a:p>
+            <a:pPr algn="r">
+              <a:lnSpc>
+                <a:spcPct val="106000"/>
+              </a:lnSpc>
+              <a:spcBef>
+                <a:spcPts val="0"/>
+              </a:spcBef>
+              <a:spcAft>
+                <a:spcPts val="0"/>
+              </a:spcAft>
+            </a:pPr>
+            <a:r>
+              <a:rPr sz="950" b="0">
+                <a:solidFill>
+                  <a:srgbClr val="8A9099"/>
+                </a:solidFill>
+                <a:latin typeface="Red Hat Text"/>
+              </a:rPr>
+              <a:t>10</a:t>
+            </a:r>
+          </a:p>
+        </p:txBody>
+      </p:sp>
+    </p:spTree>
+  </p:cSld>
+  <p:clrMapOvr>
+    <a:masterClrMapping/>
+  </p:clrMapOvr>
+</p:sld>
+</file>
+
+<file path=ppt/slides/slide12.xml><?xml version="1.0" encoding="utf-8"?>
+<p:sld xmlns:a="http://schemas.openxmlformats.org/drawingml/2006/main" xmlns:p="http://schemas.openxmlformats.org/presentationml/2006/main" xmlns:r="http://schemas.openxmlformats.org/officeDocument/2006/relationships">
+  <p:cSld>
+    <p:spTree>
+      <p:nvGrpSpPr>
+        <p:cNvPr id="1" name=""/>
+        <p:cNvGrpSpPr/>
+        <p:nvPr/>
+      </p:nvGrpSpPr>
+      <p:grpSpPr/>
+      <p:pic>
+        <p:nvPicPr>
+          <p:cNvPr id="2" name="Picture 1" descr="redhat_logo.jpg"/>
+          <p:cNvPicPr>
+            <a:picLocks noChangeAspect="1"/>
+          </p:cNvPicPr>
+          <p:nvPr/>
+        </p:nvPicPr>
+        <p:blipFill>
+          <a:blip r:embed="rId2"/>
+          <a:stretch>
+            <a:fillRect/>
+          </a:stretch>
+        </p:blipFill>
+        <p:spPr>
+          <a:xfrm>
+            <a:off x="10326319" y="475488"/>
+            <a:ext cx="1024128" cy="242248"/>
+          </a:xfrm>
+          <a:prstGeom prst="rect">
+            <a:avLst/>
+          </a:prstGeom>
+        </p:spPr>
+      </p:pic>
+      <p:sp>
+        <p:nvSpPr>
+          <p:cNvPr id="3" name="TextBox 2"/>
+          <p:cNvSpPr txBox="1"/>
+          <p:nvPr/>
+        </p:nvSpPr>
+        <p:spPr>
+          <a:xfrm>
+            <a:off x="841248" y="548640"/>
+            <a:ext cx="8595360" cy="274320"/>
+          </a:xfrm>
+          <a:prstGeom prst="rect">
+            <a:avLst/>
+          </a:prstGeom>
+          <a:noFill/>
+        </p:spPr>
+        <p:txBody>
+          <a:bodyPr wrap="square" anchor="t" lIns="0" rIns="0" tIns="0" bIns="0">
+            <a:spAutoFit/>
+          </a:bodyPr>
+          <a:lstStyle/>
+          <a:p>
+            <a:pPr algn="l">
+              <a:lnSpc>
+                <a:spcPct val="106000"/>
+              </a:lnSpc>
+              <a:spcBef>
+                <a:spcPts val="0"/>
+              </a:spcBef>
+              <a:spcAft>
+                <a:spcPts val="0"/>
+              </a:spcAft>
+            </a:pPr>
+            <a:r>
+              <a:rPr sz="1250" b="1" spc="220">
+                <a:solidFill>
+                  <a:srgbClr val="EE0000"/>
+                </a:solidFill>
+                <a:latin typeface="Red Hat Display"/>
+              </a:rPr>
+              <a:t>M13 · OBSERVABILITY, HEALTH &amp; SCALE</a:t>
+            </a:r>
+          </a:p>
+        </p:txBody>
+      </p:sp>
+      <p:sp>
+        <p:nvSpPr>
+          <p:cNvPr id="4" name="TextBox 3"/>
+          <p:cNvSpPr txBox="1"/>
+          <p:nvPr/>
+        </p:nvSpPr>
+        <p:spPr>
+          <a:xfrm>
+            <a:off x="841248" y="877824"/>
+            <a:ext cx="10515600" cy="548640"/>
+          </a:xfrm>
+          <a:prstGeom prst="rect">
+            <a:avLst/>
+          </a:prstGeom>
+          <a:noFill/>
+        </p:spPr>
+        <p:txBody>
+          <a:bodyPr wrap="none" anchor="t" lIns="0" rIns="0" tIns="0" bIns="0">
+            <a:spAutoFit/>
+          </a:bodyPr>
+          <a:lstStyle/>
+          <a:p>
+            <a:pPr algn="l">
+              <a:lnSpc>
+                <a:spcPct val="100000"/>
+              </a:lnSpc>
+              <a:spcBef>
+                <a:spcPts val="0"/>
+              </a:spcBef>
+              <a:spcAft>
+                <a:spcPts val="0"/>
+              </a:spcAft>
+            </a:pPr>
+            <a:r>
+              <a:rPr sz="2500" b="1">
+                <a:solidFill>
+                  <a:srgbClr val="1A1A1A"/>
+                </a:solidFill>
+                <a:latin typeface="Red Hat Display"/>
+              </a:rPr>
+              <a:t>Scaling decision tree</a:t>
+            </a:r>
+          </a:p>
+        </p:txBody>
+      </p:sp>
+      <p:cxnSp>
+        <p:nvCxnSpPr>
+          <p:cNvPr id="5" name="Connector 4"/>
+          <p:cNvCxnSpPr/>
+          <p:nvPr/>
+        </p:nvCxnSpPr>
+        <p:spPr>
+          <a:xfrm>
+            <a:off x="841248" y="1554480"/>
+            <a:ext cx="1371600" cy="0"/>
+          </a:xfrm>
+          <a:prstGeom prst="bentConnector3">
+            <a:avLst/>
+          </a:prstGeom>
+          <a:ln w="31750">
+            <a:solidFill>
+              <a:srgbClr val="EE0000"/>
+            </a:solidFill>
+          </a:ln>
+          <a:effectLst/>
+        </p:spPr>
+        <p:style>
+          <a:lnRef idx="2">
+            <a:schemeClr val="accent1"/>
+          </a:lnRef>
+          <a:fillRef idx="0">
+            <a:schemeClr val="accent1"/>
+          </a:fillRef>
+          <a:effectRef idx="1">
+            <a:schemeClr val="accent1"/>
+          </a:effectRef>
+          <a:fontRef idx="minor">
+            <a:schemeClr val="tx1"/>
+          </a:fontRef>
+        </p:style>
+      </p:cxnSp>
+      <p:sp>
+        <p:nvSpPr>
+          <p:cNvPr id="6" name="Rounded Rectangle 5"/>
+          <p:cNvSpPr/>
+          <p:nvPr/>
+        </p:nvSpPr>
+        <p:spPr>
+          <a:xfrm>
+            <a:off x="841248" y="2331720"/>
+            <a:ext cx="10509199" cy="3794760"/>
+          </a:xfrm>
+          <a:prstGeom prst="roundRect">
+            <a:avLst>
+              <a:gd name="adj" fmla="val 4000"/>
+            </a:avLst>
+          </a:prstGeom>
+          <a:solidFill>
+            <a:srgbClr val="FFFFFF"/>
+          </a:solidFill>
+          <a:ln w="15240">
+            <a:solidFill>
+              <a:srgbClr val="DDE1E6"/>
+            </a:solidFill>
+          </a:ln>
+          <a:effectLst/>
+        </p:spPr>
+        <p:style>
+          <a:lnRef idx="1">
+            <a:schemeClr val="accent1"/>
+          </a:lnRef>
+          <a:fillRef idx="3">
+            <a:schemeClr val="accent1"/>
+          </a:fillRef>
+          <a:effectRef idx="2">
+            <a:schemeClr val="accent1"/>
+          </a:effectRef>
+          <a:fontRef idx="minor">
+            <a:schemeClr val="lt1"/>
+          </a:fontRef>
+        </p:style>
+        <p:txBody>
+          <a:bodyPr rtlCol="0" anchor="ctr"/>
+          <a:lstStyle/>
+          <a:p>
+            <a:pPr algn="ctr"/>
+          </a:p>
+        </p:txBody>
+      </p:sp>
+      <p:pic>
+        <p:nvPicPr>
+          <p:cNvPr id="7" name="Picture 6" descr="03-scaling-decision-tree.png"/>
+          <p:cNvPicPr>
+            <a:picLocks noChangeAspect="1"/>
+          </p:cNvPicPr>
+          <p:nvPr/>
+        </p:nvPicPr>
+        <p:blipFill>
+          <a:blip r:embed="rId3"/>
+          <a:stretch>
+            <a:fillRect/>
+          </a:stretch>
+        </p:blipFill>
+        <p:spPr>
+          <a:xfrm>
+            <a:off x="1632131" y="2532888"/>
+            <a:ext cx="8927431" cy="3392424"/>
+          </a:xfrm>
+          <a:prstGeom prst="rect">
+            <a:avLst/>
+          </a:prstGeom>
+        </p:spPr>
+      </p:pic>
+      <p:cxnSp>
+        <p:nvCxnSpPr>
+          <p:cNvPr id="8" name="Connector 7"/>
+          <p:cNvCxnSpPr/>
+          <p:nvPr/>
+        </p:nvCxnSpPr>
+        <p:spPr>
+          <a:xfrm>
+            <a:off x="841248" y="6437376"/>
+            <a:ext cx="10509199" cy="0"/>
+          </a:xfrm>
+          <a:prstGeom prst="bentConnector3">
+            <a:avLst/>
+          </a:prstGeom>
+          <a:ln w="12700">
+            <a:solidFill>
+              <a:srgbClr val="DDE1E6"/>
+            </a:solidFill>
+          </a:ln>
+          <a:effectLst/>
+        </p:spPr>
+        <p:style>
+          <a:lnRef idx="2">
+            <a:schemeClr val="accent1"/>
+          </a:lnRef>
+          <a:fillRef idx="0">
+            <a:schemeClr val="accent1"/>
+          </a:fillRef>
+          <a:effectRef idx="1">
+            <a:schemeClr val="accent1"/>
+          </a:effectRef>
+          <a:fontRef idx="minor">
+            <a:schemeClr val="tx1"/>
+          </a:fontRef>
+        </p:style>
+      </p:cxnSp>
+      <p:sp>
+        <p:nvSpPr>
+          <p:cNvPr id="9" name="TextBox 8"/>
+          <p:cNvSpPr txBox="1"/>
+          <p:nvPr/>
+        </p:nvSpPr>
+        <p:spPr>
+          <a:xfrm>
+            <a:off x="841248" y="6473952"/>
+            <a:ext cx="7315200" cy="274320"/>
+          </a:xfrm>
+          <a:prstGeom prst="rect">
+            <a:avLst/>
+          </a:prstGeom>
+          <a:noFill/>
+        </p:spPr>
+        <p:txBody>
+          <a:bodyPr wrap="square" anchor="t" lIns="0" rIns="0" tIns="0" bIns="0">
+            <a:spAutoFit/>
+          </a:bodyPr>
+          <a:lstStyle/>
+          <a:p>
+            <a:pPr algn="l">
+              <a:lnSpc>
+                <a:spcPct val="106000"/>
+              </a:lnSpc>
+              <a:spcBef>
+                <a:spcPts val="0"/>
+              </a:spcBef>
+              <a:spcAft>
+                <a:spcPts val="0"/>
+              </a:spcAft>
+            </a:pPr>
+            <a:r>
+              <a:rPr sz="950" b="0">
+                <a:solidFill>
+                  <a:srgbClr val="8A9099"/>
+                </a:solidFill>
+                <a:latin typeface="Red Hat Text"/>
+              </a:rPr>
+              <a:t>CONFIDENTIAL</a:t>
+            </a:r>
+          </a:p>
+        </p:txBody>
+      </p:sp>
+      <p:sp>
+        <p:nvSpPr>
+          <p:cNvPr id="10" name="TextBox 9"/>
+          <p:cNvSpPr txBox="1"/>
+          <p:nvPr/>
+        </p:nvSpPr>
+        <p:spPr>
+          <a:xfrm>
+            <a:off x="10801807" y="6473952"/>
+            <a:ext cx="548640" cy="274320"/>
+          </a:xfrm>
+          <a:prstGeom prst="rect">
+            <a:avLst/>
+          </a:prstGeom>
+          <a:noFill/>
+        </p:spPr>
+        <p:txBody>
+          <a:bodyPr wrap="square" anchor="t" lIns="0" rIns="0" tIns="0" bIns="0">
+            <a:spAutoFit/>
+          </a:bodyPr>
+          <a:lstStyle/>
+          <a:p>
+            <a:pPr algn="r">
+              <a:lnSpc>
+                <a:spcPct val="106000"/>
+              </a:lnSpc>
+              <a:spcBef>
+                <a:spcPts val="0"/>
+              </a:spcBef>
+              <a:spcAft>
+                <a:spcPts val="0"/>
+              </a:spcAft>
+            </a:pPr>
+            <a:r>
+              <a:rPr sz="950" b="0">
+                <a:solidFill>
+                  <a:srgbClr val="8A9099"/>
+                </a:solidFill>
+                <a:latin typeface="Red Hat Text"/>
+              </a:rPr>
+              <a:t>11</a:t>
+            </a:r>
+          </a:p>
+        </p:txBody>
+      </p:sp>
+    </p:spTree>
+  </p:cSld>
+  <p:clrMapOvr>
+    <a:masterClrMapping/>
+  </p:clrMapOvr>
+</p:sld>
+</file>
+
+<file path=ppt/slides/slide13.xml><?xml version="1.0" encoding="utf-8"?>
+<p:sld xmlns:a="http://schemas.openxmlformats.org/drawingml/2006/main" xmlns:p="http://schemas.openxmlformats.org/presentationml/2006/main" xmlns:r="http://schemas.openxmlformats.org/officeDocument/2006/relationships">
+  <p:cSld>
+    <p:spTree>
+      <p:nvGrpSpPr>
+        <p:cNvPr id="1" name=""/>
+        <p:cNvGrpSpPr/>
+        <p:nvPr/>
+      </p:nvGrpSpPr>
+      <p:grpSpPr/>
+      <p:pic>
+        <p:nvPicPr>
+          <p:cNvPr id="2" name="Picture 1" descr="redhat_logo.jpg"/>
+          <p:cNvPicPr>
+            <a:picLocks noChangeAspect="1"/>
+          </p:cNvPicPr>
+          <p:nvPr/>
+        </p:nvPicPr>
+        <p:blipFill>
+          <a:blip r:embed="rId2"/>
+          <a:stretch>
+            <a:fillRect/>
+          </a:stretch>
+        </p:blipFill>
+        <p:spPr>
+          <a:xfrm>
+            <a:off x="10326319" y="475488"/>
+            <a:ext cx="1024128" cy="242248"/>
+          </a:xfrm>
+          <a:prstGeom prst="rect">
+            <a:avLst/>
+          </a:prstGeom>
+        </p:spPr>
+      </p:pic>
+      <p:sp>
+        <p:nvSpPr>
+          <p:cNvPr id="3" name="TextBox 2"/>
+          <p:cNvSpPr txBox="1"/>
+          <p:nvPr/>
+        </p:nvSpPr>
+        <p:spPr>
+          <a:xfrm>
+            <a:off x="841248" y="548640"/>
+            <a:ext cx="8595360" cy="274320"/>
+          </a:xfrm>
+          <a:prstGeom prst="rect">
+            <a:avLst/>
+          </a:prstGeom>
+          <a:noFill/>
+        </p:spPr>
+        <p:txBody>
+          <a:bodyPr wrap="square" anchor="t" lIns="0" rIns="0" tIns="0" bIns="0">
+            <a:spAutoFit/>
+          </a:bodyPr>
+          <a:lstStyle/>
+          <a:p>
+            <a:pPr algn="l">
+              <a:lnSpc>
+                <a:spcPct val="106000"/>
+              </a:lnSpc>
+              <a:spcBef>
+                <a:spcPts val="0"/>
+              </a:spcBef>
+              <a:spcAft>
+                <a:spcPts val="0"/>
+              </a:spcAft>
+            </a:pPr>
+            <a:r>
+              <a:rPr sz="1250" b="1" spc="220">
+                <a:solidFill>
+                  <a:srgbClr val="EE0000"/>
+                </a:solidFill>
+                <a:latin typeface="Red Hat Display"/>
+              </a:rPr>
+              <a:t>M13 · OBSERVABILITY, HEALTH &amp; SCALE</a:t>
+            </a:r>
+          </a:p>
+        </p:txBody>
+      </p:sp>
+      <p:sp>
+        <p:nvSpPr>
+          <p:cNvPr id="4" name="TextBox 3"/>
+          <p:cNvSpPr txBox="1"/>
+          <p:nvPr/>
+        </p:nvSpPr>
+        <p:spPr>
+          <a:xfrm>
+            <a:off x="841248" y="877824"/>
+            <a:ext cx="10515600" cy="548640"/>
+          </a:xfrm>
+          <a:prstGeom prst="rect">
+            <a:avLst/>
+          </a:prstGeom>
+          <a:noFill/>
+        </p:spPr>
+        <p:txBody>
+          <a:bodyPr wrap="none" anchor="t" lIns="0" rIns="0" tIns="0" bIns="0">
+            <a:spAutoFit/>
+          </a:bodyPr>
+          <a:lstStyle/>
+          <a:p>
+            <a:pPr algn="l">
+              <a:lnSpc>
+                <a:spcPct val="100000"/>
+              </a:lnSpc>
+              <a:spcBef>
+                <a:spcPts val="0"/>
+              </a:spcBef>
+              <a:spcAft>
+                <a:spcPts val="0"/>
+              </a:spcAft>
+            </a:pPr>
+            <a:r>
+              <a:rPr sz="2500" b="1">
+                <a:solidFill>
+                  <a:srgbClr val="1A1A1A"/>
+                </a:solidFill>
+                <a:latin typeface="Red Hat Display"/>
+              </a:rPr>
+              <a:t>Platform accretion</a:t>
+            </a:r>
+          </a:p>
+        </p:txBody>
+      </p:sp>
+      <p:cxnSp>
+        <p:nvCxnSpPr>
+          <p:cNvPr id="5" name="Connector 4"/>
+          <p:cNvCxnSpPr/>
+          <p:nvPr/>
+        </p:nvCxnSpPr>
+        <p:spPr>
+          <a:xfrm>
+            <a:off x="841248" y="1554480"/>
+            <a:ext cx="1371600" cy="0"/>
+          </a:xfrm>
+          <a:prstGeom prst="bentConnector3">
+            <a:avLst/>
+          </a:prstGeom>
+          <a:ln w="31750">
+            <a:solidFill>
+              <a:srgbClr val="EE0000"/>
+            </a:solidFill>
+          </a:ln>
+          <a:effectLst/>
+        </p:spPr>
+        <p:style>
+          <a:lnRef idx="2">
+            <a:schemeClr val="accent1"/>
+          </a:lnRef>
+          <a:fillRef idx="0">
+            <a:schemeClr val="accent1"/>
+          </a:fillRef>
+          <a:effectRef idx="1">
+            <a:schemeClr val="accent1"/>
+          </a:effectRef>
+          <a:fontRef idx="minor">
+            <a:schemeClr val="tx1"/>
+          </a:fontRef>
+        </p:style>
+      </p:cxnSp>
+      <p:sp>
+        <p:nvSpPr>
+          <p:cNvPr id="6" name="Rounded Rectangle 5"/>
+          <p:cNvSpPr/>
+          <p:nvPr/>
+        </p:nvSpPr>
+        <p:spPr>
+          <a:xfrm>
+            <a:off x="841248" y="2331720"/>
+            <a:ext cx="10509199" cy="3794760"/>
+          </a:xfrm>
+          <a:prstGeom prst="roundRect">
+            <a:avLst>
+              <a:gd name="adj" fmla="val 4000"/>
+            </a:avLst>
+          </a:prstGeom>
+          <a:solidFill>
+            <a:srgbClr val="FFFFFF"/>
+          </a:solidFill>
+          <a:ln w="15240">
+            <a:solidFill>
+              <a:srgbClr val="DDE1E6"/>
+            </a:solidFill>
+          </a:ln>
+          <a:effectLst/>
+        </p:spPr>
+        <p:style>
+          <a:lnRef idx="1">
+            <a:schemeClr val="accent1"/>
+          </a:lnRef>
+          <a:fillRef idx="3">
+            <a:schemeClr val="accent1"/>
+          </a:fillRef>
+          <a:effectRef idx="2">
+            <a:schemeClr val="accent1"/>
+          </a:effectRef>
+          <a:fontRef idx="minor">
+            <a:schemeClr val="lt1"/>
+          </a:fontRef>
+        </p:style>
+        <p:txBody>
+          <a:bodyPr rtlCol="0" anchor="ctr"/>
+          <a:lstStyle/>
+          <a:p>
+            <a:pPr algn="ctr"/>
+          </a:p>
+        </p:txBody>
+      </p:sp>
+      <p:pic>
+        <p:nvPicPr>
+          <p:cNvPr id="7" name="Picture 6" descr="04-platform-accretion.png"/>
+          <p:cNvPicPr>
+            <a:picLocks noChangeAspect="1"/>
+          </p:cNvPicPr>
+          <p:nvPr/>
+        </p:nvPicPr>
+        <p:blipFill>
+          <a:blip r:embed="rId3"/>
+          <a:stretch>
+            <a:fillRect/>
+          </a:stretch>
+        </p:blipFill>
+        <p:spPr>
+          <a:xfrm>
+            <a:off x="4683808" y="2532888"/>
+            <a:ext cx="2824078" cy="3392424"/>
+          </a:xfrm>
+          <a:prstGeom prst="rect">
+            <a:avLst/>
+          </a:prstGeom>
+        </p:spPr>
+      </p:pic>
+      <p:cxnSp>
+        <p:nvCxnSpPr>
+          <p:cNvPr id="8" name="Connector 7"/>
+          <p:cNvCxnSpPr/>
+          <p:nvPr/>
+        </p:nvCxnSpPr>
+        <p:spPr>
+          <a:xfrm>
+            <a:off x="841248" y="6437376"/>
+            <a:ext cx="10509199" cy="0"/>
+          </a:xfrm>
+          <a:prstGeom prst="bentConnector3">
+            <a:avLst/>
+          </a:prstGeom>
+          <a:ln w="12700">
+            <a:solidFill>
+              <a:srgbClr val="DDE1E6"/>
+            </a:solidFill>
+          </a:ln>
+          <a:effectLst/>
+        </p:spPr>
+        <p:style>
+          <a:lnRef idx="2">
+            <a:schemeClr val="accent1"/>
+          </a:lnRef>
+          <a:fillRef idx="0">
+            <a:schemeClr val="accent1"/>
+          </a:fillRef>
+          <a:effectRef idx="1">
+            <a:schemeClr val="accent1"/>
+          </a:effectRef>
+          <a:fontRef idx="minor">
+            <a:schemeClr val="tx1"/>
+          </a:fontRef>
+        </p:style>
+      </p:cxnSp>
+      <p:sp>
+        <p:nvSpPr>
+          <p:cNvPr id="9" name="TextBox 8"/>
+          <p:cNvSpPr txBox="1"/>
+          <p:nvPr/>
+        </p:nvSpPr>
+        <p:spPr>
+          <a:xfrm>
+            <a:off x="841248" y="6473952"/>
+            <a:ext cx="7315200" cy="274320"/>
+          </a:xfrm>
+          <a:prstGeom prst="rect">
+            <a:avLst/>
+          </a:prstGeom>
+          <a:noFill/>
+        </p:spPr>
+        <p:txBody>
+          <a:bodyPr wrap="square" anchor="t" lIns="0" rIns="0" tIns="0" bIns="0">
+            <a:spAutoFit/>
+          </a:bodyPr>
+          <a:lstStyle/>
+          <a:p>
+            <a:pPr algn="l">
+              <a:lnSpc>
+                <a:spcPct val="106000"/>
+              </a:lnSpc>
+              <a:spcBef>
+                <a:spcPts val="0"/>
+              </a:spcBef>
+              <a:spcAft>
+                <a:spcPts val="0"/>
+              </a:spcAft>
+            </a:pPr>
+            <a:r>
+              <a:rPr sz="950" b="0">
+                <a:solidFill>
+                  <a:srgbClr val="8A9099"/>
+                </a:solidFill>
+                <a:latin typeface="Red Hat Text"/>
+              </a:rPr>
+              <a:t>CONFIDENTIAL</a:t>
+            </a:r>
+          </a:p>
+        </p:txBody>
+      </p:sp>
+      <p:sp>
+        <p:nvSpPr>
+          <p:cNvPr id="10" name="TextBox 9"/>
+          <p:cNvSpPr txBox="1"/>
+          <p:nvPr/>
+        </p:nvSpPr>
+        <p:spPr>
+          <a:xfrm>
+            <a:off x="10801807" y="6473952"/>
+            <a:ext cx="548640" cy="274320"/>
+          </a:xfrm>
+          <a:prstGeom prst="rect">
+            <a:avLst/>
+          </a:prstGeom>
+          <a:noFill/>
+        </p:spPr>
+        <p:txBody>
+          <a:bodyPr wrap="square" anchor="t" lIns="0" rIns="0" tIns="0" bIns="0">
+            <a:spAutoFit/>
+          </a:bodyPr>
+          <a:lstStyle/>
+          <a:p>
+            <a:pPr algn="r">
+              <a:lnSpc>
+                <a:spcPct val="106000"/>
+              </a:lnSpc>
+              <a:spcBef>
+                <a:spcPts val="0"/>
+              </a:spcBef>
+              <a:spcAft>
+                <a:spcPts val="0"/>
+              </a:spcAft>
+            </a:pPr>
+            <a:r>
+              <a:rPr sz="950" b="0">
+                <a:solidFill>
+                  <a:srgbClr val="8A9099"/>
+                </a:solidFill>
+                <a:latin typeface="Red Hat Text"/>
+              </a:rPr>
+              <a:t>12</a:t>
+            </a:r>
+          </a:p>
+        </p:txBody>
+      </p:sp>
+    </p:spTree>
+  </p:cSld>
+  <p:clrMapOvr>
+    <a:masterClrMapping/>
+  </p:clrMapOvr>
+</p:sld>
+</file>
+
+<file path=ppt/slides/slide14.xml><?xml version="1.0" encoding="utf-8"?>
+<p:sld xmlns:a="http://schemas.openxmlformats.org/drawingml/2006/main" xmlns:p="http://schemas.openxmlformats.org/presentationml/2006/main" xmlns:r="http://schemas.openxmlformats.org/officeDocument/2006/relationships">
+  <p:cSld>
+    <p:spTree>
+      <p:nvGrpSpPr>
+        <p:cNvPr id="1" name=""/>
+        <p:cNvGrpSpPr/>
+        <p:nvPr/>
+      </p:nvGrpSpPr>
+      <p:grpSpPr/>
+      <p:pic>
+        <p:nvPicPr>
+          <p:cNvPr id="2" name="Picture 1" descr="redhat_logo.jpg"/>
+          <p:cNvPicPr>
+            <a:picLocks noChangeAspect="1"/>
+          </p:cNvPicPr>
+          <p:nvPr/>
+        </p:nvPicPr>
+        <p:blipFill>
+          <a:blip r:embed="rId2"/>
+          <a:stretch>
+            <a:fillRect/>
+          </a:stretch>
+        </p:blipFill>
+        <p:spPr>
+          <a:xfrm>
+            <a:off x="10326319" y="475488"/>
+            <a:ext cx="1024128" cy="242248"/>
+          </a:xfrm>
+          <a:prstGeom prst="rect">
+            <a:avLst/>
+          </a:prstGeom>
+        </p:spPr>
+      </p:pic>
+      <p:sp>
+        <p:nvSpPr>
+          <p:cNvPr id="3" name="TextBox 2"/>
+          <p:cNvSpPr txBox="1"/>
+          <p:nvPr/>
+        </p:nvSpPr>
+        <p:spPr>
+          <a:xfrm>
+            <a:off x="841248" y="548640"/>
+            <a:ext cx="8595360" cy="274320"/>
+          </a:xfrm>
+          <a:prstGeom prst="rect">
+            <a:avLst/>
+          </a:prstGeom>
+          <a:noFill/>
+        </p:spPr>
+        <p:txBody>
+          <a:bodyPr wrap="square" anchor="t" lIns="0" rIns="0" tIns="0" bIns="0">
+            <a:spAutoFit/>
+          </a:bodyPr>
+          <a:lstStyle/>
+          <a:p>
+            <a:pPr algn="l">
+              <a:lnSpc>
+                <a:spcPct val="106000"/>
+              </a:lnSpc>
+              <a:spcBef>
+                <a:spcPts val="0"/>
+              </a:spcBef>
+              <a:spcAft>
+                <a:spcPts val="0"/>
+              </a:spcAft>
+            </a:pPr>
+            <a:r>
+              <a:rPr sz="1250" b="1" spc="220">
+                <a:solidFill>
+                  <a:srgbClr val="EE0000"/>
+                </a:solidFill>
+                <a:latin typeface="Red Hat Display"/>
+              </a:rPr>
+              <a:t>M13 · OBSERVABILITY, HEALTH &amp; SCALE</a:t>
+            </a:r>
+          </a:p>
+        </p:txBody>
+      </p:sp>
+      <p:sp>
+        <p:nvSpPr>
+          <p:cNvPr id="4" name="TextBox 3"/>
+          <p:cNvSpPr txBox="1"/>
+          <p:nvPr/>
+        </p:nvSpPr>
+        <p:spPr>
+          <a:xfrm>
+            <a:off x="841248" y="877824"/>
+            <a:ext cx="10515600" cy="548640"/>
+          </a:xfrm>
+          <a:prstGeom prst="rect">
+            <a:avLst/>
+          </a:prstGeom>
+          <a:noFill/>
+        </p:spPr>
+        <p:txBody>
+          <a:bodyPr wrap="none" anchor="t" lIns="0" rIns="0" tIns="0" bIns="0">
+            <a:spAutoFit/>
+          </a:bodyPr>
+          <a:lstStyle/>
+          <a:p>
+            <a:pPr algn="l">
+              <a:lnSpc>
+                <a:spcPct val="100000"/>
+              </a:lnSpc>
+              <a:spcBef>
+                <a:spcPts val="0"/>
+              </a:spcBef>
+              <a:spcAft>
+                <a:spcPts val="0"/>
+              </a:spcAft>
+            </a:pPr>
+            <a:r>
+              <a:rPr sz="2500" b="1">
+                <a:solidFill>
+                  <a:srgbClr val="1A1A1A"/>
+                </a:solidFill>
+                <a:latin typeface="Red Hat Display"/>
+              </a:rPr>
+              <a:t>What you built</a:t>
+            </a:r>
+          </a:p>
+        </p:txBody>
+      </p:sp>
+      <p:cxnSp>
+        <p:nvCxnSpPr>
+          <p:cNvPr id="5" name="Connector 4"/>
+          <p:cNvCxnSpPr/>
+          <p:nvPr/>
+        </p:nvCxnSpPr>
+        <p:spPr>
+          <a:xfrm>
+            <a:off x="841248" y="1554480"/>
+            <a:ext cx="1371600" cy="0"/>
+          </a:xfrm>
+          <a:prstGeom prst="bentConnector3">
+            <a:avLst/>
+          </a:prstGeom>
+          <a:ln w="31750">
+            <a:solidFill>
+              <a:srgbClr val="EE0000"/>
+            </a:solidFill>
+          </a:ln>
+          <a:effectLst/>
+        </p:spPr>
+        <p:style>
+          <a:lnRef idx="2">
+            <a:schemeClr val="accent1"/>
+          </a:lnRef>
+          <a:fillRef idx="0">
+            <a:schemeClr val="accent1"/>
+          </a:fillRef>
+          <a:effectRef idx="1">
+            <a:schemeClr val="accent1"/>
+          </a:effectRef>
+          <a:fontRef idx="minor">
+            <a:schemeClr val="tx1"/>
+          </a:fontRef>
+        </p:style>
+      </p:cxnSp>
+      <p:sp>
+        <p:nvSpPr>
+          <p:cNvPr id="6" name="Rounded Rectangle 5"/>
+          <p:cNvSpPr/>
+          <p:nvPr/>
+        </p:nvSpPr>
+        <p:spPr>
+          <a:xfrm>
+            <a:off x="841248" y="2331720"/>
+            <a:ext cx="10509199" cy="3794760"/>
+          </a:xfrm>
+          <a:prstGeom prst="roundRect">
+            <a:avLst>
+              <a:gd name="adj" fmla="val 4000"/>
+            </a:avLst>
+          </a:prstGeom>
+          <a:solidFill>
+            <a:srgbClr val="FFFFFF"/>
+          </a:solidFill>
+          <a:ln w="15240">
+            <a:solidFill>
+              <a:srgbClr val="DDE1E6"/>
+            </a:solidFill>
+          </a:ln>
+          <a:effectLst/>
+        </p:spPr>
+        <p:style>
+          <a:lnRef idx="1">
+            <a:schemeClr val="accent1"/>
+          </a:lnRef>
+          <a:fillRef idx="3">
+            <a:schemeClr val="accent1"/>
+          </a:fillRef>
+          <a:effectRef idx="2">
+            <a:schemeClr val="accent1"/>
+          </a:effectRef>
+          <a:fontRef idx="minor">
+            <a:schemeClr val="lt1"/>
+          </a:fontRef>
+        </p:style>
+        <p:txBody>
+          <a:bodyPr rtlCol="0" anchor="ctr"/>
+          <a:lstStyle/>
+          <a:p>
+            <a:pPr algn="ctr"/>
+          </a:p>
+        </p:txBody>
+      </p:sp>
+      <p:pic>
+        <p:nvPicPr>
+          <p:cNvPr id="7" name="Picture 6" descr="05-what-you-built.png"/>
+          <p:cNvPicPr>
+            <a:picLocks noChangeAspect="1"/>
+          </p:cNvPicPr>
+          <p:nvPr/>
+        </p:nvPicPr>
+        <p:blipFill>
+          <a:blip r:embed="rId3"/>
+          <a:stretch>
+            <a:fillRect/>
+          </a:stretch>
+        </p:blipFill>
+        <p:spPr>
+          <a:xfrm>
+            <a:off x="2994202" y="2532888"/>
+            <a:ext cx="6203289" cy="3392424"/>
+          </a:xfrm>
+          <a:prstGeom prst="rect">
+            <a:avLst/>
+          </a:prstGeom>
+        </p:spPr>
+      </p:pic>
+      <p:cxnSp>
+        <p:nvCxnSpPr>
+          <p:cNvPr id="8" name="Connector 7"/>
+          <p:cNvCxnSpPr/>
+          <p:nvPr/>
+        </p:nvCxnSpPr>
+        <p:spPr>
+          <a:xfrm>
+            <a:off x="841248" y="6437376"/>
+            <a:ext cx="10509199" cy="0"/>
+          </a:xfrm>
+          <a:prstGeom prst="bentConnector3">
+            <a:avLst/>
+          </a:prstGeom>
+          <a:ln w="12700">
+            <a:solidFill>
+              <a:srgbClr val="DDE1E6"/>
+            </a:solidFill>
+          </a:ln>
+          <a:effectLst/>
+        </p:spPr>
+        <p:style>
+          <a:lnRef idx="2">
+            <a:schemeClr val="accent1"/>
+          </a:lnRef>
+          <a:fillRef idx="0">
+            <a:schemeClr val="accent1"/>
+          </a:fillRef>
+          <a:effectRef idx="1">
+            <a:schemeClr val="accent1"/>
+          </a:effectRef>
+          <a:fontRef idx="minor">
+            <a:schemeClr val="tx1"/>
+          </a:fontRef>
+        </p:style>
+      </p:cxnSp>
+      <p:sp>
+        <p:nvSpPr>
+          <p:cNvPr id="9" name="TextBox 8"/>
+          <p:cNvSpPr txBox="1"/>
+          <p:nvPr/>
+        </p:nvSpPr>
+        <p:spPr>
+          <a:xfrm>
+            <a:off x="841248" y="6473952"/>
+            <a:ext cx="7315200" cy="274320"/>
+          </a:xfrm>
+          <a:prstGeom prst="rect">
+            <a:avLst/>
+          </a:prstGeom>
+          <a:noFill/>
+        </p:spPr>
+        <p:txBody>
+          <a:bodyPr wrap="square" anchor="t" lIns="0" rIns="0" tIns="0" bIns="0">
+            <a:spAutoFit/>
+          </a:bodyPr>
+          <a:lstStyle/>
+          <a:p>
+            <a:pPr algn="l">
+              <a:lnSpc>
+                <a:spcPct val="106000"/>
+              </a:lnSpc>
+              <a:spcBef>
+                <a:spcPts val="0"/>
+              </a:spcBef>
+              <a:spcAft>
+                <a:spcPts val="0"/>
+              </a:spcAft>
+            </a:pPr>
+            <a:r>
+              <a:rPr sz="950" b="0">
+                <a:solidFill>
+                  <a:srgbClr val="8A9099"/>
+                </a:solidFill>
+                <a:latin typeface="Red Hat Text"/>
+              </a:rPr>
+              <a:t>CONFIDENTIAL</a:t>
+            </a:r>
+          </a:p>
+        </p:txBody>
+      </p:sp>
+      <p:sp>
+        <p:nvSpPr>
+          <p:cNvPr id="10" name="TextBox 9"/>
+          <p:cNvSpPr txBox="1"/>
+          <p:nvPr/>
+        </p:nvSpPr>
+        <p:spPr>
+          <a:xfrm>
+            <a:off x="10801807" y="6473952"/>
+            <a:ext cx="548640" cy="274320"/>
+          </a:xfrm>
+          <a:prstGeom prst="rect">
+            <a:avLst/>
+          </a:prstGeom>
+          <a:noFill/>
+        </p:spPr>
+        <p:txBody>
+          <a:bodyPr wrap="square" anchor="t" lIns="0" rIns="0" tIns="0" bIns="0">
+            <a:spAutoFit/>
+          </a:bodyPr>
+          <a:lstStyle/>
+          <a:p>
+            <a:pPr algn="r">
+              <a:lnSpc>
+                <a:spcPct val="106000"/>
+              </a:lnSpc>
+              <a:spcBef>
+                <a:spcPts val="0"/>
+              </a:spcBef>
+              <a:spcAft>
+                <a:spcPts val="0"/>
+              </a:spcAft>
+            </a:pPr>
+            <a:r>
+              <a:rPr sz="950" b="0">
+                <a:solidFill>
+                  <a:srgbClr val="8A9099"/>
+                </a:solidFill>
+                <a:latin typeface="Red Hat Text"/>
+              </a:rPr>
+              <a:t>13</a:t>
+            </a:r>
+          </a:p>
+        </p:txBody>
+      </p:sp>
+    </p:spTree>
+  </p:cSld>
+  <p:clrMapOvr>
+    <a:masterClrMapping/>
+  </p:clrMapOvr>
+</p:sld>
+</file>
+
 <file path=ppt/slides/slide2.xml><?xml version="1.0" encoding="utf-8"?>
 <p:sld xmlns:a="http://schemas.openxmlformats.org/drawingml/2006/main" xmlns:p="http://schemas.openxmlformats.org/presentationml/2006/main" xmlns:r="http://schemas.openxmlformats.org/officeDocument/2006/relationships">
   <p:cSld>
@@ -4423,11 +6608,11 @@
         <p:spPr>
           <a:xfrm>
             <a:off x="841248" y="2670048"/>
-            <a:ext cx="5715000" cy="530352"/>
+            <a:ext cx="5138928" cy="786384"/>
           </a:xfrm>
           <a:prstGeom prst="roundRect">
             <a:avLst>
-              <a:gd name="adj" fmla="val 6000"/>
+              <a:gd name="adj" fmla="val 7000"/>
             </a:avLst>
           </a:prstGeom>
           <a:solidFill>
@@ -4462,9 +6647,55 @@
           </a:p>
         </p:txBody>
       </p:sp>
+      <p:sp>
+        <p:nvSpPr>
+          <p:cNvPr id="8" name="Rounded Rectangle 7"/>
+          <p:cNvSpPr/>
+          <p:nvPr/>
+        </p:nvSpPr>
+        <p:spPr>
+          <a:xfrm>
+            <a:off x="987552" y="2807208"/>
+            <a:ext cx="512064" cy="512064"/>
+          </a:xfrm>
+          <a:prstGeom prst="roundRect">
+            <a:avLst>
+              <a:gd name="adj" fmla="val 26000"/>
+            </a:avLst>
+          </a:prstGeom>
+          <a:solidFill>
+            <a:srgbClr val="EE0000"/>
+          </a:solidFill>
+          <a:ln>
+            <a:noFill/>
+          </a:ln>
+          <a:effectLst/>
+        </p:spPr>
+        <p:style>
+          <a:lnRef idx="1">
+            <a:schemeClr val="accent1"/>
+          </a:lnRef>
+          <a:fillRef idx="3">
+            <a:schemeClr val="accent1"/>
+          </a:fillRef>
+          <a:effectRef idx="2">
+            <a:schemeClr val="accent1"/>
+          </a:effectRef>
+          <a:fontRef idx="minor">
+            <a:schemeClr val="lt1"/>
+          </a:fontRef>
+        </p:style>
+        <p:txBody>
+          <a:bodyPr rtlCol="0" anchor="ctr"/>
+          <a:lstStyle/>
+          <a:p>
+            <a:pPr algn="ctr"/>
+          </a:p>
+        </p:txBody>
+      </p:sp>
       <p:pic>
         <p:nvPicPr>
-          <p:cNvPr id="8" name="Picture 7" descr="check_steel.png"/>
+          <p:cNvPr id="9" name="Picture 8" descr="check_white.png"/>
           <p:cNvPicPr>
             <a:picLocks noChangeAspect="1"/>
           </p:cNvPicPr>
@@ -4478,8 +6709,8 @@
         </p:blipFill>
         <p:spPr>
           <a:xfrm>
-            <a:off x="987552" y="2816352"/>
-            <a:ext cx="237744" cy="237744"/>
+            <a:off x="1110447" y="2930103"/>
+            <a:ext cx="266273" cy="266273"/>
           </a:xfrm>
           <a:prstGeom prst="rect">
             <a:avLst/>
@@ -4488,14 +6719,14 @@
       </p:pic>
       <p:sp>
         <p:nvSpPr>
-          <p:cNvPr id="9" name="TextBox 8"/>
+          <p:cNvPr id="10" name="TextBox 9"/>
           <p:cNvSpPr txBox="1"/>
           <p:nvPr/>
         </p:nvSpPr>
         <p:spPr>
           <a:xfrm>
-            <a:off x="1353312" y="2670048"/>
-            <a:ext cx="5029200" cy="530352"/>
+            <a:off x="1627632" y="2670048"/>
+            <a:ext cx="4206240" cy="786384"/>
           </a:xfrm>
           <a:prstGeom prst="rect">
             <a:avLst/>
@@ -4520,7 +6751,7 @@
               </a:spcAft>
             </a:pPr>
             <a:r>
-              <a:rPr sz="1200" b="0">
+              <a:rPr sz="1150" b="0">
                 <a:solidFill>
                   <a:srgbClr val="1A1A1A"/>
                 </a:solidFill>
@@ -4533,18 +6764,18 @@
       </p:sp>
       <p:sp>
         <p:nvSpPr>
-          <p:cNvPr id="10" name="Rounded Rectangle 9"/>
+          <p:cNvPr id="11" name="Rounded Rectangle 10"/>
           <p:cNvSpPr/>
           <p:nvPr/>
         </p:nvSpPr>
         <p:spPr>
           <a:xfrm>
-            <a:off x="841248" y="3273552"/>
-            <a:ext cx="5715000" cy="530352"/>
+            <a:off x="6254496" y="2670048"/>
+            <a:ext cx="5138928" cy="786384"/>
           </a:xfrm>
           <a:prstGeom prst="roundRect">
             <a:avLst>
-              <a:gd name="adj" fmla="val 6000"/>
+              <a:gd name="adj" fmla="val 7000"/>
             </a:avLst>
           </a:prstGeom>
           <a:solidFill>
@@ -4579,9 +6810,55 @@
           </a:p>
         </p:txBody>
       </p:sp>
+      <p:sp>
+        <p:nvSpPr>
+          <p:cNvPr id="12" name="Rounded Rectangle 11"/>
+          <p:cNvSpPr/>
+          <p:nvPr/>
+        </p:nvSpPr>
+        <p:spPr>
+          <a:xfrm>
+            <a:off x="6400800" y="2807208"/>
+            <a:ext cx="512064" cy="512064"/>
+          </a:xfrm>
+          <a:prstGeom prst="roundRect">
+            <a:avLst>
+              <a:gd name="adj" fmla="val 26000"/>
+            </a:avLst>
+          </a:prstGeom>
+          <a:solidFill>
+            <a:srgbClr val="EE0000"/>
+          </a:solidFill>
+          <a:ln>
+            <a:noFill/>
+          </a:ln>
+          <a:effectLst/>
+        </p:spPr>
+        <p:style>
+          <a:lnRef idx="1">
+            <a:schemeClr val="accent1"/>
+          </a:lnRef>
+          <a:fillRef idx="3">
+            <a:schemeClr val="accent1"/>
+          </a:fillRef>
+          <a:effectRef idx="2">
+            <a:schemeClr val="accent1"/>
+          </a:effectRef>
+          <a:fontRef idx="minor">
+            <a:schemeClr val="lt1"/>
+          </a:fontRef>
+        </p:style>
+        <p:txBody>
+          <a:bodyPr rtlCol="0" anchor="ctr"/>
+          <a:lstStyle/>
+          <a:p>
+            <a:pPr algn="ctr"/>
+          </a:p>
+        </p:txBody>
+      </p:sp>
       <p:pic>
         <p:nvPicPr>
-          <p:cNvPr id="11" name="Picture 10" descr="check_steel.png"/>
+          <p:cNvPr id="13" name="Picture 12" descr="check_white.png"/>
           <p:cNvPicPr>
             <a:picLocks noChangeAspect="1"/>
           </p:cNvPicPr>
@@ -4595,8 +6872,8 @@
         </p:blipFill>
         <p:spPr>
           <a:xfrm>
-            <a:off x="987552" y="3419856"/>
-            <a:ext cx="237744" cy="237744"/>
+            <a:off x="6523695" y="2930103"/>
+            <a:ext cx="266273" cy="266273"/>
           </a:xfrm>
           <a:prstGeom prst="rect">
             <a:avLst/>
@@ -4605,14 +6882,14 @@
       </p:pic>
       <p:sp>
         <p:nvSpPr>
-          <p:cNvPr id="12" name="TextBox 11"/>
+          <p:cNvPr id="14" name="TextBox 13"/>
           <p:cNvSpPr txBox="1"/>
           <p:nvPr/>
         </p:nvSpPr>
         <p:spPr>
           <a:xfrm>
-            <a:off x="1353312" y="3273552"/>
-            <a:ext cx="5029200" cy="530352"/>
+            <a:off x="7040880" y="2670048"/>
+            <a:ext cx="4206240" cy="786384"/>
           </a:xfrm>
           <a:prstGeom prst="rect">
             <a:avLst/>
@@ -4637,7 +6914,7 @@
               </a:spcAft>
             </a:pPr>
             <a:r>
-              <a:rPr sz="1200" b="0">
+              <a:rPr sz="1150" b="0">
                 <a:solidFill>
                   <a:srgbClr val="1A1A1A"/>
                 </a:solidFill>
@@ -4650,18 +6927,18 @@
       </p:sp>
       <p:sp>
         <p:nvSpPr>
-          <p:cNvPr id="13" name="Rounded Rectangle 12"/>
+          <p:cNvPr id="15" name="Rounded Rectangle 14"/>
           <p:cNvSpPr/>
           <p:nvPr/>
         </p:nvSpPr>
         <p:spPr>
           <a:xfrm>
-            <a:off x="841248" y="3877056"/>
-            <a:ext cx="5715000" cy="530352"/>
+            <a:off x="841248" y="3602736"/>
+            <a:ext cx="5138928" cy="786384"/>
           </a:xfrm>
           <a:prstGeom prst="roundRect">
             <a:avLst>
-              <a:gd name="adj" fmla="val 6000"/>
+              <a:gd name="adj" fmla="val 7000"/>
             </a:avLst>
           </a:prstGeom>
           <a:solidFill>
@@ -4696,9 +6973,55 @@
           </a:p>
         </p:txBody>
       </p:sp>
+      <p:sp>
+        <p:nvSpPr>
+          <p:cNvPr id="16" name="Rounded Rectangle 15"/>
+          <p:cNvSpPr/>
+          <p:nvPr/>
+        </p:nvSpPr>
+        <p:spPr>
+          <a:xfrm>
+            <a:off x="987552" y="3739896"/>
+            <a:ext cx="512064" cy="512064"/>
+          </a:xfrm>
+          <a:prstGeom prst="roundRect">
+            <a:avLst>
+              <a:gd name="adj" fmla="val 26000"/>
+            </a:avLst>
+          </a:prstGeom>
+          <a:solidFill>
+            <a:srgbClr val="EE0000"/>
+          </a:solidFill>
+          <a:ln>
+            <a:noFill/>
+          </a:ln>
+          <a:effectLst/>
+        </p:spPr>
+        <p:style>
+          <a:lnRef idx="1">
+            <a:schemeClr val="accent1"/>
+          </a:lnRef>
+          <a:fillRef idx="3">
+            <a:schemeClr val="accent1"/>
+          </a:fillRef>
+          <a:effectRef idx="2">
+            <a:schemeClr val="accent1"/>
+          </a:effectRef>
+          <a:fontRef idx="minor">
+            <a:schemeClr val="lt1"/>
+          </a:fontRef>
+        </p:style>
+        <p:txBody>
+          <a:bodyPr rtlCol="0" anchor="ctr"/>
+          <a:lstStyle/>
+          <a:p>
+            <a:pPr algn="ctr"/>
+          </a:p>
+        </p:txBody>
+      </p:sp>
       <p:pic>
         <p:nvPicPr>
-          <p:cNvPr id="14" name="Picture 13" descr="check_steel.png"/>
+          <p:cNvPr id="17" name="Picture 16" descr="check_white.png"/>
           <p:cNvPicPr>
             <a:picLocks noChangeAspect="1"/>
           </p:cNvPicPr>
@@ -4712,8 +7035,8 @@
         </p:blipFill>
         <p:spPr>
           <a:xfrm>
-            <a:off x="987552" y="4023360"/>
-            <a:ext cx="237744" cy="237744"/>
+            <a:off x="1110447" y="3862791"/>
+            <a:ext cx="266273" cy="266273"/>
           </a:xfrm>
           <a:prstGeom prst="rect">
             <a:avLst/>
@@ -4722,14 +7045,14 @@
       </p:pic>
       <p:sp>
         <p:nvSpPr>
-          <p:cNvPr id="15" name="TextBox 14"/>
+          <p:cNvPr id="18" name="TextBox 17"/>
           <p:cNvSpPr txBox="1"/>
           <p:nvPr/>
         </p:nvSpPr>
         <p:spPr>
           <a:xfrm>
-            <a:off x="1353312" y="3877056"/>
-            <a:ext cx="5029200" cy="530352"/>
+            <a:off x="1627632" y="3602736"/>
+            <a:ext cx="4206240" cy="786384"/>
           </a:xfrm>
           <a:prstGeom prst="rect">
             <a:avLst/>
@@ -4754,7 +7077,7 @@
               </a:spcAft>
             </a:pPr>
             <a:r>
-              <a:rPr sz="1200" b="0">
+              <a:rPr sz="1150" b="0">
                 <a:solidFill>
                   <a:srgbClr val="1A1A1A"/>
                 </a:solidFill>
@@ -4767,18 +7090,18 @@
       </p:sp>
       <p:sp>
         <p:nvSpPr>
-          <p:cNvPr id="16" name="Rounded Rectangle 15"/>
+          <p:cNvPr id="19" name="Rounded Rectangle 18"/>
           <p:cNvSpPr/>
           <p:nvPr/>
         </p:nvSpPr>
         <p:spPr>
           <a:xfrm>
-            <a:off x="841248" y="4480560"/>
-            <a:ext cx="5715000" cy="530352"/>
+            <a:off x="6254496" y="3602736"/>
+            <a:ext cx="5138928" cy="786384"/>
           </a:xfrm>
           <a:prstGeom prst="roundRect">
             <a:avLst>
-              <a:gd name="adj" fmla="val 6000"/>
+              <a:gd name="adj" fmla="val 7000"/>
             </a:avLst>
           </a:prstGeom>
           <a:solidFill>
@@ -4813,9 +7136,55 @@
           </a:p>
         </p:txBody>
       </p:sp>
+      <p:sp>
+        <p:nvSpPr>
+          <p:cNvPr id="20" name="Rounded Rectangle 19"/>
+          <p:cNvSpPr/>
+          <p:nvPr/>
+        </p:nvSpPr>
+        <p:spPr>
+          <a:xfrm>
+            <a:off x="6400800" y="3739896"/>
+            <a:ext cx="512064" cy="512064"/>
+          </a:xfrm>
+          <a:prstGeom prst="roundRect">
+            <a:avLst>
+              <a:gd name="adj" fmla="val 26000"/>
+            </a:avLst>
+          </a:prstGeom>
+          <a:solidFill>
+            <a:srgbClr val="EE0000"/>
+          </a:solidFill>
+          <a:ln>
+            <a:noFill/>
+          </a:ln>
+          <a:effectLst/>
+        </p:spPr>
+        <p:style>
+          <a:lnRef idx="1">
+            <a:schemeClr val="accent1"/>
+          </a:lnRef>
+          <a:fillRef idx="3">
+            <a:schemeClr val="accent1"/>
+          </a:fillRef>
+          <a:effectRef idx="2">
+            <a:schemeClr val="accent1"/>
+          </a:effectRef>
+          <a:fontRef idx="minor">
+            <a:schemeClr val="lt1"/>
+          </a:fontRef>
+        </p:style>
+        <p:txBody>
+          <a:bodyPr rtlCol="0" anchor="ctr"/>
+          <a:lstStyle/>
+          <a:p>
+            <a:pPr algn="ctr"/>
+          </a:p>
+        </p:txBody>
+      </p:sp>
       <p:pic>
         <p:nvPicPr>
-          <p:cNvPr id="17" name="Picture 16" descr="check_steel.png"/>
+          <p:cNvPr id="21" name="Picture 20" descr="check_white.png"/>
           <p:cNvPicPr>
             <a:picLocks noChangeAspect="1"/>
           </p:cNvPicPr>
@@ -4829,8 +7198,8 @@
         </p:blipFill>
         <p:spPr>
           <a:xfrm>
-            <a:off x="987552" y="4626864"/>
-            <a:ext cx="237744" cy="237744"/>
+            <a:off x="6523695" y="3862791"/>
+            <a:ext cx="266273" cy="266273"/>
           </a:xfrm>
           <a:prstGeom prst="rect">
             <a:avLst/>
@@ -4839,14 +7208,14 @@
       </p:pic>
       <p:sp>
         <p:nvSpPr>
-          <p:cNvPr id="18" name="TextBox 17"/>
+          <p:cNvPr id="22" name="TextBox 21"/>
           <p:cNvSpPr txBox="1"/>
           <p:nvPr/>
         </p:nvSpPr>
         <p:spPr>
           <a:xfrm>
-            <a:off x="1353312" y="4480560"/>
-            <a:ext cx="5029200" cy="530352"/>
+            <a:off x="7040880" y="3602736"/>
+            <a:ext cx="4206240" cy="786384"/>
           </a:xfrm>
           <a:prstGeom prst="rect">
             <a:avLst/>
@@ -4871,7 +7240,7 @@
               </a:spcAft>
             </a:pPr>
             <a:r>
-              <a:rPr sz="1200" b="0">
+              <a:rPr sz="1150" b="0">
                 <a:solidFill>
                   <a:srgbClr val="1A1A1A"/>
                 </a:solidFill>
@@ -4884,18 +7253,18 @@
       </p:sp>
       <p:sp>
         <p:nvSpPr>
-          <p:cNvPr id="19" name="Rounded Rectangle 18"/>
+          <p:cNvPr id="23" name="Rounded Rectangle 22"/>
           <p:cNvSpPr/>
           <p:nvPr/>
         </p:nvSpPr>
         <p:spPr>
           <a:xfrm>
-            <a:off x="841248" y="5084064"/>
-            <a:ext cx="5715000" cy="530352"/>
+            <a:off x="841248" y="4535424"/>
+            <a:ext cx="5138928" cy="786384"/>
           </a:xfrm>
           <a:prstGeom prst="roundRect">
             <a:avLst>
-              <a:gd name="adj" fmla="val 6000"/>
+              <a:gd name="adj" fmla="val 7000"/>
             </a:avLst>
           </a:prstGeom>
           <a:solidFill>
@@ -4930,9 +7299,55 @@
           </a:p>
         </p:txBody>
       </p:sp>
+      <p:sp>
+        <p:nvSpPr>
+          <p:cNvPr id="24" name="Rounded Rectangle 23"/>
+          <p:cNvSpPr/>
+          <p:nvPr/>
+        </p:nvSpPr>
+        <p:spPr>
+          <a:xfrm>
+            <a:off x="987552" y="4672584"/>
+            <a:ext cx="512064" cy="512064"/>
+          </a:xfrm>
+          <a:prstGeom prst="roundRect">
+            <a:avLst>
+              <a:gd name="adj" fmla="val 26000"/>
+            </a:avLst>
+          </a:prstGeom>
+          <a:solidFill>
+            <a:srgbClr val="EE0000"/>
+          </a:solidFill>
+          <a:ln>
+            <a:noFill/>
+          </a:ln>
+          <a:effectLst/>
+        </p:spPr>
+        <p:style>
+          <a:lnRef idx="1">
+            <a:schemeClr val="accent1"/>
+          </a:lnRef>
+          <a:fillRef idx="3">
+            <a:schemeClr val="accent1"/>
+          </a:fillRef>
+          <a:effectRef idx="2">
+            <a:schemeClr val="accent1"/>
+          </a:effectRef>
+          <a:fontRef idx="minor">
+            <a:schemeClr val="lt1"/>
+          </a:fontRef>
+        </p:style>
+        <p:txBody>
+          <a:bodyPr rtlCol="0" anchor="ctr"/>
+          <a:lstStyle/>
+          <a:p>
+            <a:pPr algn="ctr"/>
+          </a:p>
+        </p:txBody>
+      </p:sp>
       <p:pic>
         <p:nvPicPr>
-          <p:cNvPr id="20" name="Picture 19" descr="check_steel.png"/>
+          <p:cNvPr id="25" name="Picture 24" descr="check_white.png"/>
           <p:cNvPicPr>
             <a:picLocks noChangeAspect="1"/>
           </p:cNvPicPr>
@@ -4946,8 +7361,8 @@
         </p:blipFill>
         <p:spPr>
           <a:xfrm>
-            <a:off x="987552" y="5230368"/>
-            <a:ext cx="237744" cy="237744"/>
+            <a:off x="1110447" y="4795479"/>
+            <a:ext cx="266273" cy="266273"/>
           </a:xfrm>
           <a:prstGeom prst="rect">
             <a:avLst/>
@@ -4956,14 +7371,14 @@
       </p:pic>
       <p:sp>
         <p:nvSpPr>
-          <p:cNvPr id="21" name="TextBox 20"/>
+          <p:cNvPr id="26" name="TextBox 25"/>
           <p:cNvSpPr txBox="1"/>
           <p:nvPr/>
         </p:nvSpPr>
         <p:spPr>
           <a:xfrm>
-            <a:off x="1353312" y="5084064"/>
-            <a:ext cx="5029200" cy="530352"/>
+            <a:off x="1627632" y="4535424"/>
+            <a:ext cx="4206240" cy="786384"/>
           </a:xfrm>
           <a:prstGeom prst="rect">
             <a:avLst/>
@@ -4988,221 +7403,13 @@
               </a:spcAft>
             </a:pPr>
             <a:r>
-              <a:rPr sz="1200" b="0">
+              <a:rPr sz="1150" b="0">
                 <a:solidFill>
                   <a:srgbClr val="1A1A1A"/>
                 </a:solidFill>
                 <a:latin typeface="Red Hat Text"/>
               </a:rPr>
               <a:t>Health &amp; scale = ride out the load and maintenance that cause half the pages</a:t>
-            </a:r>
-          </a:p>
-        </p:txBody>
-      </p:sp>
-      <p:sp>
-        <p:nvSpPr>
-          <p:cNvPr id="22" name="Rounded Rectangle 21"/>
-          <p:cNvSpPr/>
-          <p:nvPr/>
-        </p:nvSpPr>
-        <p:spPr>
-          <a:xfrm>
-            <a:off x="6812280" y="2670048"/>
-            <a:ext cx="4538167" cy="2944368"/>
-          </a:xfrm>
-          <a:prstGeom prst="roundRect">
-            <a:avLst>
-              <a:gd name="adj" fmla="val 4000"/>
-            </a:avLst>
-          </a:prstGeom>
-          <a:solidFill>
-            <a:srgbClr val="FFFFFF"/>
-          </a:solidFill>
-          <a:ln w="15240">
-            <a:solidFill>
-              <a:srgbClr val="DDE1E6"/>
-            </a:solidFill>
-          </a:ln>
-          <a:effectLst/>
-        </p:spPr>
-        <p:style>
-          <a:lnRef idx="1">
-            <a:schemeClr val="accent1"/>
-          </a:lnRef>
-          <a:fillRef idx="3">
-            <a:schemeClr val="accent1"/>
-          </a:fillRef>
-          <a:effectRef idx="2">
-            <a:schemeClr val="accent1"/>
-          </a:effectRef>
-          <a:fontRef idx="minor">
-            <a:schemeClr val="lt1"/>
-          </a:fontRef>
-        </p:style>
-        <p:txBody>
-          <a:bodyPr rtlCol="0" anchor="ctr"/>
-          <a:lstStyle/>
-          <a:p>
-            <a:pPr algn="ctr"/>
-          </a:p>
-        </p:txBody>
-      </p:sp>
-      <p:sp>
-        <p:nvSpPr>
-          <p:cNvPr id="23" name="Rounded Rectangle 22"/>
-          <p:cNvSpPr/>
-          <p:nvPr/>
-        </p:nvSpPr>
-        <p:spPr>
-          <a:xfrm>
-            <a:off x="7013448" y="2871216"/>
-            <a:ext cx="1298448" cy="310896"/>
-          </a:xfrm>
-          <a:prstGeom prst="roundRect">
-            <a:avLst>
-              <a:gd name="adj" fmla="val 50000"/>
-            </a:avLst>
-          </a:prstGeom>
-          <a:solidFill>
-            <a:srgbClr val="FCECEC"/>
-          </a:solidFill>
-          <a:ln>
-            <a:noFill/>
-          </a:ln>
-          <a:effectLst/>
-        </p:spPr>
-        <p:style>
-          <a:lnRef idx="1">
-            <a:schemeClr val="accent1"/>
-          </a:lnRef>
-          <a:fillRef idx="3">
-            <a:schemeClr val="accent1"/>
-          </a:fillRef>
-          <a:effectRef idx="2">
-            <a:schemeClr val="accent1"/>
-          </a:effectRef>
-          <a:fontRef idx="minor">
-            <a:schemeClr val="lt1"/>
-          </a:fontRef>
-        </p:style>
-        <p:txBody>
-          <a:bodyPr rtlCol="0" anchor="ctr"/>
-          <a:lstStyle/>
-          <a:p>
-            <a:pPr algn="ctr"/>
-          </a:p>
-        </p:txBody>
-      </p:sp>
-      <p:sp>
-        <p:nvSpPr>
-          <p:cNvPr id="24" name="TextBox 23"/>
-          <p:cNvSpPr txBox="1"/>
-          <p:nvPr/>
-        </p:nvSpPr>
-        <p:spPr>
-          <a:xfrm>
-            <a:off x="7013448" y="2871216"/>
-            <a:ext cx="1298448" cy="310896"/>
-          </a:xfrm>
-          <a:prstGeom prst="rect">
-            <a:avLst/>
-          </a:prstGeom>
-          <a:noFill/>
-        </p:spPr>
-        <p:txBody>
-          <a:bodyPr wrap="none" anchor="ctr" lIns="0" rIns="0" tIns="0" bIns="0">
-            <a:spAutoFit/>
-          </a:bodyPr>
-          <a:lstStyle/>
-          <a:p>
-            <a:pPr algn="ctr">
-              <a:lnSpc>
-                <a:spcPct val="106000"/>
-              </a:lnSpc>
-              <a:spcBef>
-                <a:spcPts val="0"/>
-              </a:spcBef>
-              <a:spcAft>
-                <a:spcPts val="0"/>
-              </a:spcAft>
-            </a:pPr>
-            <a:r>
-              <a:rPr sz="850" b="1">
-                <a:solidFill>
-                  <a:srgbClr val="B80000"/>
-                </a:solidFill>
-                <a:latin typeface="Red Hat Display"/>
-              </a:rPr>
-              <a:t>MEDIA PASS</a:t>
-            </a:r>
-          </a:p>
-        </p:txBody>
-      </p:sp>
-      <p:pic>
-        <p:nvPicPr>
-          <p:cNvPr id="25" name="Picture 24" descr="eye_slate.png"/>
-          <p:cNvPicPr>
-            <a:picLocks noChangeAspect="1"/>
-          </p:cNvPicPr>
-          <p:nvPr/>
-        </p:nvPicPr>
-        <p:blipFill>
-          <a:blip r:embed="rId4"/>
-          <a:stretch>
-            <a:fillRect/>
-          </a:stretch>
-        </p:blipFill>
-        <p:spPr>
-          <a:xfrm>
-            <a:off x="8843619" y="3383280"/>
-            <a:ext cx="475488" cy="475488"/>
-          </a:xfrm>
-          <a:prstGeom prst="rect">
-            <a:avLst/>
-          </a:prstGeom>
-        </p:spPr>
-      </p:pic>
-      <p:sp>
-        <p:nvSpPr>
-          <p:cNvPr id="26" name="TextBox 25"/>
-          <p:cNvSpPr txBox="1"/>
-          <p:nvPr/>
-        </p:nvSpPr>
-        <p:spPr>
-          <a:xfrm>
-            <a:off x="7050024" y="3995928"/>
-            <a:ext cx="4062679" cy="1481328"/>
-          </a:xfrm>
-          <a:prstGeom prst="rect">
-            <a:avLst/>
-          </a:prstGeom>
-          <a:noFill/>
-        </p:spPr>
-        <p:txBody>
-          <a:bodyPr wrap="square" anchor="t" lIns="0" rIns="0" tIns="0" bIns="0">
-            <a:spAutoFit/>
-          </a:bodyPr>
-          <a:lstStyle/>
-          <a:p>
-            <a:pPr algn="l">
-              <a:lnSpc>
-                <a:spcPct val="120000"/>
-              </a:lnSpc>
-              <a:spcBef>
-                <a:spcPts val="0"/>
-              </a:spcBef>
-              <a:spcAft>
-                <a:spcPts val="0"/>
-              </a:spcAft>
-            </a:pPr>
-            <a:r>
-              <a:rPr sz="950" b="0">
-                <a:solidFill>
-                  <a:srgbClr val="8A9099"/>
-                </a:solidFill>
-                <a:latin typeface="Red Hat Text"/>
-              </a:rPr>
-              <a:t>A dark red "claims API" tile with a question mark; a clock at 02:00; three faint signal icons (metric line, log line, trace waterfall) waiting to be switched on.</a:t>
             </a:r>
           </a:p>
         </p:txBody>
@@ -5510,11 +7717,11 @@
         <p:spPr>
           <a:xfrm>
             <a:off x="841248" y="2395728"/>
-            <a:ext cx="5715000" cy="530352"/>
+            <a:ext cx="5138928" cy="786384"/>
           </a:xfrm>
           <a:prstGeom prst="roundRect">
             <a:avLst>
-              <a:gd name="adj" fmla="val 6000"/>
+              <a:gd name="adj" fmla="val 7000"/>
             </a:avLst>
           </a:prstGeom>
           <a:solidFill>
@@ -5549,9 +7756,55 @@
           </a:p>
         </p:txBody>
       </p:sp>
+      <p:sp>
+        <p:nvSpPr>
+          <p:cNvPr id="7" name="Rounded Rectangle 6"/>
+          <p:cNvSpPr/>
+          <p:nvPr/>
+        </p:nvSpPr>
+        <p:spPr>
+          <a:xfrm>
+            <a:off x="987552" y="2532888"/>
+            <a:ext cx="512064" cy="512064"/>
+          </a:xfrm>
+          <a:prstGeom prst="roundRect">
+            <a:avLst>
+              <a:gd name="adj" fmla="val 26000"/>
+            </a:avLst>
+          </a:prstGeom>
+          <a:solidFill>
+            <a:srgbClr val="EE0000"/>
+          </a:solidFill>
+          <a:ln>
+            <a:noFill/>
+          </a:ln>
+          <a:effectLst/>
+        </p:spPr>
+        <p:style>
+          <a:lnRef idx="1">
+            <a:schemeClr val="accent1"/>
+          </a:lnRef>
+          <a:fillRef idx="3">
+            <a:schemeClr val="accent1"/>
+          </a:fillRef>
+          <a:effectRef idx="2">
+            <a:schemeClr val="accent1"/>
+          </a:effectRef>
+          <a:fontRef idx="minor">
+            <a:schemeClr val="lt1"/>
+          </a:fontRef>
+        </p:style>
+        <p:txBody>
+          <a:bodyPr rtlCol="0" anchor="ctr"/>
+          <a:lstStyle/>
+          <a:p>
+            <a:pPr algn="ctr"/>
+          </a:p>
+        </p:txBody>
+      </p:sp>
       <p:pic>
         <p:nvPicPr>
-          <p:cNvPr id="7" name="Picture 6" descr="check_steel.png"/>
+          <p:cNvPr id="8" name="Picture 7" descr="check_white.png"/>
           <p:cNvPicPr>
             <a:picLocks noChangeAspect="1"/>
           </p:cNvPicPr>
@@ -5565,8 +7818,8 @@
         </p:blipFill>
         <p:spPr>
           <a:xfrm>
-            <a:off x="987552" y="2542032"/>
-            <a:ext cx="237744" cy="237744"/>
+            <a:off x="1110447" y="2655783"/>
+            <a:ext cx="266273" cy="266273"/>
           </a:xfrm>
           <a:prstGeom prst="rect">
             <a:avLst/>
@@ -5575,14 +7828,14 @@
       </p:pic>
       <p:sp>
         <p:nvSpPr>
-          <p:cNvPr id="8" name="TextBox 7"/>
+          <p:cNvPr id="9" name="TextBox 8"/>
           <p:cNvSpPr txBox="1"/>
           <p:nvPr/>
         </p:nvSpPr>
         <p:spPr>
           <a:xfrm>
-            <a:off x="1353312" y="2395728"/>
-            <a:ext cx="5029200" cy="530352"/>
+            <a:off x="1627632" y="2395728"/>
+            <a:ext cx="4206240" cy="786384"/>
           </a:xfrm>
           <a:prstGeom prst="rect">
             <a:avLst/>
@@ -5607,7 +7860,7 @@
               </a:spcAft>
             </a:pPr>
             <a:r>
-              <a:rPr sz="1200" b="0">
+              <a:rPr sz="1150" b="0">
                 <a:solidFill>
                   <a:srgbClr val="1A1A1A"/>
                 </a:solidFill>
@@ -5620,18 +7873,18 @@
       </p:sp>
       <p:sp>
         <p:nvSpPr>
-          <p:cNvPr id="9" name="Rounded Rectangle 8"/>
+          <p:cNvPr id="10" name="Rounded Rectangle 9"/>
           <p:cNvSpPr/>
           <p:nvPr/>
         </p:nvSpPr>
         <p:spPr>
           <a:xfrm>
-            <a:off x="841248" y="2999232"/>
-            <a:ext cx="5715000" cy="530352"/>
+            <a:off x="6254496" y="2395728"/>
+            <a:ext cx="5138928" cy="786384"/>
           </a:xfrm>
           <a:prstGeom prst="roundRect">
             <a:avLst>
-              <a:gd name="adj" fmla="val 6000"/>
+              <a:gd name="adj" fmla="val 7000"/>
             </a:avLst>
           </a:prstGeom>
           <a:solidFill>
@@ -5666,9 +7919,55 @@
           </a:p>
         </p:txBody>
       </p:sp>
+      <p:sp>
+        <p:nvSpPr>
+          <p:cNvPr id="11" name="Rounded Rectangle 10"/>
+          <p:cNvSpPr/>
+          <p:nvPr/>
+        </p:nvSpPr>
+        <p:spPr>
+          <a:xfrm>
+            <a:off x="6400800" y="2532888"/>
+            <a:ext cx="512064" cy="512064"/>
+          </a:xfrm>
+          <a:prstGeom prst="roundRect">
+            <a:avLst>
+              <a:gd name="adj" fmla="val 26000"/>
+            </a:avLst>
+          </a:prstGeom>
+          <a:solidFill>
+            <a:srgbClr val="EE0000"/>
+          </a:solidFill>
+          <a:ln>
+            <a:noFill/>
+          </a:ln>
+          <a:effectLst/>
+        </p:spPr>
+        <p:style>
+          <a:lnRef idx="1">
+            <a:schemeClr val="accent1"/>
+          </a:lnRef>
+          <a:fillRef idx="3">
+            <a:schemeClr val="accent1"/>
+          </a:fillRef>
+          <a:effectRef idx="2">
+            <a:schemeClr val="accent1"/>
+          </a:effectRef>
+          <a:fontRef idx="minor">
+            <a:schemeClr val="lt1"/>
+          </a:fontRef>
+        </p:style>
+        <p:txBody>
+          <a:bodyPr rtlCol="0" anchor="ctr"/>
+          <a:lstStyle/>
+          <a:p>
+            <a:pPr algn="ctr"/>
+          </a:p>
+        </p:txBody>
+      </p:sp>
       <p:pic>
         <p:nvPicPr>
-          <p:cNvPr id="10" name="Picture 9" descr="check_steel.png"/>
+          <p:cNvPr id="12" name="Picture 11" descr="check_white.png"/>
           <p:cNvPicPr>
             <a:picLocks noChangeAspect="1"/>
           </p:cNvPicPr>
@@ -5682,8 +7981,8 @@
         </p:blipFill>
         <p:spPr>
           <a:xfrm>
-            <a:off x="987552" y="3145536"/>
-            <a:ext cx="237744" cy="237744"/>
+            <a:off x="6523695" y="2655783"/>
+            <a:ext cx="266273" cy="266273"/>
           </a:xfrm>
           <a:prstGeom prst="rect">
             <a:avLst/>
@@ -5692,14 +7991,14 @@
       </p:pic>
       <p:sp>
         <p:nvSpPr>
-          <p:cNvPr id="11" name="TextBox 10"/>
+          <p:cNvPr id="13" name="TextBox 12"/>
           <p:cNvSpPr txBox="1"/>
           <p:nvPr/>
         </p:nvSpPr>
         <p:spPr>
           <a:xfrm>
-            <a:off x="1353312" y="2999232"/>
-            <a:ext cx="5029200" cy="530352"/>
+            <a:off x="7040880" y="2395728"/>
+            <a:ext cx="4206240" cy="786384"/>
           </a:xfrm>
           <a:prstGeom prst="rect">
             <a:avLst/>
@@ -5724,7 +8023,7 @@
               </a:spcAft>
             </a:pPr>
             <a:r>
-              <a:rPr sz="1200" b="0">
+              <a:rPr sz="1150" b="0">
                 <a:solidFill>
                   <a:srgbClr val="1A1A1A"/>
                 </a:solidFill>
@@ -5737,18 +8036,18 @@
       </p:sp>
       <p:sp>
         <p:nvSpPr>
-          <p:cNvPr id="12" name="Rounded Rectangle 11"/>
+          <p:cNvPr id="14" name="Rounded Rectangle 13"/>
           <p:cNvSpPr/>
           <p:nvPr/>
         </p:nvSpPr>
         <p:spPr>
           <a:xfrm>
-            <a:off x="841248" y="3602736"/>
-            <a:ext cx="5715000" cy="530352"/>
+            <a:off x="841248" y="3328416"/>
+            <a:ext cx="5138928" cy="786384"/>
           </a:xfrm>
           <a:prstGeom prst="roundRect">
             <a:avLst>
-              <a:gd name="adj" fmla="val 6000"/>
+              <a:gd name="adj" fmla="val 7000"/>
             </a:avLst>
           </a:prstGeom>
           <a:solidFill>
@@ -5783,9 +8082,55 @@
           </a:p>
         </p:txBody>
       </p:sp>
+      <p:sp>
+        <p:nvSpPr>
+          <p:cNvPr id="15" name="Rounded Rectangle 14"/>
+          <p:cNvSpPr/>
+          <p:nvPr/>
+        </p:nvSpPr>
+        <p:spPr>
+          <a:xfrm>
+            <a:off x="987552" y="3465576"/>
+            <a:ext cx="512064" cy="512064"/>
+          </a:xfrm>
+          <a:prstGeom prst="roundRect">
+            <a:avLst>
+              <a:gd name="adj" fmla="val 26000"/>
+            </a:avLst>
+          </a:prstGeom>
+          <a:solidFill>
+            <a:srgbClr val="EE0000"/>
+          </a:solidFill>
+          <a:ln>
+            <a:noFill/>
+          </a:ln>
+          <a:effectLst/>
+        </p:spPr>
+        <p:style>
+          <a:lnRef idx="1">
+            <a:schemeClr val="accent1"/>
+          </a:lnRef>
+          <a:fillRef idx="3">
+            <a:schemeClr val="accent1"/>
+          </a:fillRef>
+          <a:effectRef idx="2">
+            <a:schemeClr val="accent1"/>
+          </a:effectRef>
+          <a:fontRef idx="minor">
+            <a:schemeClr val="lt1"/>
+          </a:fontRef>
+        </p:style>
+        <p:txBody>
+          <a:bodyPr rtlCol="0" anchor="ctr"/>
+          <a:lstStyle/>
+          <a:p>
+            <a:pPr algn="ctr"/>
+          </a:p>
+        </p:txBody>
+      </p:sp>
       <p:pic>
         <p:nvPicPr>
-          <p:cNvPr id="13" name="Picture 12" descr="check_steel.png"/>
+          <p:cNvPr id="16" name="Picture 15" descr="check_white.png"/>
           <p:cNvPicPr>
             <a:picLocks noChangeAspect="1"/>
           </p:cNvPicPr>
@@ -5799,8 +8144,8 @@
         </p:blipFill>
         <p:spPr>
           <a:xfrm>
-            <a:off x="987552" y="3749040"/>
-            <a:ext cx="237744" cy="237744"/>
+            <a:off x="1110447" y="3588471"/>
+            <a:ext cx="266273" cy="266273"/>
           </a:xfrm>
           <a:prstGeom prst="rect">
             <a:avLst/>
@@ -5809,14 +8154,14 @@
       </p:pic>
       <p:sp>
         <p:nvSpPr>
-          <p:cNvPr id="14" name="TextBox 13"/>
+          <p:cNvPr id="17" name="TextBox 16"/>
           <p:cNvSpPr txBox="1"/>
           <p:nvPr/>
         </p:nvSpPr>
         <p:spPr>
           <a:xfrm>
-            <a:off x="1353312" y="3602736"/>
-            <a:ext cx="5029200" cy="530352"/>
+            <a:off x="1627632" y="3328416"/>
+            <a:ext cx="4206240" cy="786384"/>
           </a:xfrm>
           <a:prstGeom prst="rect">
             <a:avLst/>
@@ -5841,7 +8186,7 @@
               </a:spcAft>
             </a:pPr>
             <a:r>
-              <a:rPr sz="1200" b="0">
+              <a:rPr sz="1150" b="0">
                 <a:solidFill>
                   <a:srgbClr val="1A1A1A"/>
                 </a:solidFill>
@@ -5854,18 +8199,18 @@
       </p:sp>
       <p:sp>
         <p:nvSpPr>
-          <p:cNvPr id="15" name="Rounded Rectangle 14"/>
+          <p:cNvPr id="18" name="Rounded Rectangle 17"/>
           <p:cNvSpPr/>
           <p:nvPr/>
         </p:nvSpPr>
         <p:spPr>
           <a:xfrm>
-            <a:off x="841248" y="4206240"/>
-            <a:ext cx="5715000" cy="530352"/>
+            <a:off x="6254496" y="3328416"/>
+            <a:ext cx="5138928" cy="786384"/>
           </a:xfrm>
           <a:prstGeom prst="roundRect">
             <a:avLst>
-              <a:gd name="adj" fmla="val 6000"/>
+              <a:gd name="adj" fmla="val 7000"/>
             </a:avLst>
           </a:prstGeom>
           <a:solidFill>
@@ -5900,9 +8245,55 @@
           </a:p>
         </p:txBody>
       </p:sp>
+      <p:sp>
+        <p:nvSpPr>
+          <p:cNvPr id="19" name="Rounded Rectangle 18"/>
+          <p:cNvSpPr/>
+          <p:nvPr/>
+        </p:nvSpPr>
+        <p:spPr>
+          <a:xfrm>
+            <a:off x="6400800" y="3465576"/>
+            <a:ext cx="512064" cy="512064"/>
+          </a:xfrm>
+          <a:prstGeom prst="roundRect">
+            <a:avLst>
+              <a:gd name="adj" fmla="val 26000"/>
+            </a:avLst>
+          </a:prstGeom>
+          <a:solidFill>
+            <a:srgbClr val="EE0000"/>
+          </a:solidFill>
+          <a:ln>
+            <a:noFill/>
+          </a:ln>
+          <a:effectLst/>
+        </p:spPr>
+        <p:style>
+          <a:lnRef idx="1">
+            <a:schemeClr val="accent1"/>
+          </a:lnRef>
+          <a:fillRef idx="3">
+            <a:schemeClr val="accent1"/>
+          </a:fillRef>
+          <a:effectRef idx="2">
+            <a:schemeClr val="accent1"/>
+          </a:effectRef>
+          <a:fontRef idx="minor">
+            <a:schemeClr val="lt1"/>
+          </a:fontRef>
+        </p:style>
+        <p:txBody>
+          <a:bodyPr rtlCol="0" anchor="ctr"/>
+          <a:lstStyle/>
+          <a:p>
+            <a:pPr algn="ctr"/>
+          </a:p>
+        </p:txBody>
+      </p:sp>
       <p:pic>
         <p:nvPicPr>
-          <p:cNvPr id="16" name="Picture 15" descr="check_steel.png"/>
+          <p:cNvPr id="20" name="Picture 19" descr="check_white.png"/>
           <p:cNvPicPr>
             <a:picLocks noChangeAspect="1"/>
           </p:cNvPicPr>
@@ -5916,8 +8307,8 @@
         </p:blipFill>
         <p:spPr>
           <a:xfrm>
-            <a:off x="987552" y="4352544"/>
-            <a:ext cx="237744" cy="237744"/>
+            <a:off x="6523695" y="3588471"/>
+            <a:ext cx="266273" cy="266273"/>
           </a:xfrm>
           <a:prstGeom prst="rect">
             <a:avLst/>
@@ -5926,14 +8317,14 @@
       </p:pic>
       <p:sp>
         <p:nvSpPr>
-          <p:cNvPr id="17" name="TextBox 16"/>
+          <p:cNvPr id="21" name="TextBox 20"/>
           <p:cNvSpPr txBox="1"/>
           <p:nvPr/>
         </p:nvSpPr>
         <p:spPr>
           <a:xfrm>
-            <a:off x="1353312" y="4206240"/>
-            <a:ext cx="5029200" cy="530352"/>
+            <a:off x="7040880" y="3328416"/>
+            <a:ext cx="4206240" cy="786384"/>
           </a:xfrm>
           <a:prstGeom prst="rect">
             <a:avLst/>
@@ -5958,7 +8349,7 @@
               </a:spcAft>
             </a:pPr>
             <a:r>
-              <a:rPr sz="1200" b="0">
+              <a:rPr sz="1150" b="0">
                 <a:solidFill>
                   <a:srgbClr val="1A1A1A"/>
                 </a:solidFill>
@@ -5971,18 +8362,18 @@
       </p:sp>
       <p:sp>
         <p:nvSpPr>
-          <p:cNvPr id="18" name="Rounded Rectangle 17"/>
+          <p:cNvPr id="22" name="Rounded Rectangle 21"/>
           <p:cNvSpPr/>
           <p:nvPr/>
         </p:nvSpPr>
         <p:spPr>
           <a:xfrm>
-            <a:off x="841248" y="4809744"/>
-            <a:ext cx="5715000" cy="530352"/>
+            <a:off x="841248" y="4261104"/>
+            <a:ext cx="5138928" cy="786384"/>
           </a:xfrm>
           <a:prstGeom prst="roundRect">
             <a:avLst>
-              <a:gd name="adj" fmla="val 6000"/>
+              <a:gd name="adj" fmla="val 7000"/>
             </a:avLst>
           </a:prstGeom>
           <a:solidFill>
@@ -6017,9 +8408,55 @@
           </a:p>
         </p:txBody>
       </p:sp>
+      <p:sp>
+        <p:nvSpPr>
+          <p:cNvPr id="23" name="Rounded Rectangle 22"/>
+          <p:cNvSpPr/>
+          <p:nvPr/>
+        </p:nvSpPr>
+        <p:spPr>
+          <a:xfrm>
+            <a:off x="987552" y="4398264"/>
+            <a:ext cx="512064" cy="512064"/>
+          </a:xfrm>
+          <a:prstGeom prst="roundRect">
+            <a:avLst>
+              <a:gd name="adj" fmla="val 26000"/>
+            </a:avLst>
+          </a:prstGeom>
+          <a:solidFill>
+            <a:srgbClr val="EE0000"/>
+          </a:solidFill>
+          <a:ln>
+            <a:noFill/>
+          </a:ln>
+          <a:effectLst/>
+        </p:spPr>
+        <p:style>
+          <a:lnRef idx="1">
+            <a:schemeClr val="accent1"/>
+          </a:lnRef>
+          <a:fillRef idx="3">
+            <a:schemeClr val="accent1"/>
+          </a:fillRef>
+          <a:effectRef idx="2">
+            <a:schemeClr val="accent1"/>
+          </a:effectRef>
+          <a:fontRef idx="minor">
+            <a:schemeClr val="lt1"/>
+          </a:fontRef>
+        </p:style>
+        <p:txBody>
+          <a:bodyPr rtlCol="0" anchor="ctr"/>
+          <a:lstStyle/>
+          <a:p>
+            <a:pPr algn="ctr"/>
+          </a:p>
+        </p:txBody>
+      </p:sp>
       <p:pic>
         <p:nvPicPr>
-          <p:cNvPr id="19" name="Picture 18" descr="check_steel.png"/>
+          <p:cNvPr id="24" name="Picture 23" descr="check_white.png"/>
           <p:cNvPicPr>
             <a:picLocks noChangeAspect="1"/>
           </p:cNvPicPr>
@@ -6033,8 +8470,8 @@
         </p:blipFill>
         <p:spPr>
           <a:xfrm>
-            <a:off x="987552" y="4956048"/>
-            <a:ext cx="237744" cy="237744"/>
+            <a:off x="1110447" y="4521159"/>
+            <a:ext cx="266273" cy="266273"/>
           </a:xfrm>
           <a:prstGeom prst="rect">
             <a:avLst/>
@@ -6043,14 +8480,14 @@
       </p:pic>
       <p:sp>
         <p:nvSpPr>
-          <p:cNvPr id="20" name="TextBox 19"/>
+          <p:cNvPr id="25" name="TextBox 24"/>
           <p:cNvSpPr txBox="1"/>
           <p:nvPr/>
         </p:nvSpPr>
         <p:spPr>
           <a:xfrm>
-            <a:off x="1353312" y="4809744"/>
-            <a:ext cx="5029200" cy="530352"/>
+            <a:off x="1627632" y="4261104"/>
+            <a:ext cx="4206240" cy="786384"/>
           </a:xfrm>
           <a:prstGeom prst="rect">
             <a:avLst/>
@@ -6075,221 +8512,13 @@
               </a:spcAft>
             </a:pPr>
             <a:r>
-              <a:rPr sz="1200" b="0">
+              <a:rPr sz="1150" b="0">
                 <a:solidFill>
                   <a:srgbClr val="1A1A1A"/>
                 </a:solidFill>
                 <a:latin typeface="Red Hat Text"/>
               </a:rPr>
               <a:t>The discipline: metrics to notice, traces to locate, logs to confirm</a:t>
-            </a:r>
-          </a:p>
-        </p:txBody>
-      </p:sp>
-      <p:sp>
-        <p:nvSpPr>
-          <p:cNvPr id="21" name="Rounded Rectangle 20"/>
-          <p:cNvSpPr/>
-          <p:nvPr/>
-        </p:nvSpPr>
-        <p:spPr>
-          <a:xfrm>
-            <a:off x="6812280" y="2395728"/>
-            <a:ext cx="4538167" cy="2944368"/>
-          </a:xfrm>
-          <a:prstGeom prst="roundRect">
-            <a:avLst>
-              <a:gd name="adj" fmla="val 4000"/>
-            </a:avLst>
-          </a:prstGeom>
-          <a:solidFill>
-            <a:srgbClr val="FFFFFF"/>
-          </a:solidFill>
-          <a:ln w="15240">
-            <a:solidFill>
-              <a:srgbClr val="DDE1E6"/>
-            </a:solidFill>
-          </a:ln>
-          <a:effectLst/>
-        </p:spPr>
-        <p:style>
-          <a:lnRef idx="1">
-            <a:schemeClr val="accent1"/>
-          </a:lnRef>
-          <a:fillRef idx="3">
-            <a:schemeClr val="accent1"/>
-          </a:fillRef>
-          <a:effectRef idx="2">
-            <a:schemeClr val="accent1"/>
-          </a:effectRef>
-          <a:fontRef idx="minor">
-            <a:schemeClr val="lt1"/>
-          </a:fontRef>
-        </p:style>
-        <p:txBody>
-          <a:bodyPr rtlCol="0" anchor="ctr"/>
-          <a:lstStyle/>
-          <a:p>
-            <a:pPr algn="ctr"/>
-          </a:p>
-        </p:txBody>
-      </p:sp>
-      <p:sp>
-        <p:nvSpPr>
-          <p:cNvPr id="22" name="Rounded Rectangle 21"/>
-          <p:cNvSpPr/>
-          <p:nvPr/>
-        </p:nvSpPr>
-        <p:spPr>
-          <a:xfrm>
-            <a:off x="7013448" y="2596896"/>
-            <a:ext cx="1298448" cy="310896"/>
-          </a:xfrm>
-          <a:prstGeom prst="roundRect">
-            <a:avLst>
-              <a:gd name="adj" fmla="val 50000"/>
-            </a:avLst>
-          </a:prstGeom>
-          <a:solidFill>
-            <a:srgbClr val="FCECEC"/>
-          </a:solidFill>
-          <a:ln>
-            <a:noFill/>
-          </a:ln>
-          <a:effectLst/>
-        </p:spPr>
-        <p:style>
-          <a:lnRef idx="1">
-            <a:schemeClr val="accent1"/>
-          </a:lnRef>
-          <a:fillRef idx="3">
-            <a:schemeClr val="accent1"/>
-          </a:fillRef>
-          <a:effectRef idx="2">
-            <a:schemeClr val="accent1"/>
-          </a:effectRef>
-          <a:fontRef idx="minor">
-            <a:schemeClr val="lt1"/>
-          </a:fontRef>
-        </p:style>
-        <p:txBody>
-          <a:bodyPr rtlCol="0" anchor="ctr"/>
-          <a:lstStyle/>
-          <a:p>
-            <a:pPr algn="ctr"/>
-          </a:p>
-        </p:txBody>
-      </p:sp>
-      <p:sp>
-        <p:nvSpPr>
-          <p:cNvPr id="23" name="TextBox 22"/>
-          <p:cNvSpPr txBox="1"/>
-          <p:nvPr/>
-        </p:nvSpPr>
-        <p:spPr>
-          <a:xfrm>
-            <a:off x="7013448" y="2596896"/>
-            <a:ext cx="1298448" cy="310896"/>
-          </a:xfrm>
-          <a:prstGeom prst="rect">
-            <a:avLst/>
-          </a:prstGeom>
-          <a:noFill/>
-        </p:spPr>
-        <p:txBody>
-          <a:bodyPr wrap="none" anchor="ctr" lIns="0" rIns="0" tIns="0" bIns="0">
-            <a:spAutoFit/>
-          </a:bodyPr>
-          <a:lstStyle/>
-          <a:p>
-            <a:pPr algn="ctr">
-              <a:lnSpc>
-                <a:spcPct val="106000"/>
-              </a:lnSpc>
-              <a:spcBef>
-                <a:spcPts val="0"/>
-              </a:spcBef>
-              <a:spcAft>
-                <a:spcPts val="0"/>
-              </a:spcAft>
-            </a:pPr>
-            <a:r>
-              <a:rPr sz="850" b="1">
-                <a:solidFill>
-                  <a:srgbClr val="B80000"/>
-                </a:solidFill>
-                <a:latin typeface="Red Hat Display"/>
-              </a:rPr>
-              <a:t>MEDIA PASS</a:t>
-            </a:r>
-          </a:p>
-        </p:txBody>
-      </p:sp>
-      <p:pic>
-        <p:nvPicPr>
-          <p:cNvPr id="24" name="Picture 23" descr="eye_slate.png"/>
-          <p:cNvPicPr>
-            <a:picLocks noChangeAspect="1"/>
-          </p:cNvPicPr>
-          <p:nvPr/>
-        </p:nvPicPr>
-        <p:blipFill>
-          <a:blip r:embed="rId4"/>
-          <a:stretch>
-            <a:fillRect/>
-          </a:stretch>
-        </p:blipFill>
-        <p:spPr>
-          <a:xfrm>
-            <a:off x="8843619" y="3108960"/>
-            <a:ext cx="475488" cy="475488"/>
-          </a:xfrm>
-          <a:prstGeom prst="rect">
-            <a:avLst/>
-          </a:prstGeom>
-        </p:spPr>
-      </p:pic>
-      <p:sp>
-        <p:nvSpPr>
-          <p:cNvPr id="25" name="TextBox 24"/>
-          <p:cNvSpPr txBox="1"/>
-          <p:nvPr/>
-        </p:nvSpPr>
-        <p:spPr>
-          <a:xfrm>
-            <a:off x="7050024" y="3721608"/>
-            <a:ext cx="4062679" cy="1481328"/>
-          </a:xfrm>
-          <a:prstGeom prst="rect">
-            <a:avLst/>
-          </a:prstGeom>
-          <a:noFill/>
-        </p:spPr>
-        <p:txBody>
-          <a:bodyPr wrap="square" anchor="t" lIns="0" rIns="0" tIns="0" bIns="0">
-            <a:spAutoFit/>
-          </a:bodyPr>
-          <a:lstStyle/>
-          <a:p>
-            <a:pPr algn="l">
-              <a:lnSpc>
-                <a:spcPct val="120000"/>
-              </a:lnSpc>
-              <a:spcBef>
-                <a:spcPts val="0"/>
-              </a:spcBef>
-              <a:spcAft>
-                <a:spcPts val="0"/>
-              </a:spcAft>
-            </a:pPr>
-            <a:r>
-              <a:rPr sz="950" b="0">
-                <a:solidFill>
-                  <a:srgbClr val="8A9099"/>
-                </a:solidFill>
-                <a:latin typeface="Red Hat Text"/>
-              </a:rPr>
-              <a:t>Concept diagram observability-health-scale-01-three-signals — request fanning into metrics/logs/traces, each labeled with the question it answers.</a:t>
             </a:r>
           </a:p>
         </p:txBody>
@@ -6642,11 +8871,11 @@
         <p:spPr>
           <a:xfrm>
             <a:off x="841248" y="2670048"/>
-            <a:ext cx="5715000" cy="530352"/>
+            <a:ext cx="5138928" cy="786384"/>
           </a:xfrm>
           <a:prstGeom prst="roundRect">
             <a:avLst>
-              <a:gd name="adj" fmla="val 6000"/>
+              <a:gd name="adj" fmla="val 7000"/>
             </a:avLst>
           </a:prstGeom>
           <a:solidFill>
@@ -6681,9 +8910,55 @@
           </a:p>
         </p:txBody>
       </p:sp>
+      <p:sp>
+        <p:nvSpPr>
+          <p:cNvPr id="8" name="Rounded Rectangle 7"/>
+          <p:cNvSpPr/>
+          <p:nvPr/>
+        </p:nvSpPr>
+        <p:spPr>
+          <a:xfrm>
+            <a:off x="987552" y="2807208"/>
+            <a:ext cx="512064" cy="512064"/>
+          </a:xfrm>
+          <a:prstGeom prst="roundRect">
+            <a:avLst>
+              <a:gd name="adj" fmla="val 26000"/>
+            </a:avLst>
+          </a:prstGeom>
+          <a:solidFill>
+            <a:srgbClr val="EE0000"/>
+          </a:solidFill>
+          <a:ln>
+            <a:noFill/>
+          </a:ln>
+          <a:effectLst/>
+        </p:spPr>
+        <p:style>
+          <a:lnRef idx="1">
+            <a:schemeClr val="accent1"/>
+          </a:lnRef>
+          <a:fillRef idx="3">
+            <a:schemeClr val="accent1"/>
+          </a:fillRef>
+          <a:effectRef idx="2">
+            <a:schemeClr val="accent1"/>
+          </a:effectRef>
+          <a:fontRef idx="minor">
+            <a:schemeClr val="lt1"/>
+          </a:fontRef>
+        </p:style>
+        <p:txBody>
+          <a:bodyPr rtlCol="0" anchor="ctr"/>
+          <a:lstStyle/>
+          <a:p>
+            <a:pPr algn="ctr"/>
+          </a:p>
+        </p:txBody>
+      </p:sp>
       <p:pic>
         <p:nvPicPr>
-          <p:cNvPr id="8" name="Picture 7" descr="check_steel.png"/>
+          <p:cNvPr id="9" name="Picture 8" descr="check_white.png"/>
           <p:cNvPicPr>
             <a:picLocks noChangeAspect="1"/>
           </p:cNvPicPr>
@@ -6697,8 +8972,8 @@
         </p:blipFill>
         <p:spPr>
           <a:xfrm>
-            <a:off x="987552" y="2816352"/>
-            <a:ext cx="237744" cy="237744"/>
+            <a:off x="1110447" y="2930103"/>
+            <a:ext cx="266273" cy="266273"/>
           </a:xfrm>
           <a:prstGeom prst="rect">
             <a:avLst/>
@@ -6707,14 +8982,14 @@
       </p:pic>
       <p:sp>
         <p:nvSpPr>
-          <p:cNvPr id="9" name="TextBox 8"/>
+          <p:cNvPr id="10" name="TextBox 9"/>
           <p:cNvSpPr txBox="1"/>
           <p:nvPr/>
         </p:nvSpPr>
         <p:spPr>
           <a:xfrm>
-            <a:off x="1353312" y="2670048"/>
-            <a:ext cx="5029200" cy="530352"/>
+            <a:off x="1627632" y="2670048"/>
+            <a:ext cx="4206240" cy="786384"/>
           </a:xfrm>
           <a:prstGeom prst="rect">
             <a:avLst/>
@@ -6739,7 +9014,7 @@
               </a:spcAft>
             </a:pPr>
             <a:r>
-              <a:rPr sz="1200" b="0">
+              <a:rPr sz="1150" b="0">
                 <a:solidFill>
                   <a:srgbClr val="1A1A1A"/>
                 </a:solidFill>
@@ -6752,18 +9027,18 @@
       </p:sp>
       <p:sp>
         <p:nvSpPr>
-          <p:cNvPr id="10" name="Rounded Rectangle 9"/>
+          <p:cNvPr id="11" name="Rounded Rectangle 10"/>
           <p:cNvSpPr/>
           <p:nvPr/>
         </p:nvSpPr>
         <p:spPr>
           <a:xfrm>
-            <a:off x="841248" y="3273552"/>
-            <a:ext cx="5715000" cy="530352"/>
+            <a:off x="6254496" y="2670048"/>
+            <a:ext cx="5138928" cy="786384"/>
           </a:xfrm>
           <a:prstGeom prst="roundRect">
             <a:avLst>
-              <a:gd name="adj" fmla="val 6000"/>
+              <a:gd name="adj" fmla="val 7000"/>
             </a:avLst>
           </a:prstGeom>
           <a:solidFill>
@@ -6798,9 +9073,55 @@
           </a:p>
         </p:txBody>
       </p:sp>
+      <p:sp>
+        <p:nvSpPr>
+          <p:cNvPr id="12" name="Rounded Rectangle 11"/>
+          <p:cNvSpPr/>
+          <p:nvPr/>
+        </p:nvSpPr>
+        <p:spPr>
+          <a:xfrm>
+            <a:off x="6400800" y="2807208"/>
+            <a:ext cx="512064" cy="512064"/>
+          </a:xfrm>
+          <a:prstGeom prst="roundRect">
+            <a:avLst>
+              <a:gd name="adj" fmla="val 26000"/>
+            </a:avLst>
+          </a:prstGeom>
+          <a:solidFill>
+            <a:srgbClr val="EE0000"/>
+          </a:solidFill>
+          <a:ln>
+            <a:noFill/>
+          </a:ln>
+          <a:effectLst/>
+        </p:spPr>
+        <p:style>
+          <a:lnRef idx="1">
+            <a:schemeClr val="accent1"/>
+          </a:lnRef>
+          <a:fillRef idx="3">
+            <a:schemeClr val="accent1"/>
+          </a:fillRef>
+          <a:effectRef idx="2">
+            <a:schemeClr val="accent1"/>
+          </a:effectRef>
+          <a:fontRef idx="minor">
+            <a:schemeClr val="lt1"/>
+          </a:fontRef>
+        </p:style>
+        <p:txBody>
+          <a:bodyPr rtlCol="0" anchor="ctr"/>
+          <a:lstStyle/>
+          <a:p>
+            <a:pPr algn="ctr"/>
+          </a:p>
+        </p:txBody>
+      </p:sp>
       <p:pic>
         <p:nvPicPr>
-          <p:cNvPr id="11" name="Picture 10" descr="check_steel.png"/>
+          <p:cNvPr id="13" name="Picture 12" descr="check_white.png"/>
           <p:cNvPicPr>
             <a:picLocks noChangeAspect="1"/>
           </p:cNvPicPr>
@@ -6814,8 +9135,8 @@
         </p:blipFill>
         <p:spPr>
           <a:xfrm>
-            <a:off x="987552" y="3419856"/>
-            <a:ext cx="237744" cy="237744"/>
+            <a:off x="6523695" y="2930103"/>
+            <a:ext cx="266273" cy="266273"/>
           </a:xfrm>
           <a:prstGeom prst="rect">
             <a:avLst/>
@@ -6824,14 +9145,14 @@
       </p:pic>
       <p:sp>
         <p:nvSpPr>
-          <p:cNvPr id="12" name="TextBox 11"/>
+          <p:cNvPr id="14" name="TextBox 13"/>
           <p:cNvSpPr txBox="1"/>
           <p:nvPr/>
         </p:nvSpPr>
         <p:spPr>
           <a:xfrm>
-            <a:off x="1353312" y="3273552"/>
-            <a:ext cx="5029200" cy="530352"/>
+            <a:off x="7040880" y="2670048"/>
+            <a:ext cx="4206240" cy="786384"/>
           </a:xfrm>
           <a:prstGeom prst="rect">
             <a:avLst/>
@@ -6856,7 +9177,7 @@
               </a:spcAft>
             </a:pPr>
             <a:r>
-              <a:rPr sz="1200" b="0">
+              <a:rPr sz="1150" b="0">
                 <a:solidFill>
                   <a:srgbClr val="1A1A1A"/>
                 </a:solidFill>
@@ -6869,18 +9190,18 @@
       </p:sp>
       <p:sp>
         <p:nvSpPr>
-          <p:cNvPr id="13" name="Rounded Rectangle 12"/>
+          <p:cNvPr id="15" name="Rounded Rectangle 14"/>
           <p:cNvSpPr/>
           <p:nvPr/>
         </p:nvSpPr>
         <p:spPr>
           <a:xfrm>
-            <a:off x="841248" y="3877056"/>
-            <a:ext cx="5715000" cy="530352"/>
+            <a:off x="841248" y="3602736"/>
+            <a:ext cx="5138928" cy="786384"/>
           </a:xfrm>
           <a:prstGeom prst="roundRect">
             <a:avLst>
-              <a:gd name="adj" fmla="val 6000"/>
+              <a:gd name="adj" fmla="val 7000"/>
             </a:avLst>
           </a:prstGeom>
           <a:solidFill>
@@ -6915,9 +9236,55 @@
           </a:p>
         </p:txBody>
       </p:sp>
+      <p:sp>
+        <p:nvSpPr>
+          <p:cNvPr id="16" name="Rounded Rectangle 15"/>
+          <p:cNvSpPr/>
+          <p:nvPr/>
+        </p:nvSpPr>
+        <p:spPr>
+          <a:xfrm>
+            <a:off x="987552" y="3739896"/>
+            <a:ext cx="512064" cy="512064"/>
+          </a:xfrm>
+          <a:prstGeom prst="roundRect">
+            <a:avLst>
+              <a:gd name="adj" fmla="val 26000"/>
+            </a:avLst>
+          </a:prstGeom>
+          <a:solidFill>
+            <a:srgbClr val="EE0000"/>
+          </a:solidFill>
+          <a:ln>
+            <a:noFill/>
+          </a:ln>
+          <a:effectLst/>
+        </p:spPr>
+        <p:style>
+          <a:lnRef idx="1">
+            <a:schemeClr val="accent1"/>
+          </a:lnRef>
+          <a:fillRef idx="3">
+            <a:schemeClr val="accent1"/>
+          </a:fillRef>
+          <a:effectRef idx="2">
+            <a:schemeClr val="accent1"/>
+          </a:effectRef>
+          <a:fontRef idx="minor">
+            <a:schemeClr val="lt1"/>
+          </a:fontRef>
+        </p:style>
+        <p:txBody>
+          <a:bodyPr rtlCol="0" anchor="ctr"/>
+          <a:lstStyle/>
+          <a:p>
+            <a:pPr algn="ctr"/>
+          </a:p>
+        </p:txBody>
+      </p:sp>
       <p:pic>
         <p:nvPicPr>
-          <p:cNvPr id="14" name="Picture 13" descr="check_steel.png"/>
+          <p:cNvPr id="17" name="Picture 16" descr="check_white.png"/>
           <p:cNvPicPr>
             <a:picLocks noChangeAspect="1"/>
           </p:cNvPicPr>
@@ -6931,8 +9298,8 @@
         </p:blipFill>
         <p:spPr>
           <a:xfrm>
-            <a:off x="987552" y="4023360"/>
-            <a:ext cx="237744" cy="237744"/>
+            <a:off x="1110447" y="3862791"/>
+            <a:ext cx="266273" cy="266273"/>
           </a:xfrm>
           <a:prstGeom prst="rect">
             <a:avLst/>
@@ -6941,14 +9308,14 @@
       </p:pic>
       <p:sp>
         <p:nvSpPr>
-          <p:cNvPr id="15" name="TextBox 14"/>
+          <p:cNvPr id="18" name="TextBox 17"/>
           <p:cNvSpPr txBox="1"/>
           <p:nvPr/>
         </p:nvSpPr>
         <p:spPr>
           <a:xfrm>
-            <a:off x="1353312" y="3877056"/>
-            <a:ext cx="5029200" cy="530352"/>
+            <a:off x="1627632" y="3602736"/>
+            <a:ext cx="4206240" cy="786384"/>
           </a:xfrm>
           <a:prstGeom prst="rect">
             <a:avLst/>
@@ -6973,7 +9340,7 @@
               </a:spcAft>
             </a:pPr>
             <a:r>
-              <a:rPr sz="1200" b="0">
+              <a:rPr sz="1150" b="0">
                 <a:solidFill>
                   <a:srgbClr val="1A1A1A"/>
                 </a:solidFill>
@@ -6986,18 +9353,18 @@
       </p:sp>
       <p:sp>
         <p:nvSpPr>
-          <p:cNvPr id="16" name="Rounded Rectangle 15"/>
+          <p:cNvPr id="19" name="Rounded Rectangle 18"/>
           <p:cNvSpPr/>
           <p:nvPr/>
         </p:nvSpPr>
         <p:spPr>
           <a:xfrm>
-            <a:off x="841248" y="4480560"/>
-            <a:ext cx="5715000" cy="530352"/>
+            <a:off x="6254496" y="3602736"/>
+            <a:ext cx="5138928" cy="786384"/>
           </a:xfrm>
           <a:prstGeom prst="roundRect">
             <a:avLst>
-              <a:gd name="adj" fmla="val 6000"/>
+              <a:gd name="adj" fmla="val 7000"/>
             </a:avLst>
           </a:prstGeom>
           <a:solidFill>
@@ -7032,9 +9399,55 @@
           </a:p>
         </p:txBody>
       </p:sp>
+      <p:sp>
+        <p:nvSpPr>
+          <p:cNvPr id="20" name="Rounded Rectangle 19"/>
+          <p:cNvSpPr/>
+          <p:nvPr/>
+        </p:nvSpPr>
+        <p:spPr>
+          <a:xfrm>
+            <a:off x="6400800" y="3739896"/>
+            <a:ext cx="512064" cy="512064"/>
+          </a:xfrm>
+          <a:prstGeom prst="roundRect">
+            <a:avLst>
+              <a:gd name="adj" fmla="val 26000"/>
+            </a:avLst>
+          </a:prstGeom>
+          <a:solidFill>
+            <a:srgbClr val="EE0000"/>
+          </a:solidFill>
+          <a:ln>
+            <a:noFill/>
+          </a:ln>
+          <a:effectLst/>
+        </p:spPr>
+        <p:style>
+          <a:lnRef idx="1">
+            <a:schemeClr val="accent1"/>
+          </a:lnRef>
+          <a:fillRef idx="3">
+            <a:schemeClr val="accent1"/>
+          </a:fillRef>
+          <a:effectRef idx="2">
+            <a:schemeClr val="accent1"/>
+          </a:effectRef>
+          <a:fontRef idx="minor">
+            <a:schemeClr val="lt1"/>
+          </a:fontRef>
+        </p:style>
+        <p:txBody>
+          <a:bodyPr rtlCol="0" anchor="ctr"/>
+          <a:lstStyle/>
+          <a:p>
+            <a:pPr algn="ctr"/>
+          </a:p>
+        </p:txBody>
+      </p:sp>
       <p:pic>
         <p:nvPicPr>
-          <p:cNvPr id="17" name="Picture 16" descr="check_steel.png"/>
+          <p:cNvPr id="21" name="Picture 20" descr="check_white.png"/>
           <p:cNvPicPr>
             <a:picLocks noChangeAspect="1"/>
           </p:cNvPicPr>
@@ -7048,8 +9461,8 @@
         </p:blipFill>
         <p:spPr>
           <a:xfrm>
-            <a:off x="987552" y="4626864"/>
-            <a:ext cx="237744" cy="237744"/>
+            <a:off x="6523695" y="3862791"/>
+            <a:ext cx="266273" cy="266273"/>
           </a:xfrm>
           <a:prstGeom prst="rect">
             <a:avLst/>
@@ -7058,14 +9471,14 @@
       </p:pic>
       <p:sp>
         <p:nvSpPr>
-          <p:cNvPr id="18" name="TextBox 17"/>
+          <p:cNvPr id="22" name="TextBox 21"/>
           <p:cNvSpPr txBox="1"/>
           <p:nvPr/>
         </p:nvSpPr>
         <p:spPr>
           <a:xfrm>
-            <a:off x="1353312" y="4480560"/>
-            <a:ext cx="5029200" cy="530352"/>
+            <a:off x="7040880" y="3602736"/>
+            <a:ext cx="4206240" cy="786384"/>
           </a:xfrm>
           <a:prstGeom prst="rect">
             <a:avLst/>
@@ -7090,7 +9503,7 @@
               </a:spcAft>
             </a:pPr>
             <a:r>
-              <a:rPr sz="1200" b="0">
+              <a:rPr sz="1150" b="0">
                 <a:solidFill>
                   <a:srgbClr val="1A1A1A"/>
                 </a:solidFill>
@@ -7103,18 +9516,18 @@
       </p:sp>
       <p:sp>
         <p:nvSpPr>
-          <p:cNvPr id="19" name="Rounded Rectangle 18"/>
+          <p:cNvPr id="23" name="Rounded Rectangle 22"/>
           <p:cNvSpPr/>
           <p:nvPr/>
         </p:nvSpPr>
         <p:spPr>
           <a:xfrm>
-            <a:off x="841248" y="5084064"/>
-            <a:ext cx="5715000" cy="530352"/>
+            <a:off x="841248" y="4535424"/>
+            <a:ext cx="5138928" cy="786384"/>
           </a:xfrm>
           <a:prstGeom prst="roundRect">
             <a:avLst>
-              <a:gd name="adj" fmla="val 6000"/>
+              <a:gd name="adj" fmla="val 7000"/>
             </a:avLst>
           </a:prstGeom>
           <a:solidFill>
@@ -7149,9 +9562,55 @@
           </a:p>
         </p:txBody>
       </p:sp>
+      <p:sp>
+        <p:nvSpPr>
+          <p:cNvPr id="24" name="Rounded Rectangle 23"/>
+          <p:cNvSpPr/>
+          <p:nvPr/>
+        </p:nvSpPr>
+        <p:spPr>
+          <a:xfrm>
+            <a:off x="987552" y="4672584"/>
+            <a:ext cx="512064" cy="512064"/>
+          </a:xfrm>
+          <a:prstGeom prst="roundRect">
+            <a:avLst>
+              <a:gd name="adj" fmla="val 26000"/>
+            </a:avLst>
+          </a:prstGeom>
+          <a:solidFill>
+            <a:srgbClr val="EE0000"/>
+          </a:solidFill>
+          <a:ln>
+            <a:noFill/>
+          </a:ln>
+          <a:effectLst/>
+        </p:spPr>
+        <p:style>
+          <a:lnRef idx="1">
+            <a:schemeClr val="accent1"/>
+          </a:lnRef>
+          <a:fillRef idx="3">
+            <a:schemeClr val="accent1"/>
+          </a:fillRef>
+          <a:effectRef idx="2">
+            <a:schemeClr val="accent1"/>
+          </a:effectRef>
+          <a:fontRef idx="minor">
+            <a:schemeClr val="lt1"/>
+          </a:fontRef>
+        </p:style>
+        <p:txBody>
+          <a:bodyPr rtlCol="0" anchor="ctr"/>
+          <a:lstStyle/>
+          <a:p>
+            <a:pPr algn="ctr"/>
+          </a:p>
+        </p:txBody>
+      </p:sp>
       <p:pic>
         <p:nvPicPr>
-          <p:cNvPr id="20" name="Picture 19" descr="check_steel.png"/>
+          <p:cNvPr id="25" name="Picture 24" descr="check_white.png"/>
           <p:cNvPicPr>
             <a:picLocks noChangeAspect="1"/>
           </p:cNvPicPr>
@@ -7165,8 +9624,8 @@
         </p:blipFill>
         <p:spPr>
           <a:xfrm>
-            <a:off x="987552" y="5230368"/>
-            <a:ext cx="237744" cy="237744"/>
+            <a:off x="1110447" y="4795479"/>
+            <a:ext cx="266273" cy="266273"/>
           </a:xfrm>
           <a:prstGeom prst="rect">
             <a:avLst/>
@@ -7175,14 +9634,14 @@
       </p:pic>
       <p:sp>
         <p:nvSpPr>
-          <p:cNvPr id="21" name="TextBox 20"/>
+          <p:cNvPr id="26" name="TextBox 25"/>
           <p:cNvSpPr txBox="1"/>
           <p:nvPr/>
         </p:nvSpPr>
         <p:spPr>
           <a:xfrm>
-            <a:off x="1353312" y="5084064"/>
-            <a:ext cx="5029200" cy="530352"/>
+            <a:off x="1627632" y="4535424"/>
+            <a:ext cx="4206240" cy="786384"/>
           </a:xfrm>
           <a:prstGeom prst="rect">
             <a:avLst/>
@@ -7207,221 +9666,13 @@
               </a:spcAft>
             </a:pPr>
             <a:r>
-              <a:rPr sz="1200" b="0">
+              <a:rPr sz="1150" b="0">
                 <a:solidFill>
                   <a:srgbClr val="1A1A1A"/>
                 </a:solidFill>
                 <a:latin typeface="Red Hat Text"/>
               </a:rPr>
               <a:t>The claims app already speaks it: /q/metrics + a custom `claims_created_total`</a:t>
-            </a:r>
-          </a:p>
-        </p:txBody>
-      </p:sp>
-      <p:sp>
-        <p:nvSpPr>
-          <p:cNvPr id="22" name="Rounded Rectangle 21"/>
-          <p:cNvSpPr/>
-          <p:nvPr/>
-        </p:nvSpPr>
-        <p:spPr>
-          <a:xfrm>
-            <a:off x="6812280" y="2670048"/>
-            <a:ext cx="4538167" cy="2944368"/>
-          </a:xfrm>
-          <a:prstGeom prst="roundRect">
-            <a:avLst>
-              <a:gd name="adj" fmla="val 4000"/>
-            </a:avLst>
-          </a:prstGeom>
-          <a:solidFill>
-            <a:srgbClr val="FFFFFF"/>
-          </a:solidFill>
-          <a:ln w="15240">
-            <a:solidFill>
-              <a:srgbClr val="DDE1E6"/>
-            </a:solidFill>
-          </a:ln>
-          <a:effectLst/>
-        </p:spPr>
-        <p:style>
-          <a:lnRef idx="1">
-            <a:schemeClr val="accent1"/>
-          </a:lnRef>
-          <a:fillRef idx="3">
-            <a:schemeClr val="accent1"/>
-          </a:fillRef>
-          <a:effectRef idx="2">
-            <a:schemeClr val="accent1"/>
-          </a:effectRef>
-          <a:fontRef idx="minor">
-            <a:schemeClr val="lt1"/>
-          </a:fontRef>
-        </p:style>
-        <p:txBody>
-          <a:bodyPr rtlCol="0" anchor="ctr"/>
-          <a:lstStyle/>
-          <a:p>
-            <a:pPr algn="ctr"/>
-          </a:p>
-        </p:txBody>
-      </p:sp>
-      <p:sp>
-        <p:nvSpPr>
-          <p:cNvPr id="23" name="Rounded Rectangle 22"/>
-          <p:cNvSpPr/>
-          <p:nvPr/>
-        </p:nvSpPr>
-        <p:spPr>
-          <a:xfrm>
-            <a:off x="7013448" y="2871216"/>
-            <a:ext cx="1298448" cy="310896"/>
-          </a:xfrm>
-          <a:prstGeom prst="roundRect">
-            <a:avLst>
-              <a:gd name="adj" fmla="val 50000"/>
-            </a:avLst>
-          </a:prstGeom>
-          <a:solidFill>
-            <a:srgbClr val="FCECEC"/>
-          </a:solidFill>
-          <a:ln>
-            <a:noFill/>
-          </a:ln>
-          <a:effectLst/>
-        </p:spPr>
-        <p:style>
-          <a:lnRef idx="1">
-            <a:schemeClr val="accent1"/>
-          </a:lnRef>
-          <a:fillRef idx="3">
-            <a:schemeClr val="accent1"/>
-          </a:fillRef>
-          <a:effectRef idx="2">
-            <a:schemeClr val="accent1"/>
-          </a:effectRef>
-          <a:fontRef idx="minor">
-            <a:schemeClr val="lt1"/>
-          </a:fontRef>
-        </p:style>
-        <p:txBody>
-          <a:bodyPr rtlCol="0" anchor="ctr"/>
-          <a:lstStyle/>
-          <a:p>
-            <a:pPr algn="ctr"/>
-          </a:p>
-        </p:txBody>
-      </p:sp>
-      <p:sp>
-        <p:nvSpPr>
-          <p:cNvPr id="24" name="TextBox 23"/>
-          <p:cNvSpPr txBox="1"/>
-          <p:nvPr/>
-        </p:nvSpPr>
-        <p:spPr>
-          <a:xfrm>
-            <a:off x="7013448" y="2871216"/>
-            <a:ext cx="1298448" cy="310896"/>
-          </a:xfrm>
-          <a:prstGeom prst="rect">
-            <a:avLst/>
-          </a:prstGeom>
-          <a:noFill/>
-        </p:spPr>
-        <p:txBody>
-          <a:bodyPr wrap="none" anchor="ctr" lIns="0" rIns="0" tIns="0" bIns="0">
-            <a:spAutoFit/>
-          </a:bodyPr>
-          <a:lstStyle/>
-          <a:p>
-            <a:pPr algn="ctr">
-              <a:lnSpc>
-                <a:spcPct val="106000"/>
-              </a:lnSpc>
-              <a:spcBef>
-                <a:spcPts val="0"/>
-              </a:spcBef>
-              <a:spcAft>
-                <a:spcPts val="0"/>
-              </a:spcAft>
-            </a:pPr>
-            <a:r>
-              <a:rPr sz="850" b="1">
-                <a:solidFill>
-                  <a:srgbClr val="B80000"/>
-                </a:solidFill>
-                <a:latin typeface="Red Hat Display"/>
-              </a:rPr>
-              <a:t>MEDIA PASS</a:t>
-            </a:r>
-          </a:p>
-        </p:txBody>
-      </p:sp>
-      <p:pic>
-        <p:nvPicPr>
-          <p:cNvPr id="25" name="Picture 24" descr="eye_slate.png"/>
-          <p:cNvPicPr>
-            <a:picLocks noChangeAspect="1"/>
-          </p:cNvPicPr>
-          <p:nvPr/>
-        </p:nvPicPr>
-        <p:blipFill>
-          <a:blip r:embed="rId4"/>
-          <a:stretch>
-            <a:fillRect/>
-          </a:stretch>
-        </p:blipFill>
-        <p:spPr>
-          <a:xfrm>
-            <a:off x="8843619" y="3383280"/>
-            <a:ext cx="475488" cy="475488"/>
-          </a:xfrm>
-          <a:prstGeom prst="rect">
-            <a:avLst/>
-          </a:prstGeom>
-        </p:spPr>
-      </p:pic>
-      <p:sp>
-        <p:nvSpPr>
-          <p:cNvPr id="26" name="TextBox 25"/>
-          <p:cNvSpPr txBox="1"/>
-          <p:nvPr/>
-        </p:nvSpPr>
-        <p:spPr>
-          <a:xfrm>
-            <a:off x="7050024" y="3995928"/>
-            <a:ext cx="4062679" cy="1481328"/>
-          </a:xfrm>
-          <a:prstGeom prst="rect">
-            <a:avLst/>
-          </a:prstGeom>
-          <a:noFill/>
-        </p:spPr>
-        <p:txBody>
-          <a:bodyPr wrap="square" anchor="t" lIns="0" rIns="0" tIns="0" bIns="0">
-            <a:spAutoFit/>
-          </a:bodyPr>
-          <a:lstStyle/>
-          <a:p>
-            <a:pPr algn="l">
-              <a:lnSpc>
-                <a:spcPct val="120000"/>
-              </a:lnSpc>
-              <a:spcBef>
-                <a:spcPts val="0"/>
-              </a:spcBef>
-              <a:spcAft>
-                <a:spcPts val="0"/>
-              </a:spcAft>
-            </a:pPr>
-            <a:r>
-              <a:rPr sz="950" b="0">
-                <a:solidFill>
-                  <a:srgbClr val="8A9099"/>
-                </a:solidFill>
-                <a:latin typeface="Red Hat Text"/>
-              </a:rPr>
-              <a:t>Concept diagram observability-health-scale-02-servicemonitor-bridge — app /q/metrics → ServiceMonitor → user-workload monitoring → console + your alert.</a:t>
             </a:r>
           </a:p>
         </p:txBody>
@@ -7729,11 +9980,11 @@
         <p:spPr>
           <a:xfrm>
             <a:off x="841248" y="2395728"/>
-            <a:ext cx="5715000" cy="530352"/>
+            <a:ext cx="5138928" cy="786384"/>
           </a:xfrm>
           <a:prstGeom prst="roundRect">
             <a:avLst>
-              <a:gd name="adj" fmla="val 6000"/>
+              <a:gd name="adj" fmla="val 7000"/>
             </a:avLst>
           </a:prstGeom>
           <a:solidFill>
@@ -7768,9 +10019,55 @@
           </a:p>
         </p:txBody>
       </p:sp>
+      <p:sp>
+        <p:nvSpPr>
+          <p:cNvPr id="7" name="Rounded Rectangle 6"/>
+          <p:cNvSpPr/>
+          <p:nvPr/>
+        </p:nvSpPr>
+        <p:spPr>
+          <a:xfrm>
+            <a:off x="987552" y="2532888"/>
+            <a:ext cx="512064" cy="512064"/>
+          </a:xfrm>
+          <a:prstGeom prst="roundRect">
+            <a:avLst>
+              <a:gd name="adj" fmla="val 26000"/>
+            </a:avLst>
+          </a:prstGeom>
+          <a:solidFill>
+            <a:srgbClr val="EE0000"/>
+          </a:solidFill>
+          <a:ln>
+            <a:noFill/>
+          </a:ln>
+          <a:effectLst/>
+        </p:spPr>
+        <p:style>
+          <a:lnRef idx="1">
+            <a:schemeClr val="accent1"/>
+          </a:lnRef>
+          <a:fillRef idx="3">
+            <a:schemeClr val="accent1"/>
+          </a:fillRef>
+          <a:effectRef idx="2">
+            <a:schemeClr val="accent1"/>
+          </a:effectRef>
+          <a:fontRef idx="minor">
+            <a:schemeClr val="lt1"/>
+          </a:fontRef>
+        </p:style>
+        <p:txBody>
+          <a:bodyPr rtlCol="0" anchor="ctr"/>
+          <a:lstStyle/>
+          <a:p>
+            <a:pPr algn="ctr"/>
+          </a:p>
+        </p:txBody>
+      </p:sp>
       <p:pic>
         <p:nvPicPr>
-          <p:cNvPr id="7" name="Picture 6" descr="check_steel.png"/>
+          <p:cNvPr id="8" name="Picture 7" descr="check_white.png"/>
           <p:cNvPicPr>
             <a:picLocks noChangeAspect="1"/>
           </p:cNvPicPr>
@@ -7784,8 +10081,8 @@
         </p:blipFill>
         <p:spPr>
           <a:xfrm>
-            <a:off x="987552" y="2542032"/>
-            <a:ext cx="237744" cy="237744"/>
+            <a:off x="1110447" y="2655783"/>
+            <a:ext cx="266273" cy="266273"/>
           </a:xfrm>
           <a:prstGeom prst="rect">
             <a:avLst/>
@@ -7794,14 +10091,14 @@
       </p:pic>
       <p:sp>
         <p:nvSpPr>
-          <p:cNvPr id="8" name="TextBox 7"/>
+          <p:cNvPr id="9" name="TextBox 8"/>
           <p:cNvSpPr txBox="1"/>
           <p:nvPr/>
         </p:nvSpPr>
         <p:spPr>
           <a:xfrm>
-            <a:off x="1353312" y="2395728"/>
-            <a:ext cx="5029200" cy="530352"/>
+            <a:off x="1627632" y="2395728"/>
+            <a:ext cx="4206240" cy="786384"/>
           </a:xfrm>
           <a:prstGeom prst="rect">
             <a:avLst/>
@@ -7826,7 +10123,7 @@
               </a:spcAft>
             </a:pPr>
             <a:r>
-              <a:rPr sz="1200" b="0">
+              <a:rPr sz="1150" b="0">
                 <a:solidFill>
                   <a:srgbClr val="1A1A1A"/>
                 </a:solidFill>
@@ -7839,18 +10136,18 @@
       </p:sp>
       <p:sp>
         <p:nvSpPr>
-          <p:cNvPr id="9" name="Rounded Rectangle 8"/>
+          <p:cNvPr id="10" name="Rounded Rectangle 9"/>
           <p:cNvSpPr/>
           <p:nvPr/>
         </p:nvSpPr>
         <p:spPr>
           <a:xfrm>
-            <a:off x="841248" y="2999232"/>
-            <a:ext cx="5715000" cy="530352"/>
+            <a:off x="6254496" y="2395728"/>
+            <a:ext cx="5138928" cy="786384"/>
           </a:xfrm>
           <a:prstGeom prst="roundRect">
             <a:avLst>
-              <a:gd name="adj" fmla="val 6000"/>
+              <a:gd name="adj" fmla="val 7000"/>
             </a:avLst>
           </a:prstGeom>
           <a:solidFill>
@@ -7885,9 +10182,55 @@
           </a:p>
         </p:txBody>
       </p:sp>
+      <p:sp>
+        <p:nvSpPr>
+          <p:cNvPr id="11" name="Rounded Rectangle 10"/>
+          <p:cNvSpPr/>
+          <p:nvPr/>
+        </p:nvSpPr>
+        <p:spPr>
+          <a:xfrm>
+            <a:off x="6400800" y="2532888"/>
+            <a:ext cx="512064" cy="512064"/>
+          </a:xfrm>
+          <a:prstGeom prst="roundRect">
+            <a:avLst>
+              <a:gd name="adj" fmla="val 26000"/>
+            </a:avLst>
+          </a:prstGeom>
+          <a:solidFill>
+            <a:srgbClr val="EE0000"/>
+          </a:solidFill>
+          <a:ln>
+            <a:noFill/>
+          </a:ln>
+          <a:effectLst/>
+        </p:spPr>
+        <p:style>
+          <a:lnRef idx="1">
+            <a:schemeClr val="accent1"/>
+          </a:lnRef>
+          <a:fillRef idx="3">
+            <a:schemeClr val="accent1"/>
+          </a:fillRef>
+          <a:effectRef idx="2">
+            <a:schemeClr val="accent1"/>
+          </a:effectRef>
+          <a:fontRef idx="minor">
+            <a:schemeClr val="lt1"/>
+          </a:fontRef>
+        </p:style>
+        <p:txBody>
+          <a:bodyPr rtlCol="0" anchor="ctr"/>
+          <a:lstStyle/>
+          <a:p>
+            <a:pPr algn="ctr"/>
+          </a:p>
+        </p:txBody>
+      </p:sp>
       <p:pic>
         <p:nvPicPr>
-          <p:cNvPr id="10" name="Picture 9" descr="check_steel.png"/>
+          <p:cNvPr id="12" name="Picture 11" descr="check_white.png"/>
           <p:cNvPicPr>
             <a:picLocks noChangeAspect="1"/>
           </p:cNvPicPr>
@@ -7901,8 +10244,8 @@
         </p:blipFill>
         <p:spPr>
           <a:xfrm>
-            <a:off x="987552" y="3145536"/>
-            <a:ext cx="237744" cy="237744"/>
+            <a:off x="6523695" y="2655783"/>
+            <a:ext cx="266273" cy="266273"/>
           </a:xfrm>
           <a:prstGeom prst="rect">
             <a:avLst/>
@@ -7911,14 +10254,14 @@
       </p:pic>
       <p:sp>
         <p:nvSpPr>
-          <p:cNvPr id="11" name="TextBox 10"/>
+          <p:cNvPr id="13" name="TextBox 12"/>
           <p:cNvSpPr txBox="1"/>
           <p:nvPr/>
         </p:nvSpPr>
         <p:spPr>
           <a:xfrm>
-            <a:off x="1353312" y="2999232"/>
-            <a:ext cx="5029200" cy="530352"/>
+            <a:off x="7040880" y="2395728"/>
+            <a:ext cx="4206240" cy="786384"/>
           </a:xfrm>
           <a:prstGeom prst="rect">
             <a:avLst/>
@@ -7943,7 +10286,7 @@
               </a:spcAft>
             </a:pPr>
             <a:r>
-              <a:rPr sz="1200" b="0">
+              <a:rPr sz="1150" b="0">
                 <a:solidFill>
                   <a:srgbClr val="1A1A1A"/>
                 </a:solidFill>
@@ -7956,18 +10299,18 @@
       </p:sp>
       <p:sp>
         <p:nvSpPr>
-          <p:cNvPr id="12" name="Rounded Rectangle 11"/>
+          <p:cNvPr id="14" name="Rounded Rectangle 13"/>
           <p:cNvSpPr/>
           <p:nvPr/>
         </p:nvSpPr>
         <p:spPr>
           <a:xfrm>
-            <a:off x="841248" y="3602736"/>
-            <a:ext cx="5715000" cy="530352"/>
+            <a:off x="841248" y="3328416"/>
+            <a:ext cx="5138928" cy="786384"/>
           </a:xfrm>
           <a:prstGeom prst="roundRect">
             <a:avLst>
-              <a:gd name="adj" fmla="val 6000"/>
+              <a:gd name="adj" fmla="val 7000"/>
             </a:avLst>
           </a:prstGeom>
           <a:solidFill>
@@ -8002,9 +10345,55 @@
           </a:p>
         </p:txBody>
       </p:sp>
+      <p:sp>
+        <p:nvSpPr>
+          <p:cNvPr id="15" name="Rounded Rectangle 14"/>
+          <p:cNvSpPr/>
+          <p:nvPr/>
+        </p:nvSpPr>
+        <p:spPr>
+          <a:xfrm>
+            <a:off x="987552" y="3465576"/>
+            <a:ext cx="512064" cy="512064"/>
+          </a:xfrm>
+          <a:prstGeom prst="roundRect">
+            <a:avLst>
+              <a:gd name="adj" fmla="val 26000"/>
+            </a:avLst>
+          </a:prstGeom>
+          <a:solidFill>
+            <a:srgbClr val="EE0000"/>
+          </a:solidFill>
+          <a:ln>
+            <a:noFill/>
+          </a:ln>
+          <a:effectLst/>
+        </p:spPr>
+        <p:style>
+          <a:lnRef idx="1">
+            <a:schemeClr val="accent1"/>
+          </a:lnRef>
+          <a:fillRef idx="3">
+            <a:schemeClr val="accent1"/>
+          </a:fillRef>
+          <a:effectRef idx="2">
+            <a:schemeClr val="accent1"/>
+          </a:effectRef>
+          <a:fontRef idx="minor">
+            <a:schemeClr val="lt1"/>
+          </a:fontRef>
+        </p:style>
+        <p:txBody>
+          <a:bodyPr rtlCol="0" anchor="ctr"/>
+          <a:lstStyle/>
+          <a:p>
+            <a:pPr algn="ctr"/>
+          </a:p>
+        </p:txBody>
+      </p:sp>
       <p:pic>
         <p:nvPicPr>
-          <p:cNvPr id="13" name="Picture 12" descr="check_steel.png"/>
+          <p:cNvPr id="16" name="Picture 15" descr="check_white.png"/>
           <p:cNvPicPr>
             <a:picLocks noChangeAspect="1"/>
           </p:cNvPicPr>
@@ -8018,8 +10407,8 @@
         </p:blipFill>
         <p:spPr>
           <a:xfrm>
-            <a:off x="987552" y="3749040"/>
-            <a:ext cx="237744" cy="237744"/>
+            <a:off x="1110447" y="3588471"/>
+            <a:ext cx="266273" cy="266273"/>
           </a:xfrm>
           <a:prstGeom prst="rect">
             <a:avLst/>
@@ -8028,14 +10417,14 @@
       </p:pic>
       <p:sp>
         <p:nvSpPr>
-          <p:cNvPr id="14" name="TextBox 13"/>
+          <p:cNvPr id="17" name="TextBox 16"/>
           <p:cNvSpPr txBox="1"/>
           <p:nvPr/>
         </p:nvSpPr>
         <p:spPr>
           <a:xfrm>
-            <a:off x="1353312" y="3602736"/>
-            <a:ext cx="5029200" cy="530352"/>
+            <a:off x="1627632" y="3328416"/>
+            <a:ext cx="4206240" cy="786384"/>
           </a:xfrm>
           <a:prstGeom prst="rect">
             <a:avLst/>
@@ -8060,7 +10449,7 @@
               </a:spcAft>
             </a:pPr>
             <a:r>
-              <a:rPr sz="1200" b="0">
+              <a:rPr sz="1150" b="0">
                 <a:solidFill>
                   <a:srgbClr val="1A1A1A"/>
                 </a:solidFill>
@@ -8073,18 +10462,18 @@
       </p:sp>
       <p:sp>
         <p:nvSpPr>
-          <p:cNvPr id="15" name="Rounded Rectangle 14"/>
+          <p:cNvPr id="18" name="Rounded Rectangle 17"/>
           <p:cNvSpPr/>
           <p:nvPr/>
         </p:nvSpPr>
         <p:spPr>
           <a:xfrm>
-            <a:off x="841248" y="4206240"/>
-            <a:ext cx="5715000" cy="530352"/>
+            <a:off x="6254496" y="3328416"/>
+            <a:ext cx="5138928" cy="786384"/>
           </a:xfrm>
           <a:prstGeom prst="roundRect">
             <a:avLst>
-              <a:gd name="adj" fmla="val 6000"/>
+              <a:gd name="adj" fmla="val 7000"/>
             </a:avLst>
           </a:prstGeom>
           <a:solidFill>
@@ -8119,9 +10508,55 @@
           </a:p>
         </p:txBody>
       </p:sp>
+      <p:sp>
+        <p:nvSpPr>
+          <p:cNvPr id="19" name="Rounded Rectangle 18"/>
+          <p:cNvSpPr/>
+          <p:nvPr/>
+        </p:nvSpPr>
+        <p:spPr>
+          <a:xfrm>
+            <a:off x="6400800" y="3465576"/>
+            <a:ext cx="512064" cy="512064"/>
+          </a:xfrm>
+          <a:prstGeom prst="roundRect">
+            <a:avLst>
+              <a:gd name="adj" fmla="val 26000"/>
+            </a:avLst>
+          </a:prstGeom>
+          <a:solidFill>
+            <a:srgbClr val="EE0000"/>
+          </a:solidFill>
+          <a:ln>
+            <a:noFill/>
+          </a:ln>
+          <a:effectLst/>
+        </p:spPr>
+        <p:style>
+          <a:lnRef idx="1">
+            <a:schemeClr val="accent1"/>
+          </a:lnRef>
+          <a:fillRef idx="3">
+            <a:schemeClr val="accent1"/>
+          </a:fillRef>
+          <a:effectRef idx="2">
+            <a:schemeClr val="accent1"/>
+          </a:effectRef>
+          <a:fontRef idx="minor">
+            <a:schemeClr val="lt1"/>
+          </a:fontRef>
+        </p:style>
+        <p:txBody>
+          <a:bodyPr rtlCol="0" anchor="ctr"/>
+          <a:lstStyle/>
+          <a:p>
+            <a:pPr algn="ctr"/>
+          </a:p>
+        </p:txBody>
+      </p:sp>
       <p:pic>
         <p:nvPicPr>
-          <p:cNvPr id="16" name="Picture 15" descr="check_steel.png"/>
+          <p:cNvPr id="20" name="Picture 19" descr="check_white.png"/>
           <p:cNvPicPr>
             <a:picLocks noChangeAspect="1"/>
           </p:cNvPicPr>
@@ -8135,8 +10570,8 @@
         </p:blipFill>
         <p:spPr>
           <a:xfrm>
-            <a:off x="987552" y="4352544"/>
-            <a:ext cx="237744" cy="237744"/>
+            <a:off x="6523695" y="3588471"/>
+            <a:ext cx="266273" cy="266273"/>
           </a:xfrm>
           <a:prstGeom prst="rect">
             <a:avLst/>
@@ -8145,14 +10580,14 @@
       </p:pic>
       <p:sp>
         <p:nvSpPr>
-          <p:cNvPr id="17" name="TextBox 16"/>
+          <p:cNvPr id="21" name="TextBox 20"/>
           <p:cNvSpPr txBox="1"/>
           <p:nvPr/>
         </p:nvSpPr>
         <p:spPr>
           <a:xfrm>
-            <a:off x="1353312" y="4206240"/>
-            <a:ext cx="5029200" cy="530352"/>
+            <a:off x="7040880" y="3328416"/>
+            <a:ext cx="4206240" cy="786384"/>
           </a:xfrm>
           <a:prstGeom prst="rect">
             <a:avLst/>
@@ -8177,7 +10612,7 @@
               </a:spcAft>
             </a:pPr>
             <a:r>
-              <a:rPr sz="1200" b="0">
+              <a:rPr sz="1150" b="0">
                 <a:solidFill>
                   <a:srgbClr val="1A1A1A"/>
                 </a:solidFill>
@@ -8190,18 +10625,18 @@
       </p:sp>
       <p:sp>
         <p:nvSpPr>
-          <p:cNvPr id="18" name="Rounded Rectangle 17"/>
+          <p:cNvPr id="22" name="Rounded Rectangle 21"/>
           <p:cNvSpPr/>
           <p:nvPr/>
         </p:nvSpPr>
         <p:spPr>
           <a:xfrm>
-            <a:off x="841248" y="4809744"/>
-            <a:ext cx="5715000" cy="530352"/>
+            <a:off x="841248" y="4261104"/>
+            <a:ext cx="5138928" cy="786384"/>
           </a:xfrm>
           <a:prstGeom prst="roundRect">
             <a:avLst>
-              <a:gd name="adj" fmla="val 6000"/>
+              <a:gd name="adj" fmla="val 7000"/>
             </a:avLst>
           </a:prstGeom>
           <a:solidFill>
@@ -8236,9 +10671,55 @@
           </a:p>
         </p:txBody>
       </p:sp>
+      <p:sp>
+        <p:nvSpPr>
+          <p:cNvPr id="23" name="Rounded Rectangle 22"/>
+          <p:cNvSpPr/>
+          <p:nvPr/>
+        </p:nvSpPr>
+        <p:spPr>
+          <a:xfrm>
+            <a:off x="987552" y="4398264"/>
+            <a:ext cx="512064" cy="512064"/>
+          </a:xfrm>
+          <a:prstGeom prst="roundRect">
+            <a:avLst>
+              <a:gd name="adj" fmla="val 26000"/>
+            </a:avLst>
+          </a:prstGeom>
+          <a:solidFill>
+            <a:srgbClr val="EE0000"/>
+          </a:solidFill>
+          <a:ln>
+            <a:noFill/>
+          </a:ln>
+          <a:effectLst/>
+        </p:spPr>
+        <p:style>
+          <a:lnRef idx="1">
+            <a:schemeClr val="accent1"/>
+          </a:lnRef>
+          <a:fillRef idx="3">
+            <a:schemeClr val="accent1"/>
+          </a:fillRef>
+          <a:effectRef idx="2">
+            <a:schemeClr val="accent1"/>
+          </a:effectRef>
+          <a:fontRef idx="minor">
+            <a:schemeClr val="lt1"/>
+          </a:fontRef>
+        </p:style>
+        <p:txBody>
+          <a:bodyPr rtlCol="0" anchor="ctr"/>
+          <a:lstStyle/>
+          <a:p>
+            <a:pPr algn="ctr"/>
+          </a:p>
+        </p:txBody>
+      </p:sp>
       <p:pic>
         <p:nvPicPr>
-          <p:cNvPr id="19" name="Picture 18" descr="check_steel.png"/>
+          <p:cNvPr id="24" name="Picture 23" descr="check_white.png"/>
           <p:cNvPicPr>
             <a:picLocks noChangeAspect="1"/>
           </p:cNvPicPr>
@@ -8252,8 +10733,8 @@
         </p:blipFill>
         <p:spPr>
           <a:xfrm>
-            <a:off x="987552" y="4956048"/>
-            <a:ext cx="237744" cy="237744"/>
+            <a:off x="1110447" y="4521159"/>
+            <a:ext cx="266273" cy="266273"/>
           </a:xfrm>
           <a:prstGeom prst="rect">
             <a:avLst/>
@@ -8262,14 +10743,14 @@
       </p:pic>
       <p:sp>
         <p:nvSpPr>
-          <p:cNvPr id="20" name="TextBox 19"/>
+          <p:cNvPr id="25" name="TextBox 24"/>
           <p:cNvSpPr txBox="1"/>
           <p:nvPr/>
         </p:nvSpPr>
         <p:spPr>
           <a:xfrm>
-            <a:off x="1353312" y="4809744"/>
-            <a:ext cx="5029200" cy="530352"/>
+            <a:off x="1627632" y="4261104"/>
+            <a:ext cx="4206240" cy="786384"/>
           </a:xfrm>
           <a:prstGeom prst="rect">
             <a:avLst/>
@@ -8294,221 +10775,13 @@
               </a:spcAft>
             </a:pPr>
             <a:r>
-              <a:rPr sz="1200" b="0">
+              <a:rPr sz="1150" b="0">
                 <a:solidFill>
                   <a:srgbClr val="1A1A1A"/>
                 </a:solidFill>
                 <a:latin typeface="Red Hat Text"/>
               </a:rPr>
               <a:t>Recover: DB back **and** restart the app (the connection pool is poisoned)</a:t>
-            </a:r>
-          </a:p>
-        </p:txBody>
-      </p:sp>
-      <p:sp>
-        <p:nvSpPr>
-          <p:cNvPr id="21" name="Rounded Rectangle 20"/>
-          <p:cNvSpPr/>
-          <p:nvPr/>
-        </p:nvSpPr>
-        <p:spPr>
-          <a:xfrm>
-            <a:off x="6812280" y="2395728"/>
-            <a:ext cx="4538167" cy="2944368"/>
-          </a:xfrm>
-          <a:prstGeom prst="roundRect">
-            <a:avLst>
-              <a:gd name="adj" fmla="val 4000"/>
-            </a:avLst>
-          </a:prstGeom>
-          <a:solidFill>
-            <a:srgbClr val="FFFFFF"/>
-          </a:solidFill>
-          <a:ln w="15240">
-            <a:solidFill>
-              <a:srgbClr val="DDE1E6"/>
-            </a:solidFill>
-          </a:ln>
-          <a:effectLst/>
-        </p:spPr>
-        <p:style>
-          <a:lnRef idx="1">
-            <a:schemeClr val="accent1"/>
-          </a:lnRef>
-          <a:fillRef idx="3">
-            <a:schemeClr val="accent1"/>
-          </a:fillRef>
-          <a:effectRef idx="2">
-            <a:schemeClr val="accent1"/>
-          </a:effectRef>
-          <a:fontRef idx="minor">
-            <a:schemeClr val="lt1"/>
-          </a:fontRef>
-        </p:style>
-        <p:txBody>
-          <a:bodyPr rtlCol="0" anchor="ctr"/>
-          <a:lstStyle/>
-          <a:p>
-            <a:pPr algn="ctr"/>
-          </a:p>
-        </p:txBody>
-      </p:sp>
-      <p:sp>
-        <p:nvSpPr>
-          <p:cNvPr id="22" name="Rounded Rectangle 21"/>
-          <p:cNvSpPr/>
-          <p:nvPr/>
-        </p:nvSpPr>
-        <p:spPr>
-          <a:xfrm>
-            <a:off x="7013448" y="2596896"/>
-            <a:ext cx="1298448" cy="310896"/>
-          </a:xfrm>
-          <a:prstGeom prst="roundRect">
-            <a:avLst>
-              <a:gd name="adj" fmla="val 50000"/>
-            </a:avLst>
-          </a:prstGeom>
-          <a:solidFill>
-            <a:srgbClr val="FCECEC"/>
-          </a:solidFill>
-          <a:ln>
-            <a:noFill/>
-          </a:ln>
-          <a:effectLst/>
-        </p:spPr>
-        <p:style>
-          <a:lnRef idx="1">
-            <a:schemeClr val="accent1"/>
-          </a:lnRef>
-          <a:fillRef idx="3">
-            <a:schemeClr val="accent1"/>
-          </a:fillRef>
-          <a:effectRef idx="2">
-            <a:schemeClr val="accent1"/>
-          </a:effectRef>
-          <a:fontRef idx="minor">
-            <a:schemeClr val="lt1"/>
-          </a:fontRef>
-        </p:style>
-        <p:txBody>
-          <a:bodyPr rtlCol="0" anchor="ctr"/>
-          <a:lstStyle/>
-          <a:p>
-            <a:pPr algn="ctr"/>
-          </a:p>
-        </p:txBody>
-      </p:sp>
-      <p:sp>
-        <p:nvSpPr>
-          <p:cNvPr id="23" name="TextBox 22"/>
-          <p:cNvSpPr txBox="1"/>
-          <p:nvPr/>
-        </p:nvSpPr>
-        <p:spPr>
-          <a:xfrm>
-            <a:off x="7013448" y="2596896"/>
-            <a:ext cx="1298448" cy="310896"/>
-          </a:xfrm>
-          <a:prstGeom prst="rect">
-            <a:avLst/>
-          </a:prstGeom>
-          <a:noFill/>
-        </p:spPr>
-        <p:txBody>
-          <a:bodyPr wrap="none" anchor="ctr" lIns="0" rIns="0" tIns="0" bIns="0">
-            <a:spAutoFit/>
-          </a:bodyPr>
-          <a:lstStyle/>
-          <a:p>
-            <a:pPr algn="ctr">
-              <a:lnSpc>
-                <a:spcPct val="106000"/>
-              </a:lnSpc>
-              <a:spcBef>
-                <a:spcPts val="0"/>
-              </a:spcBef>
-              <a:spcAft>
-                <a:spcPts val="0"/>
-              </a:spcAft>
-            </a:pPr>
-            <a:r>
-              <a:rPr sz="850" b="1">
-                <a:solidFill>
-                  <a:srgbClr val="B80000"/>
-                </a:solidFill>
-                <a:latin typeface="Red Hat Display"/>
-              </a:rPr>
-              <a:t>MEDIA PASS</a:t>
-            </a:r>
-          </a:p>
-        </p:txBody>
-      </p:sp>
-      <p:pic>
-        <p:nvPicPr>
-          <p:cNvPr id="24" name="Picture 23" descr="eye_slate.png"/>
-          <p:cNvPicPr>
-            <a:picLocks noChangeAspect="1"/>
-          </p:cNvPicPr>
-          <p:nvPr/>
-        </p:nvPicPr>
-        <p:blipFill>
-          <a:blip r:embed="rId4"/>
-          <a:stretch>
-            <a:fillRect/>
-          </a:stretch>
-        </p:blipFill>
-        <p:spPr>
-          <a:xfrm>
-            <a:off x="8843619" y="3108960"/>
-            <a:ext cx="475488" cy="475488"/>
-          </a:xfrm>
-          <a:prstGeom prst="rect">
-            <a:avLst/>
-          </a:prstGeom>
-        </p:spPr>
-      </p:pic>
-      <p:sp>
-        <p:nvSpPr>
-          <p:cNvPr id="25" name="TextBox 24"/>
-          <p:cNvSpPr txBox="1"/>
-          <p:nvPr/>
-        </p:nvSpPr>
-        <p:spPr>
-          <a:xfrm>
-            <a:off x="7050024" y="3721608"/>
-            <a:ext cx="4062679" cy="1481328"/>
-          </a:xfrm>
-          <a:prstGeom prst="rect">
-            <a:avLst/>
-          </a:prstGeom>
-          <a:noFill/>
-        </p:spPr>
-        <p:txBody>
-          <a:bodyPr wrap="square" anchor="t" lIns="0" rIns="0" tIns="0" bIns="0">
-            <a:spAutoFit/>
-          </a:bodyPr>
-          <a:lstStyle/>
-          <a:p>
-            <a:pPr algn="l">
-              <a:lnSpc>
-                <a:spcPct val="120000"/>
-              </a:lnSpc>
-              <a:spcBef>
-                <a:spcPts val="0"/>
-              </a:spcBef>
-              <a:spcAft>
-                <a:spcPts val="0"/>
-              </a:spcAft>
-            </a:pPr>
-            <a:r>
-              <a:rPr sz="950" b="0">
-                <a:solidFill>
-                  <a:srgbClr val="8A9099"/>
-                </a:solidFill>
-                <a:latin typeface="Red Hat Text"/>
-              </a:rPr>
-              <a:t>A traffic-light alert going green→amber→red, with the DB tile scaled to 0; a callout "fix = DB back + app restart".</a:t>
             </a:r>
           </a:p>
         </p:txBody>
@@ -8816,11 +11089,11 @@
         <p:spPr>
           <a:xfrm>
             <a:off x="841248" y="2395728"/>
-            <a:ext cx="5715000" cy="530352"/>
+            <a:ext cx="5138928" cy="786384"/>
           </a:xfrm>
           <a:prstGeom prst="roundRect">
             <a:avLst>
-              <a:gd name="adj" fmla="val 6000"/>
+              <a:gd name="adj" fmla="val 7000"/>
             </a:avLst>
           </a:prstGeom>
           <a:solidFill>
@@ -8855,9 +11128,55 @@
           </a:p>
         </p:txBody>
       </p:sp>
+      <p:sp>
+        <p:nvSpPr>
+          <p:cNvPr id="7" name="Rounded Rectangle 6"/>
+          <p:cNvSpPr/>
+          <p:nvPr/>
+        </p:nvSpPr>
+        <p:spPr>
+          <a:xfrm>
+            <a:off x="987552" y="2532888"/>
+            <a:ext cx="512064" cy="512064"/>
+          </a:xfrm>
+          <a:prstGeom prst="roundRect">
+            <a:avLst>
+              <a:gd name="adj" fmla="val 26000"/>
+            </a:avLst>
+          </a:prstGeom>
+          <a:solidFill>
+            <a:srgbClr val="EE0000"/>
+          </a:solidFill>
+          <a:ln>
+            <a:noFill/>
+          </a:ln>
+          <a:effectLst/>
+        </p:spPr>
+        <p:style>
+          <a:lnRef idx="1">
+            <a:schemeClr val="accent1"/>
+          </a:lnRef>
+          <a:fillRef idx="3">
+            <a:schemeClr val="accent1"/>
+          </a:fillRef>
+          <a:effectRef idx="2">
+            <a:schemeClr val="accent1"/>
+          </a:effectRef>
+          <a:fontRef idx="minor">
+            <a:schemeClr val="lt1"/>
+          </a:fontRef>
+        </p:style>
+        <p:txBody>
+          <a:bodyPr rtlCol="0" anchor="ctr"/>
+          <a:lstStyle/>
+          <a:p>
+            <a:pPr algn="ctr"/>
+          </a:p>
+        </p:txBody>
+      </p:sp>
       <p:pic>
         <p:nvPicPr>
-          <p:cNvPr id="7" name="Picture 6" descr="check_steel.png"/>
+          <p:cNvPr id="8" name="Picture 7" descr="check_white.png"/>
           <p:cNvPicPr>
             <a:picLocks noChangeAspect="1"/>
           </p:cNvPicPr>
@@ -8871,8 +11190,8 @@
         </p:blipFill>
         <p:spPr>
           <a:xfrm>
-            <a:off x="987552" y="2542032"/>
-            <a:ext cx="237744" cy="237744"/>
+            <a:off x="1110447" y="2655783"/>
+            <a:ext cx="266273" cy="266273"/>
           </a:xfrm>
           <a:prstGeom prst="rect">
             <a:avLst/>
@@ -8881,14 +11200,14 @@
       </p:pic>
       <p:sp>
         <p:nvSpPr>
-          <p:cNvPr id="8" name="TextBox 7"/>
+          <p:cNvPr id="9" name="TextBox 8"/>
           <p:cNvSpPr txBox="1"/>
           <p:nvPr/>
         </p:nvSpPr>
         <p:spPr>
           <a:xfrm>
-            <a:off x="1353312" y="2395728"/>
-            <a:ext cx="5029200" cy="530352"/>
+            <a:off x="1627632" y="2395728"/>
+            <a:ext cx="4206240" cy="786384"/>
           </a:xfrm>
           <a:prstGeom prst="rect">
             <a:avLst/>
@@ -8913,7 +11232,7 @@
               </a:spcAft>
             </a:pPr>
             <a:r>
-              <a:rPr sz="1200" b="0">
+              <a:rPr sz="1150" b="0">
                 <a:solidFill>
                   <a:srgbClr val="1A1A1A"/>
                 </a:solidFill>
@@ -8926,18 +11245,18 @@
       </p:sp>
       <p:sp>
         <p:nvSpPr>
-          <p:cNvPr id="9" name="Rounded Rectangle 8"/>
+          <p:cNvPr id="10" name="Rounded Rectangle 9"/>
           <p:cNvSpPr/>
           <p:nvPr/>
         </p:nvSpPr>
         <p:spPr>
           <a:xfrm>
-            <a:off x="841248" y="2999232"/>
-            <a:ext cx="5715000" cy="530352"/>
+            <a:off x="6254496" y="2395728"/>
+            <a:ext cx="5138928" cy="786384"/>
           </a:xfrm>
           <a:prstGeom prst="roundRect">
             <a:avLst>
-              <a:gd name="adj" fmla="val 6000"/>
+              <a:gd name="adj" fmla="val 7000"/>
             </a:avLst>
           </a:prstGeom>
           <a:solidFill>
@@ -8972,9 +11291,55 @@
           </a:p>
         </p:txBody>
       </p:sp>
+      <p:sp>
+        <p:nvSpPr>
+          <p:cNvPr id="11" name="Rounded Rectangle 10"/>
+          <p:cNvSpPr/>
+          <p:nvPr/>
+        </p:nvSpPr>
+        <p:spPr>
+          <a:xfrm>
+            <a:off x="6400800" y="2532888"/>
+            <a:ext cx="512064" cy="512064"/>
+          </a:xfrm>
+          <a:prstGeom prst="roundRect">
+            <a:avLst>
+              <a:gd name="adj" fmla="val 26000"/>
+            </a:avLst>
+          </a:prstGeom>
+          <a:solidFill>
+            <a:srgbClr val="EE0000"/>
+          </a:solidFill>
+          <a:ln>
+            <a:noFill/>
+          </a:ln>
+          <a:effectLst/>
+        </p:spPr>
+        <p:style>
+          <a:lnRef idx="1">
+            <a:schemeClr val="accent1"/>
+          </a:lnRef>
+          <a:fillRef idx="3">
+            <a:schemeClr val="accent1"/>
+          </a:fillRef>
+          <a:effectRef idx="2">
+            <a:schemeClr val="accent1"/>
+          </a:effectRef>
+          <a:fontRef idx="minor">
+            <a:schemeClr val="lt1"/>
+          </a:fontRef>
+        </p:style>
+        <p:txBody>
+          <a:bodyPr rtlCol="0" anchor="ctr"/>
+          <a:lstStyle/>
+          <a:p>
+            <a:pPr algn="ctr"/>
+          </a:p>
+        </p:txBody>
+      </p:sp>
       <p:pic>
         <p:nvPicPr>
-          <p:cNvPr id="10" name="Picture 9" descr="check_steel.png"/>
+          <p:cNvPr id="12" name="Picture 11" descr="check_white.png"/>
           <p:cNvPicPr>
             <a:picLocks noChangeAspect="1"/>
           </p:cNvPicPr>
@@ -8988,8 +11353,8 @@
         </p:blipFill>
         <p:spPr>
           <a:xfrm>
-            <a:off x="987552" y="3145536"/>
-            <a:ext cx="237744" cy="237744"/>
+            <a:off x="6523695" y="2655783"/>
+            <a:ext cx="266273" cy="266273"/>
           </a:xfrm>
           <a:prstGeom prst="rect">
             <a:avLst/>
@@ -8998,14 +11363,14 @@
       </p:pic>
       <p:sp>
         <p:nvSpPr>
-          <p:cNvPr id="11" name="TextBox 10"/>
+          <p:cNvPr id="13" name="TextBox 12"/>
           <p:cNvSpPr txBox="1"/>
           <p:nvPr/>
         </p:nvSpPr>
         <p:spPr>
           <a:xfrm>
-            <a:off x="1353312" y="2999232"/>
-            <a:ext cx="5029200" cy="530352"/>
+            <a:off x="7040880" y="2395728"/>
+            <a:ext cx="4206240" cy="786384"/>
           </a:xfrm>
           <a:prstGeom prst="rect">
             <a:avLst/>
@@ -9030,7 +11395,7 @@
               </a:spcAft>
             </a:pPr>
             <a:r>
-              <a:rPr sz="1200" b="0">
+              <a:rPr sz="1150" b="0">
                 <a:solidFill>
                   <a:srgbClr val="1A1A1A"/>
                 </a:solidFill>
@@ -9043,18 +11408,18 @@
       </p:sp>
       <p:sp>
         <p:nvSpPr>
-          <p:cNvPr id="12" name="Rounded Rectangle 11"/>
+          <p:cNvPr id="14" name="Rounded Rectangle 13"/>
           <p:cNvSpPr/>
           <p:nvPr/>
         </p:nvSpPr>
         <p:spPr>
           <a:xfrm>
-            <a:off x="841248" y="3602736"/>
-            <a:ext cx="5715000" cy="530352"/>
+            <a:off x="841248" y="3328416"/>
+            <a:ext cx="5138928" cy="786384"/>
           </a:xfrm>
           <a:prstGeom prst="roundRect">
             <a:avLst>
-              <a:gd name="adj" fmla="val 6000"/>
+              <a:gd name="adj" fmla="val 7000"/>
             </a:avLst>
           </a:prstGeom>
           <a:solidFill>
@@ -9089,9 +11454,55 @@
           </a:p>
         </p:txBody>
       </p:sp>
+      <p:sp>
+        <p:nvSpPr>
+          <p:cNvPr id="15" name="Rounded Rectangle 14"/>
+          <p:cNvSpPr/>
+          <p:nvPr/>
+        </p:nvSpPr>
+        <p:spPr>
+          <a:xfrm>
+            <a:off x="987552" y="3465576"/>
+            <a:ext cx="512064" cy="512064"/>
+          </a:xfrm>
+          <a:prstGeom prst="roundRect">
+            <a:avLst>
+              <a:gd name="adj" fmla="val 26000"/>
+            </a:avLst>
+          </a:prstGeom>
+          <a:solidFill>
+            <a:srgbClr val="EE0000"/>
+          </a:solidFill>
+          <a:ln>
+            <a:noFill/>
+          </a:ln>
+          <a:effectLst/>
+        </p:spPr>
+        <p:style>
+          <a:lnRef idx="1">
+            <a:schemeClr val="accent1"/>
+          </a:lnRef>
+          <a:fillRef idx="3">
+            <a:schemeClr val="accent1"/>
+          </a:fillRef>
+          <a:effectRef idx="2">
+            <a:schemeClr val="accent1"/>
+          </a:effectRef>
+          <a:fontRef idx="minor">
+            <a:schemeClr val="lt1"/>
+          </a:fontRef>
+        </p:style>
+        <p:txBody>
+          <a:bodyPr rtlCol="0" anchor="ctr"/>
+          <a:lstStyle/>
+          <a:p>
+            <a:pPr algn="ctr"/>
+          </a:p>
+        </p:txBody>
+      </p:sp>
       <p:pic>
         <p:nvPicPr>
-          <p:cNvPr id="13" name="Picture 12" descr="check_steel.png"/>
+          <p:cNvPr id="16" name="Picture 15" descr="check_white.png"/>
           <p:cNvPicPr>
             <a:picLocks noChangeAspect="1"/>
           </p:cNvPicPr>
@@ -9105,8 +11516,8 @@
         </p:blipFill>
         <p:spPr>
           <a:xfrm>
-            <a:off x="987552" y="3749040"/>
-            <a:ext cx="237744" cy="237744"/>
+            <a:off x="1110447" y="3588471"/>
+            <a:ext cx="266273" cy="266273"/>
           </a:xfrm>
           <a:prstGeom prst="rect">
             <a:avLst/>
@@ -9115,14 +11526,14 @@
       </p:pic>
       <p:sp>
         <p:nvSpPr>
-          <p:cNvPr id="14" name="TextBox 13"/>
+          <p:cNvPr id="17" name="TextBox 16"/>
           <p:cNvSpPr txBox="1"/>
           <p:nvPr/>
         </p:nvSpPr>
         <p:spPr>
           <a:xfrm>
-            <a:off x="1353312" y="3602736"/>
-            <a:ext cx="5029200" cy="530352"/>
+            <a:off x="1627632" y="3328416"/>
+            <a:ext cx="4206240" cy="786384"/>
           </a:xfrm>
           <a:prstGeom prst="rect">
             <a:avLst/>
@@ -9147,7 +11558,7 @@
               </a:spcAft>
             </a:pPr>
             <a:r>
-              <a:rPr sz="1200" b="0">
+              <a:rPr sz="1150" b="0">
                 <a:solidFill>
                   <a:srgbClr val="1A1A1A"/>
                 </a:solidFill>
@@ -9160,18 +11571,18 @@
       </p:sp>
       <p:sp>
         <p:nvSpPr>
-          <p:cNvPr id="15" name="Rounded Rectangle 14"/>
+          <p:cNvPr id="18" name="Rounded Rectangle 17"/>
           <p:cNvSpPr/>
           <p:nvPr/>
         </p:nvSpPr>
         <p:spPr>
           <a:xfrm>
-            <a:off x="841248" y="4206240"/>
-            <a:ext cx="5715000" cy="530352"/>
+            <a:off x="6254496" y="3328416"/>
+            <a:ext cx="5138928" cy="786384"/>
           </a:xfrm>
           <a:prstGeom prst="roundRect">
             <a:avLst>
-              <a:gd name="adj" fmla="val 6000"/>
+              <a:gd name="adj" fmla="val 7000"/>
             </a:avLst>
           </a:prstGeom>
           <a:solidFill>
@@ -9206,9 +11617,55 @@
           </a:p>
         </p:txBody>
       </p:sp>
+      <p:sp>
+        <p:nvSpPr>
+          <p:cNvPr id="19" name="Rounded Rectangle 18"/>
+          <p:cNvSpPr/>
+          <p:nvPr/>
+        </p:nvSpPr>
+        <p:spPr>
+          <a:xfrm>
+            <a:off x="6400800" y="3465576"/>
+            <a:ext cx="512064" cy="512064"/>
+          </a:xfrm>
+          <a:prstGeom prst="roundRect">
+            <a:avLst>
+              <a:gd name="adj" fmla="val 26000"/>
+            </a:avLst>
+          </a:prstGeom>
+          <a:solidFill>
+            <a:srgbClr val="EE0000"/>
+          </a:solidFill>
+          <a:ln>
+            <a:noFill/>
+          </a:ln>
+          <a:effectLst/>
+        </p:spPr>
+        <p:style>
+          <a:lnRef idx="1">
+            <a:schemeClr val="accent1"/>
+          </a:lnRef>
+          <a:fillRef idx="3">
+            <a:schemeClr val="accent1"/>
+          </a:fillRef>
+          <a:effectRef idx="2">
+            <a:schemeClr val="accent1"/>
+          </a:effectRef>
+          <a:fontRef idx="minor">
+            <a:schemeClr val="lt1"/>
+          </a:fontRef>
+        </p:style>
+        <p:txBody>
+          <a:bodyPr rtlCol="0" anchor="ctr"/>
+          <a:lstStyle/>
+          <a:p>
+            <a:pPr algn="ctr"/>
+          </a:p>
+        </p:txBody>
+      </p:sp>
       <p:pic>
         <p:nvPicPr>
-          <p:cNvPr id="16" name="Picture 15" descr="check_steel.png"/>
+          <p:cNvPr id="20" name="Picture 19" descr="check_white.png"/>
           <p:cNvPicPr>
             <a:picLocks noChangeAspect="1"/>
           </p:cNvPicPr>
@@ -9222,8 +11679,8 @@
         </p:blipFill>
         <p:spPr>
           <a:xfrm>
-            <a:off x="987552" y="4352544"/>
-            <a:ext cx="237744" cy="237744"/>
+            <a:off x="6523695" y="3588471"/>
+            <a:ext cx="266273" cy="266273"/>
           </a:xfrm>
           <a:prstGeom prst="rect">
             <a:avLst/>
@@ -9232,14 +11689,14 @@
       </p:pic>
       <p:sp>
         <p:nvSpPr>
-          <p:cNvPr id="17" name="TextBox 16"/>
+          <p:cNvPr id="21" name="TextBox 20"/>
           <p:cNvSpPr txBox="1"/>
           <p:nvPr/>
         </p:nvSpPr>
         <p:spPr>
           <a:xfrm>
-            <a:off x="1353312" y="4206240"/>
-            <a:ext cx="5029200" cy="530352"/>
+            <a:off x="7040880" y="3328416"/>
+            <a:ext cx="4206240" cy="786384"/>
           </a:xfrm>
           <a:prstGeom prst="rect">
             <a:avLst/>
@@ -9264,7 +11721,7 @@
               </a:spcAft>
             </a:pPr>
             <a:r>
-              <a:rPr sz="1200" b="0">
+              <a:rPr sz="1150" b="0">
                 <a:solidFill>
                   <a:srgbClr val="1A1A1A"/>
                 </a:solidFill>
@@ -9277,18 +11734,18 @@
       </p:sp>
       <p:sp>
         <p:nvSpPr>
-          <p:cNvPr id="18" name="Rounded Rectangle 17"/>
+          <p:cNvPr id="22" name="Rounded Rectangle 21"/>
           <p:cNvSpPr/>
           <p:nvPr/>
         </p:nvSpPr>
         <p:spPr>
           <a:xfrm>
-            <a:off x="841248" y="4809744"/>
-            <a:ext cx="5715000" cy="530352"/>
+            <a:off x="841248" y="4261104"/>
+            <a:ext cx="5138928" cy="786384"/>
           </a:xfrm>
           <a:prstGeom prst="roundRect">
             <a:avLst>
-              <a:gd name="adj" fmla="val 6000"/>
+              <a:gd name="adj" fmla="val 7000"/>
             </a:avLst>
           </a:prstGeom>
           <a:solidFill>
@@ -9323,9 +11780,55 @@
           </a:p>
         </p:txBody>
       </p:sp>
+      <p:sp>
+        <p:nvSpPr>
+          <p:cNvPr id="23" name="Rounded Rectangle 22"/>
+          <p:cNvSpPr/>
+          <p:nvPr/>
+        </p:nvSpPr>
+        <p:spPr>
+          <a:xfrm>
+            <a:off x="987552" y="4398264"/>
+            <a:ext cx="512064" cy="512064"/>
+          </a:xfrm>
+          <a:prstGeom prst="roundRect">
+            <a:avLst>
+              <a:gd name="adj" fmla="val 26000"/>
+            </a:avLst>
+          </a:prstGeom>
+          <a:solidFill>
+            <a:srgbClr val="EE0000"/>
+          </a:solidFill>
+          <a:ln>
+            <a:noFill/>
+          </a:ln>
+          <a:effectLst/>
+        </p:spPr>
+        <p:style>
+          <a:lnRef idx="1">
+            <a:schemeClr val="accent1"/>
+          </a:lnRef>
+          <a:fillRef idx="3">
+            <a:schemeClr val="accent1"/>
+          </a:fillRef>
+          <a:effectRef idx="2">
+            <a:schemeClr val="accent1"/>
+          </a:effectRef>
+          <a:fontRef idx="minor">
+            <a:schemeClr val="lt1"/>
+          </a:fontRef>
+        </p:style>
+        <p:txBody>
+          <a:bodyPr rtlCol="0" anchor="ctr"/>
+          <a:lstStyle/>
+          <a:p>
+            <a:pPr algn="ctr"/>
+          </a:p>
+        </p:txBody>
+      </p:sp>
       <p:pic>
         <p:nvPicPr>
-          <p:cNvPr id="19" name="Picture 18" descr="check_steel.png"/>
+          <p:cNvPr id="24" name="Picture 23" descr="check_white.png"/>
           <p:cNvPicPr>
             <a:picLocks noChangeAspect="1"/>
           </p:cNvPicPr>
@@ -9339,8 +11842,8 @@
         </p:blipFill>
         <p:spPr>
           <a:xfrm>
-            <a:off x="987552" y="4956048"/>
-            <a:ext cx="237744" cy="237744"/>
+            <a:off x="1110447" y="4521159"/>
+            <a:ext cx="266273" cy="266273"/>
           </a:xfrm>
           <a:prstGeom prst="rect">
             <a:avLst/>
@@ -9349,14 +11852,14 @@
       </p:pic>
       <p:sp>
         <p:nvSpPr>
-          <p:cNvPr id="20" name="TextBox 19"/>
+          <p:cNvPr id="25" name="TextBox 24"/>
           <p:cNvSpPr txBox="1"/>
           <p:nvPr/>
         </p:nvSpPr>
         <p:spPr>
           <a:xfrm>
-            <a:off x="1353312" y="4809744"/>
-            <a:ext cx="5029200" cy="530352"/>
+            <a:off x="1627632" y="4261104"/>
+            <a:ext cx="4206240" cy="786384"/>
           </a:xfrm>
           <a:prstGeom prst="rect">
             <a:avLst/>
@@ -9381,221 +11884,13 @@
               </a:spcAft>
             </a:pPr>
             <a:r>
-              <a:rPr sz="1200" b="0">
+              <a:rPr sz="1150" b="0">
                 <a:solidFill>
                   <a:srgbClr val="1A1A1A"/>
                 </a:solidFill>
                 <a:latin typeface="Red Hat Text"/>
               </a:rPr>
               <a:t>The `trace_id` **exemplar** links a metric spike straight to one trace</a:t>
-            </a:r>
-          </a:p>
-        </p:txBody>
-      </p:sp>
-      <p:sp>
-        <p:nvSpPr>
-          <p:cNvPr id="21" name="Rounded Rectangle 20"/>
-          <p:cNvSpPr/>
-          <p:nvPr/>
-        </p:nvSpPr>
-        <p:spPr>
-          <a:xfrm>
-            <a:off x="6812280" y="2395728"/>
-            <a:ext cx="4538167" cy="2944368"/>
-          </a:xfrm>
-          <a:prstGeom prst="roundRect">
-            <a:avLst>
-              <a:gd name="adj" fmla="val 4000"/>
-            </a:avLst>
-          </a:prstGeom>
-          <a:solidFill>
-            <a:srgbClr val="FFFFFF"/>
-          </a:solidFill>
-          <a:ln w="15240">
-            <a:solidFill>
-              <a:srgbClr val="DDE1E6"/>
-            </a:solidFill>
-          </a:ln>
-          <a:effectLst/>
-        </p:spPr>
-        <p:style>
-          <a:lnRef idx="1">
-            <a:schemeClr val="accent1"/>
-          </a:lnRef>
-          <a:fillRef idx="3">
-            <a:schemeClr val="accent1"/>
-          </a:fillRef>
-          <a:effectRef idx="2">
-            <a:schemeClr val="accent1"/>
-          </a:effectRef>
-          <a:fontRef idx="minor">
-            <a:schemeClr val="lt1"/>
-          </a:fontRef>
-        </p:style>
-        <p:txBody>
-          <a:bodyPr rtlCol="0" anchor="ctr"/>
-          <a:lstStyle/>
-          <a:p>
-            <a:pPr algn="ctr"/>
-          </a:p>
-        </p:txBody>
-      </p:sp>
-      <p:sp>
-        <p:nvSpPr>
-          <p:cNvPr id="22" name="Rounded Rectangle 21"/>
-          <p:cNvSpPr/>
-          <p:nvPr/>
-        </p:nvSpPr>
-        <p:spPr>
-          <a:xfrm>
-            <a:off x="7013448" y="2596896"/>
-            <a:ext cx="1298448" cy="310896"/>
-          </a:xfrm>
-          <a:prstGeom prst="roundRect">
-            <a:avLst>
-              <a:gd name="adj" fmla="val 50000"/>
-            </a:avLst>
-          </a:prstGeom>
-          <a:solidFill>
-            <a:srgbClr val="FCECEC"/>
-          </a:solidFill>
-          <a:ln>
-            <a:noFill/>
-          </a:ln>
-          <a:effectLst/>
-        </p:spPr>
-        <p:style>
-          <a:lnRef idx="1">
-            <a:schemeClr val="accent1"/>
-          </a:lnRef>
-          <a:fillRef idx="3">
-            <a:schemeClr val="accent1"/>
-          </a:fillRef>
-          <a:effectRef idx="2">
-            <a:schemeClr val="accent1"/>
-          </a:effectRef>
-          <a:fontRef idx="minor">
-            <a:schemeClr val="lt1"/>
-          </a:fontRef>
-        </p:style>
-        <p:txBody>
-          <a:bodyPr rtlCol="0" anchor="ctr"/>
-          <a:lstStyle/>
-          <a:p>
-            <a:pPr algn="ctr"/>
-          </a:p>
-        </p:txBody>
-      </p:sp>
-      <p:sp>
-        <p:nvSpPr>
-          <p:cNvPr id="23" name="TextBox 22"/>
-          <p:cNvSpPr txBox="1"/>
-          <p:nvPr/>
-        </p:nvSpPr>
-        <p:spPr>
-          <a:xfrm>
-            <a:off x="7013448" y="2596896"/>
-            <a:ext cx="1298448" cy="310896"/>
-          </a:xfrm>
-          <a:prstGeom prst="rect">
-            <a:avLst/>
-          </a:prstGeom>
-          <a:noFill/>
-        </p:spPr>
-        <p:txBody>
-          <a:bodyPr wrap="none" anchor="ctr" lIns="0" rIns="0" tIns="0" bIns="0">
-            <a:spAutoFit/>
-          </a:bodyPr>
-          <a:lstStyle/>
-          <a:p>
-            <a:pPr algn="ctr">
-              <a:lnSpc>
-                <a:spcPct val="106000"/>
-              </a:lnSpc>
-              <a:spcBef>
-                <a:spcPts val="0"/>
-              </a:spcBef>
-              <a:spcAft>
-                <a:spcPts val="0"/>
-              </a:spcAft>
-            </a:pPr>
-            <a:r>
-              <a:rPr sz="850" b="1">
-                <a:solidFill>
-                  <a:srgbClr val="B80000"/>
-                </a:solidFill>
-                <a:latin typeface="Red Hat Display"/>
-              </a:rPr>
-              <a:t>MEDIA PASS</a:t>
-            </a:r>
-          </a:p>
-        </p:txBody>
-      </p:sp>
-      <p:pic>
-        <p:nvPicPr>
-          <p:cNvPr id="24" name="Picture 23" descr="eye_slate.png"/>
-          <p:cNvPicPr>
-            <a:picLocks noChangeAspect="1"/>
-          </p:cNvPicPr>
-          <p:nvPr/>
-        </p:nvPicPr>
-        <p:blipFill>
-          <a:blip r:embed="rId4"/>
-          <a:stretch>
-            <a:fillRect/>
-          </a:stretch>
-        </p:blipFill>
-        <p:spPr>
-          <a:xfrm>
-            <a:off x="8843619" y="3108960"/>
-            <a:ext cx="475488" cy="475488"/>
-          </a:xfrm>
-          <a:prstGeom prst="rect">
-            <a:avLst/>
-          </a:prstGeom>
-        </p:spPr>
-      </p:pic>
-      <p:sp>
-        <p:nvSpPr>
-          <p:cNvPr id="25" name="TextBox 24"/>
-          <p:cNvSpPr txBox="1"/>
-          <p:nvPr/>
-        </p:nvSpPr>
-        <p:spPr>
-          <a:xfrm>
-            <a:off x="7050024" y="3721608"/>
-            <a:ext cx="4062679" cy="1481328"/>
-          </a:xfrm>
-          <a:prstGeom prst="rect">
-            <a:avLst/>
-          </a:prstGeom>
-          <a:noFill/>
-        </p:spPr>
-        <p:txBody>
-          <a:bodyPr wrap="square" anchor="t" lIns="0" rIns="0" tIns="0" bIns="0">
-            <a:spAutoFit/>
-          </a:bodyPr>
-          <a:lstStyle/>
-          <a:p>
-            <a:pPr algn="l">
-              <a:lnSpc>
-                <a:spcPct val="120000"/>
-              </a:lnSpc>
-              <a:spcBef>
-                <a:spcPts val="0"/>
-              </a:spcBef>
-              <a:spcAft>
-                <a:spcPts val="0"/>
-              </a:spcAft>
-            </a:pPr>
-            <a:r>
-              <a:rPr sz="950" b="0">
-                <a:solidFill>
-                  <a:srgbClr val="8A9099"/>
-                </a:solidFill>
-                <a:latin typeface="Red Hat Text"/>
-              </a:rPr>
-              <a:t>Concept-style trace waterfall for /history (single HTTP span today), with a callout "+ DB spans = enhancement" and an exemplar arrow from a metric spike to a trace.</a:t>
             </a:r>
           </a:p>
         </p:txBody>
@@ -9903,11 +12198,11 @@
         <p:spPr>
           <a:xfrm>
             <a:off x="841248" y="2395728"/>
-            <a:ext cx="5715000" cy="530352"/>
+            <a:ext cx="5138928" cy="786384"/>
           </a:xfrm>
           <a:prstGeom prst="roundRect">
             <a:avLst>
-              <a:gd name="adj" fmla="val 6000"/>
+              <a:gd name="adj" fmla="val 7000"/>
             </a:avLst>
           </a:prstGeom>
           <a:solidFill>
@@ -9942,9 +12237,55 @@
           </a:p>
         </p:txBody>
       </p:sp>
+      <p:sp>
+        <p:nvSpPr>
+          <p:cNvPr id="7" name="Rounded Rectangle 6"/>
+          <p:cNvSpPr/>
+          <p:nvPr/>
+        </p:nvSpPr>
+        <p:spPr>
+          <a:xfrm>
+            <a:off x="987552" y="2532888"/>
+            <a:ext cx="512064" cy="512064"/>
+          </a:xfrm>
+          <a:prstGeom prst="roundRect">
+            <a:avLst>
+              <a:gd name="adj" fmla="val 26000"/>
+            </a:avLst>
+          </a:prstGeom>
+          <a:solidFill>
+            <a:srgbClr val="EE0000"/>
+          </a:solidFill>
+          <a:ln>
+            <a:noFill/>
+          </a:ln>
+          <a:effectLst/>
+        </p:spPr>
+        <p:style>
+          <a:lnRef idx="1">
+            <a:schemeClr val="accent1"/>
+          </a:lnRef>
+          <a:fillRef idx="3">
+            <a:schemeClr val="accent1"/>
+          </a:fillRef>
+          <a:effectRef idx="2">
+            <a:schemeClr val="accent1"/>
+          </a:effectRef>
+          <a:fontRef idx="minor">
+            <a:schemeClr val="lt1"/>
+          </a:fontRef>
+        </p:style>
+        <p:txBody>
+          <a:bodyPr rtlCol="0" anchor="ctr"/>
+          <a:lstStyle/>
+          <a:p>
+            <a:pPr algn="ctr"/>
+          </a:p>
+        </p:txBody>
+      </p:sp>
       <p:pic>
         <p:nvPicPr>
-          <p:cNvPr id="7" name="Picture 6" descr="check_steel.png"/>
+          <p:cNvPr id="8" name="Picture 7" descr="check_white.png"/>
           <p:cNvPicPr>
             <a:picLocks noChangeAspect="1"/>
           </p:cNvPicPr>
@@ -9958,8 +12299,8 @@
         </p:blipFill>
         <p:spPr>
           <a:xfrm>
-            <a:off x="987552" y="2542032"/>
-            <a:ext cx="237744" cy="237744"/>
+            <a:off x="1110447" y="2655783"/>
+            <a:ext cx="266273" cy="266273"/>
           </a:xfrm>
           <a:prstGeom prst="rect">
             <a:avLst/>
@@ -9968,14 +12309,14 @@
       </p:pic>
       <p:sp>
         <p:nvSpPr>
-          <p:cNvPr id="8" name="TextBox 7"/>
+          <p:cNvPr id="9" name="TextBox 8"/>
           <p:cNvSpPr txBox="1"/>
           <p:nvPr/>
         </p:nvSpPr>
         <p:spPr>
           <a:xfrm>
-            <a:off x="1353312" y="2395728"/>
-            <a:ext cx="5029200" cy="530352"/>
+            <a:off x="1627632" y="2395728"/>
+            <a:ext cx="4206240" cy="786384"/>
           </a:xfrm>
           <a:prstGeom prst="rect">
             <a:avLst/>
@@ -10000,7 +12341,7 @@
               </a:spcAft>
             </a:pPr>
             <a:r>
-              <a:rPr sz="1200" b="0">
+              <a:rPr sz="1150" b="0">
                 <a:solidFill>
                   <a:srgbClr val="1A1A1A"/>
                 </a:solidFill>
@@ -10013,18 +12354,18 @@
       </p:sp>
       <p:sp>
         <p:nvSpPr>
-          <p:cNvPr id="9" name="Rounded Rectangle 8"/>
+          <p:cNvPr id="10" name="Rounded Rectangle 9"/>
           <p:cNvSpPr/>
           <p:nvPr/>
         </p:nvSpPr>
         <p:spPr>
           <a:xfrm>
-            <a:off x="841248" y="2999232"/>
-            <a:ext cx="5715000" cy="530352"/>
+            <a:off x="6254496" y="2395728"/>
+            <a:ext cx="5138928" cy="786384"/>
           </a:xfrm>
           <a:prstGeom prst="roundRect">
             <a:avLst>
-              <a:gd name="adj" fmla="val 6000"/>
+              <a:gd name="adj" fmla="val 7000"/>
             </a:avLst>
           </a:prstGeom>
           <a:solidFill>
@@ -10059,9 +12400,55 @@
           </a:p>
         </p:txBody>
       </p:sp>
+      <p:sp>
+        <p:nvSpPr>
+          <p:cNvPr id="11" name="Rounded Rectangle 10"/>
+          <p:cNvSpPr/>
+          <p:nvPr/>
+        </p:nvSpPr>
+        <p:spPr>
+          <a:xfrm>
+            <a:off x="6400800" y="2532888"/>
+            <a:ext cx="512064" cy="512064"/>
+          </a:xfrm>
+          <a:prstGeom prst="roundRect">
+            <a:avLst>
+              <a:gd name="adj" fmla="val 26000"/>
+            </a:avLst>
+          </a:prstGeom>
+          <a:solidFill>
+            <a:srgbClr val="EE0000"/>
+          </a:solidFill>
+          <a:ln>
+            <a:noFill/>
+          </a:ln>
+          <a:effectLst/>
+        </p:spPr>
+        <p:style>
+          <a:lnRef idx="1">
+            <a:schemeClr val="accent1"/>
+          </a:lnRef>
+          <a:fillRef idx="3">
+            <a:schemeClr val="accent1"/>
+          </a:fillRef>
+          <a:effectRef idx="2">
+            <a:schemeClr val="accent1"/>
+          </a:effectRef>
+          <a:fontRef idx="minor">
+            <a:schemeClr val="lt1"/>
+          </a:fontRef>
+        </p:style>
+        <p:txBody>
+          <a:bodyPr rtlCol="0" anchor="ctr"/>
+          <a:lstStyle/>
+          <a:p>
+            <a:pPr algn="ctr"/>
+          </a:p>
+        </p:txBody>
+      </p:sp>
       <p:pic>
         <p:nvPicPr>
-          <p:cNvPr id="10" name="Picture 9" descr="check_steel.png"/>
+          <p:cNvPr id="12" name="Picture 11" descr="check_white.png"/>
           <p:cNvPicPr>
             <a:picLocks noChangeAspect="1"/>
           </p:cNvPicPr>
@@ -10075,8 +12462,8 @@
         </p:blipFill>
         <p:spPr>
           <a:xfrm>
-            <a:off x="987552" y="3145536"/>
-            <a:ext cx="237744" cy="237744"/>
+            <a:off x="6523695" y="2655783"/>
+            <a:ext cx="266273" cy="266273"/>
           </a:xfrm>
           <a:prstGeom prst="rect">
             <a:avLst/>
@@ -10085,14 +12472,14 @@
       </p:pic>
       <p:sp>
         <p:nvSpPr>
-          <p:cNvPr id="11" name="TextBox 10"/>
+          <p:cNvPr id="13" name="TextBox 12"/>
           <p:cNvSpPr txBox="1"/>
           <p:nvPr/>
         </p:nvSpPr>
         <p:spPr>
           <a:xfrm>
-            <a:off x="1353312" y="2999232"/>
-            <a:ext cx="5029200" cy="530352"/>
+            <a:off x="7040880" y="2395728"/>
+            <a:ext cx="4206240" cy="786384"/>
           </a:xfrm>
           <a:prstGeom prst="rect">
             <a:avLst/>
@@ -10117,7 +12504,7 @@
               </a:spcAft>
             </a:pPr>
             <a:r>
-              <a:rPr sz="1200" b="0">
+              <a:rPr sz="1150" b="0">
                 <a:solidFill>
                   <a:srgbClr val="1A1A1A"/>
                 </a:solidFill>
@@ -10130,18 +12517,18 @@
       </p:sp>
       <p:sp>
         <p:nvSpPr>
-          <p:cNvPr id="12" name="Rounded Rectangle 11"/>
+          <p:cNvPr id="14" name="Rounded Rectangle 13"/>
           <p:cNvSpPr/>
           <p:nvPr/>
         </p:nvSpPr>
         <p:spPr>
           <a:xfrm>
-            <a:off x="841248" y="3602736"/>
-            <a:ext cx="5715000" cy="530352"/>
+            <a:off x="841248" y="3328416"/>
+            <a:ext cx="5138928" cy="786384"/>
           </a:xfrm>
           <a:prstGeom prst="roundRect">
             <a:avLst>
-              <a:gd name="adj" fmla="val 6000"/>
+              <a:gd name="adj" fmla="val 7000"/>
             </a:avLst>
           </a:prstGeom>
           <a:solidFill>
@@ -10176,9 +12563,55 @@
           </a:p>
         </p:txBody>
       </p:sp>
+      <p:sp>
+        <p:nvSpPr>
+          <p:cNvPr id="15" name="Rounded Rectangle 14"/>
+          <p:cNvSpPr/>
+          <p:nvPr/>
+        </p:nvSpPr>
+        <p:spPr>
+          <a:xfrm>
+            <a:off x="987552" y="3465576"/>
+            <a:ext cx="512064" cy="512064"/>
+          </a:xfrm>
+          <a:prstGeom prst="roundRect">
+            <a:avLst>
+              <a:gd name="adj" fmla="val 26000"/>
+            </a:avLst>
+          </a:prstGeom>
+          <a:solidFill>
+            <a:srgbClr val="EE0000"/>
+          </a:solidFill>
+          <a:ln>
+            <a:noFill/>
+          </a:ln>
+          <a:effectLst/>
+        </p:spPr>
+        <p:style>
+          <a:lnRef idx="1">
+            <a:schemeClr val="accent1"/>
+          </a:lnRef>
+          <a:fillRef idx="3">
+            <a:schemeClr val="accent1"/>
+          </a:fillRef>
+          <a:effectRef idx="2">
+            <a:schemeClr val="accent1"/>
+          </a:effectRef>
+          <a:fontRef idx="minor">
+            <a:schemeClr val="lt1"/>
+          </a:fontRef>
+        </p:style>
+        <p:txBody>
+          <a:bodyPr rtlCol="0" anchor="ctr"/>
+          <a:lstStyle/>
+          <a:p>
+            <a:pPr algn="ctr"/>
+          </a:p>
+        </p:txBody>
+      </p:sp>
       <p:pic>
         <p:nvPicPr>
-          <p:cNvPr id="13" name="Picture 12" descr="check_steel.png"/>
+          <p:cNvPr id="16" name="Picture 15" descr="check_white.png"/>
           <p:cNvPicPr>
             <a:picLocks noChangeAspect="1"/>
           </p:cNvPicPr>
@@ -10192,8 +12625,8 @@
         </p:blipFill>
         <p:spPr>
           <a:xfrm>
-            <a:off x="987552" y="3749040"/>
-            <a:ext cx="237744" cy="237744"/>
+            <a:off x="1110447" y="3588471"/>
+            <a:ext cx="266273" cy="266273"/>
           </a:xfrm>
           <a:prstGeom prst="rect">
             <a:avLst/>
@@ -10202,14 +12635,14 @@
       </p:pic>
       <p:sp>
         <p:nvSpPr>
-          <p:cNvPr id="14" name="TextBox 13"/>
+          <p:cNvPr id="17" name="TextBox 16"/>
           <p:cNvSpPr txBox="1"/>
           <p:nvPr/>
         </p:nvSpPr>
         <p:spPr>
           <a:xfrm>
-            <a:off x="1353312" y="3602736"/>
-            <a:ext cx="5029200" cy="530352"/>
+            <a:off x="1627632" y="3328416"/>
+            <a:ext cx="4206240" cy="786384"/>
           </a:xfrm>
           <a:prstGeom prst="rect">
             <a:avLst/>
@@ -10234,7 +12667,7 @@
               </a:spcAft>
             </a:pPr>
             <a:r>
-              <a:rPr sz="1200" b="0">
+              <a:rPr sz="1150" b="0">
                 <a:solidFill>
                   <a:srgbClr val="1A1A1A"/>
                 </a:solidFill>
@@ -10247,18 +12680,18 @@
       </p:sp>
       <p:sp>
         <p:nvSpPr>
-          <p:cNvPr id="15" name="Rounded Rectangle 14"/>
+          <p:cNvPr id="18" name="Rounded Rectangle 17"/>
           <p:cNvSpPr/>
           <p:nvPr/>
         </p:nvSpPr>
         <p:spPr>
           <a:xfrm>
-            <a:off x="841248" y="4206240"/>
-            <a:ext cx="5715000" cy="530352"/>
+            <a:off x="6254496" y="3328416"/>
+            <a:ext cx="5138928" cy="786384"/>
           </a:xfrm>
           <a:prstGeom prst="roundRect">
             <a:avLst>
-              <a:gd name="adj" fmla="val 6000"/>
+              <a:gd name="adj" fmla="val 7000"/>
             </a:avLst>
           </a:prstGeom>
           <a:solidFill>
@@ -10293,9 +12726,55 @@
           </a:p>
         </p:txBody>
       </p:sp>
+      <p:sp>
+        <p:nvSpPr>
+          <p:cNvPr id="19" name="Rounded Rectangle 18"/>
+          <p:cNvSpPr/>
+          <p:nvPr/>
+        </p:nvSpPr>
+        <p:spPr>
+          <a:xfrm>
+            <a:off x="6400800" y="3465576"/>
+            <a:ext cx="512064" cy="512064"/>
+          </a:xfrm>
+          <a:prstGeom prst="roundRect">
+            <a:avLst>
+              <a:gd name="adj" fmla="val 26000"/>
+            </a:avLst>
+          </a:prstGeom>
+          <a:solidFill>
+            <a:srgbClr val="EE0000"/>
+          </a:solidFill>
+          <a:ln>
+            <a:noFill/>
+          </a:ln>
+          <a:effectLst/>
+        </p:spPr>
+        <p:style>
+          <a:lnRef idx="1">
+            <a:schemeClr val="accent1"/>
+          </a:lnRef>
+          <a:fillRef idx="3">
+            <a:schemeClr val="accent1"/>
+          </a:fillRef>
+          <a:effectRef idx="2">
+            <a:schemeClr val="accent1"/>
+          </a:effectRef>
+          <a:fontRef idx="minor">
+            <a:schemeClr val="lt1"/>
+          </a:fontRef>
+        </p:style>
+        <p:txBody>
+          <a:bodyPr rtlCol="0" anchor="ctr"/>
+          <a:lstStyle/>
+          <a:p>
+            <a:pPr algn="ctr"/>
+          </a:p>
+        </p:txBody>
+      </p:sp>
       <p:pic>
         <p:nvPicPr>
-          <p:cNvPr id="16" name="Picture 15" descr="check_steel.png"/>
+          <p:cNvPr id="20" name="Picture 19" descr="check_white.png"/>
           <p:cNvPicPr>
             <a:picLocks noChangeAspect="1"/>
           </p:cNvPicPr>
@@ -10309,8 +12788,8 @@
         </p:blipFill>
         <p:spPr>
           <a:xfrm>
-            <a:off x="987552" y="4352544"/>
-            <a:ext cx="237744" cy="237744"/>
+            <a:off x="6523695" y="3588471"/>
+            <a:ext cx="266273" cy="266273"/>
           </a:xfrm>
           <a:prstGeom prst="rect">
             <a:avLst/>
@@ -10319,14 +12798,14 @@
       </p:pic>
       <p:sp>
         <p:nvSpPr>
-          <p:cNvPr id="17" name="TextBox 16"/>
+          <p:cNvPr id="21" name="TextBox 20"/>
           <p:cNvSpPr txBox="1"/>
           <p:nvPr/>
         </p:nvSpPr>
         <p:spPr>
           <a:xfrm>
-            <a:off x="1353312" y="4206240"/>
-            <a:ext cx="5029200" cy="530352"/>
+            <a:off x="7040880" y="3328416"/>
+            <a:ext cx="4206240" cy="786384"/>
           </a:xfrm>
           <a:prstGeom prst="rect">
             <a:avLst/>
@@ -10351,7 +12830,7 @@
               </a:spcAft>
             </a:pPr>
             <a:r>
-              <a:rPr sz="1200" b="0">
+              <a:rPr sz="1150" b="0">
                 <a:solidFill>
                   <a:srgbClr val="1A1A1A"/>
                 </a:solidFill>
@@ -10364,18 +12843,18 @@
       </p:sp>
       <p:sp>
         <p:nvSpPr>
-          <p:cNvPr id="18" name="Rounded Rectangle 17"/>
+          <p:cNvPr id="22" name="Rounded Rectangle 21"/>
           <p:cNvSpPr/>
           <p:nvPr/>
         </p:nvSpPr>
         <p:spPr>
           <a:xfrm>
-            <a:off x="841248" y="4809744"/>
-            <a:ext cx="5715000" cy="530352"/>
+            <a:off x="841248" y="4261104"/>
+            <a:ext cx="5138928" cy="786384"/>
           </a:xfrm>
           <a:prstGeom prst="roundRect">
             <a:avLst>
-              <a:gd name="adj" fmla="val 6000"/>
+              <a:gd name="adj" fmla="val 7000"/>
             </a:avLst>
           </a:prstGeom>
           <a:solidFill>
@@ -10410,9 +12889,55 @@
           </a:p>
         </p:txBody>
       </p:sp>
+      <p:sp>
+        <p:nvSpPr>
+          <p:cNvPr id="23" name="Rounded Rectangle 22"/>
+          <p:cNvSpPr/>
+          <p:nvPr/>
+        </p:nvSpPr>
+        <p:spPr>
+          <a:xfrm>
+            <a:off x="987552" y="4398264"/>
+            <a:ext cx="512064" cy="512064"/>
+          </a:xfrm>
+          <a:prstGeom prst="roundRect">
+            <a:avLst>
+              <a:gd name="adj" fmla="val 26000"/>
+            </a:avLst>
+          </a:prstGeom>
+          <a:solidFill>
+            <a:srgbClr val="EE0000"/>
+          </a:solidFill>
+          <a:ln>
+            <a:noFill/>
+          </a:ln>
+          <a:effectLst/>
+        </p:spPr>
+        <p:style>
+          <a:lnRef idx="1">
+            <a:schemeClr val="accent1"/>
+          </a:lnRef>
+          <a:fillRef idx="3">
+            <a:schemeClr val="accent1"/>
+          </a:fillRef>
+          <a:effectRef idx="2">
+            <a:schemeClr val="accent1"/>
+          </a:effectRef>
+          <a:fontRef idx="minor">
+            <a:schemeClr val="lt1"/>
+          </a:fontRef>
+        </p:style>
+        <p:txBody>
+          <a:bodyPr rtlCol="0" anchor="ctr"/>
+          <a:lstStyle/>
+          <a:p>
+            <a:pPr algn="ctr"/>
+          </a:p>
+        </p:txBody>
+      </p:sp>
       <p:pic>
         <p:nvPicPr>
-          <p:cNvPr id="19" name="Picture 18" descr="check_steel.png"/>
+          <p:cNvPr id="24" name="Picture 23" descr="check_white.png"/>
           <p:cNvPicPr>
             <a:picLocks noChangeAspect="1"/>
           </p:cNvPicPr>
@@ -10426,8 +12951,8 @@
         </p:blipFill>
         <p:spPr>
           <a:xfrm>
-            <a:off x="987552" y="4956048"/>
-            <a:ext cx="237744" cy="237744"/>
+            <a:off x="1110447" y="4521159"/>
+            <a:ext cx="266273" cy="266273"/>
           </a:xfrm>
           <a:prstGeom prst="rect">
             <a:avLst/>
@@ -10436,14 +12961,14 @@
       </p:pic>
       <p:sp>
         <p:nvSpPr>
-          <p:cNvPr id="20" name="TextBox 19"/>
+          <p:cNvPr id="25" name="TextBox 24"/>
           <p:cNvSpPr txBox="1"/>
           <p:nvPr/>
         </p:nvSpPr>
         <p:spPr>
           <a:xfrm>
-            <a:off x="1353312" y="4809744"/>
-            <a:ext cx="5029200" cy="530352"/>
+            <a:off x="1627632" y="4261104"/>
+            <a:ext cx="4206240" cy="786384"/>
           </a:xfrm>
           <a:prstGeom prst="rect">
             <a:avLst/>
@@ -10468,221 +12993,13 @@
               </a:spcAft>
             </a:pPr>
             <a:r>
-              <a:rPr sz="1200" b="0">
+              <a:rPr sz="1150" b="0">
                 <a:solidFill>
                   <a:srgbClr val="1A1A1A"/>
                 </a:solidFill>
                 <a:latin typeface="Red Hat Text"/>
               </a:rPr>
               <a:t>Live: burst load → CPU 221% → HPA scales 2→4 in ~24s</a:t>
-            </a:r>
-          </a:p>
-        </p:txBody>
-      </p:sp>
-      <p:sp>
-        <p:nvSpPr>
-          <p:cNvPr id="21" name="Rounded Rectangle 20"/>
-          <p:cNvSpPr/>
-          <p:nvPr/>
-        </p:nvSpPr>
-        <p:spPr>
-          <a:xfrm>
-            <a:off x="6812280" y="2395728"/>
-            <a:ext cx="4538167" cy="2944368"/>
-          </a:xfrm>
-          <a:prstGeom prst="roundRect">
-            <a:avLst>
-              <a:gd name="adj" fmla="val 4000"/>
-            </a:avLst>
-          </a:prstGeom>
-          <a:solidFill>
-            <a:srgbClr val="FFFFFF"/>
-          </a:solidFill>
-          <a:ln w="15240">
-            <a:solidFill>
-              <a:srgbClr val="DDE1E6"/>
-            </a:solidFill>
-          </a:ln>
-          <a:effectLst/>
-        </p:spPr>
-        <p:style>
-          <a:lnRef idx="1">
-            <a:schemeClr val="accent1"/>
-          </a:lnRef>
-          <a:fillRef idx="3">
-            <a:schemeClr val="accent1"/>
-          </a:fillRef>
-          <a:effectRef idx="2">
-            <a:schemeClr val="accent1"/>
-          </a:effectRef>
-          <a:fontRef idx="minor">
-            <a:schemeClr val="lt1"/>
-          </a:fontRef>
-        </p:style>
-        <p:txBody>
-          <a:bodyPr rtlCol="0" anchor="ctr"/>
-          <a:lstStyle/>
-          <a:p>
-            <a:pPr algn="ctr"/>
-          </a:p>
-        </p:txBody>
-      </p:sp>
-      <p:sp>
-        <p:nvSpPr>
-          <p:cNvPr id="22" name="Rounded Rectangle 21"/>
-          <p:cNvSpPr/>
-          <p:nvPr/>
-        </p:nvSpPr>
-        <p:spPr>
-          <a:xfrm>
-            <a:off x="7013448" y="2596896"/>
-            <a:ext cx="1298448" cy="310896"/>
-          </a:xfrm>
-          <a:prstGeom prst="roundRect">
-            <a:avLst>
-              <a:gd name="adj" fmla="val 50000"/>
-            </a:avLst>
-          </a:prstGeom>
-          <a:solidFill>
-            <a:srgbClr val="FCECEC"/>
-          </a:solidFill>
-          <a:ln>
-            <a:noFill/>
-          </a:ln>
-          <a:effectLst/>
-        </p:spPr>
-        <p:style>
-          <a:lnRef idx="1">
-            <a:schemeClr val="accent1"/>
-          </a:lnRef>
-          <a:fillRef idx="3">
-            <a:schemeClr val="accent1"/>
-          </a:fillRef>
-          <a:effectRef idx="2">
-            <a:schemeClr val="accent1"/>
-          </a:effectRef>
-          <a:fontRef idx="minor">
-            <a:schemeClr val="lt1"/>
-          </a:fontRef>
-        </p:style>
-        <p:txBody>
-          <a:bodyPr rtlCol="0" anchor="ctr"/>
-          <a:lstStyle/>
-          <a:p>
-            <a:pPr algn="ctr"/>
-          </a:p>
-        </p:txBody>
-      </p:sp>
-      <p:sp>
-        <p:nvSpPr>
-          <p:cNvPr id="23" name="TextBox 22"/>
-          <p:cNvSpPr txBox="1"/>
-          <p:nvPr/>
-        </p:nvSpPr>
-        <p:spPr>
-          <a:xfrm>
-            <a:off x="7013448" y="2596896"/>
-            <a:ext cx="1298448" cy="310896"/>
-          </a:xfrm>
-          <a:prstGeom prst="rect">
-            <a:avLst/>
-          </a:prstGeom>
-          <a:noFill/>
-        </p:spPr>
-        <p:txBody>
-          <a:bodyPr wrap="none" anchor="ctr" lIns="0" rIns="0" tIns="0" bIns="0">
-            <a:spAutoFit/>
-          </a:bodyPr>
-          <a:lstStyle/>
-          <a:p>
-            <a:pPr algn="ctr">
-              <a:lnSpc>
-                <a:spcPct val="106000"/>
-              </a:lnSpc>
-              <a:spcBef>
-                <a:spcPts val="0"/>
-              </a:spcBef>
-              <a:spcAft>
-                <a:spcPts val="0"/>
-              </a:spcAft>
-            </a:pPr>
-            <a:r>
-              <a:rPr sz="850" b="1">
-                <a:solidFill>
-                  <a:srgbClr val="B80000"/>
-                </a:solidFill>
-                <a:latin typeface="Red Hat Display"/>
-              </a:rPr>
-              <a:t>MEDIA PASS</a:t>
-            </a:r>
-          </a:p>
-        </p:txBody>
-      </p:sp>
-      <p:pic>
-        <p:nvPicPr>
-          <p:cNvPr id="24" name="Picture 23" descr="eye_slate.png"/>
-          <p:cNvPicPr>
-            <a:picLocks noChangeAspect="1"/>
-          </p:cNvPicPr>
-          <p:nvPr/>
-        </p:nvPicPr>
-        <p:blipFill>
-          <a:blip r:embed="rId4"/>
-          <a:stretch>
-            <a:fillRect/>
-          </a:stretch>
-        </p:blipFill>
-        <p:spPr>
-          <a:xfrm>
-            <a:off x="8843619" y="3108960"/>
-            <a:ext cx="475488" cy="475488"/>
-          </a:xfrm>
-          <a:prstGeom prst="rect">
-            <a:avLst/>
-          </a:prstGeom>
-        </p:spPr>
-      </p:pic>
-      <p:sp>
-        <p:nvSpPr>
-          <p:cNvPr id="25" name="TextBox 24"/>
-          <p:cNvSpPr txBox="1"/>
-          <p:nvPr/>
-        </p:nvSpPr>
-        <p:spPr>
-          <a:xfrm>
-            <a:off x="7050024" y="3721608"/>
-            <a:ext cx="4062679" cy="1481328"/>
-          </a:xfrm>
-          <a:prstGeom prst="rect">
-            <a:avLst/>
-          </a:prstGeom>
-          <a:noFill/>
-        </p:spPr>
-        <p:txBody>
-          <a:bodyPr wrap="square" anchor="t" lIns="0" rIns="0" tIns="0" bIns="0">
-            <a:spAutoFit/>
-          </a:bodyPr>
-          <a:lstStyle/>
-          <a:p>
-            <a:pPr algn="l">
-              <a:lnSpc>
-                <a:spcPct val="120000"/>
-              </a:lnSpc>
-              <a:spcBef>
-                <a:spcPts val="0"/>
-              </a:spcBef>
-              <a:spcAft>
-                <a:spcPts val="0"/>
-              </a:spcAft>
-            </a:pPr>
-            <a:r>
-              <a:rPr sz="950" b="0">
-                <a:solidFill>
-                  <a:srgbClr val="8A9099"/>
-                </a:solidFill>
-                <a:latin typeface="Red Hat Text"/>
-              </a:rPr>
-              <a:t>Concept diagram observability-health-scale-03-scaling-decision-tree — four branches from "what is the pressure?"; HPA highlighted.</a:t>
             </a:r>
           </a:p>
         </p:txBody>
@@ -10990,11 +13307,11 @@
         <p:spPr>
           <a:xfrm>
             <a:off x="841248" y="2395728"/>
-            <a:ext cx="5715000" cy="530352"/>
+            <a:ext cx="5138928" cy="786384"/>
           </a:xfrm>
           <a:prstGeom prst="roundRect">
             <a:avLst>
-              <a:gd name="adj" fmla="val 6000"/>
+              <a:gd name="adj" fmla="val 7000"/>
             </a:avLst>
           </a:prstGeom>
           <a:solidFill>
@@ -11029,9 +13346,55 @@
           </a:p>
         </p:txBody>
       </p:sp>
+      <p:sp>
+        <p:nvSpPr>
+          <p:cNvPr id="7" name="Rounded Rectangle 6"/>
+          <p:cNvSpPr/>
+          <p:nvPr/>
+        </p:nvSpPr>
+        <p:spPr>
+          <a:xfrm>
+            <a:off x="987552" y="2532888"/>
+            <a:ext cx="512064" cy="512064"/>
+          </a:xfrm>
+          <a:prstGeom prst="roundRect">
+            <a:avLst>
+              <a:gd name="adj" fmla="val 26000"/>
+            </a:avLst>
+          </a:prstGeom>
+          <a:solidFill>
+            <a:srgbClr val="EE0000"/>
+          </a:solidFill>
+          <a:ln>
+            <a:noFill/>
+          </a:ln>
+          <a:effectLst/>
+        </p:spPr>
+        <p:style>
+          <a:lnRef idx="1">
+            <a:schemeClr val="accent1"/>
+          </a:lnRef>
+          <a:fillRef idx="3">
+            <a:schemeClr val="accent1"/>
+          </a:fillRef>
+          <a:effectRef idx="2">
+            <a:schemeClr val="accent1"/>
+          </a:effectRef>
+          <a:fontRef idx="minor">
+            <a:schemeClr val="lt1"/>
+          </a:fontRef>
+        </p:style>
+        <p:txBody>
+          <a:bodyPr rtlCol="0" anchor="ctr"/>
+          <a:lstStyle/>
+          <a:p>
+            <a:pPr algn="ctr"/>
+          </a:p>
+        </p:txBody>
+      </p:sp>
       <p:pic>
         <p:nvPicPr>
-          <p:cNvPr id="7" name="Picture 6" descr="check_steel.png"/>
+          <p:cNvPr id="8" name="Picture 7" descr="check_white.png"/>
           <p:cNvPicPr>
             <a:picLocks noChangeAspect="1"/>
           </p:cNvPicPr>
@@ -11045,8 +13408,8 @@
         </p:blipFill>
         <p:spPr>
           <a:xfrm>
-            <a:off x="987552" y="2542032"/>
-            <a:ext cx="237744" cy="237744"/>
+            <a:off x="1110447" y="2655783"/>
+            <a:ext cx="266273" cy="266273"/>
           </a:xfrm>
           <a:prstGeom prst="rect">
             <a:avLst/>
@@ -11055,14 +13418,14 @@
       </p:pic>
       <p:sp>
         <p:nvSpPr>
-          <p:cNvPr id="8" name="TextBox 7"/>
+          <p:cNvPr id="9" name="TextBox 8"/>
           <p:cNvSpPr txBox="1"/>
           <p:nvPr/>
         </p:nvSpPr>
         <p:spPr>
           <a:xfrm>
-            <a:off x="1353312" y="2395728"/>
-            <a:ext cx="5029200" cy="530352"/>
+            <a:off x="1627632" y="2395728"/>
+            <a:ext cx="4206240" cy="786384"/>
           </a:xfrm>
           <a:prstGeom prst="rect">
             <a:avLst/>
@@ -11087,7 +13450,7 @@
               </a:spcAft>
             </a:pPr>
             <a:r>
-              <a:rPr sz="1200" b="0">
+              <a:rPr sz="1150" b="0">
                 <a:solidFill>
                   <a:srgbClr val="1A1A1A"/>
                 </a:solidFill>
@@ -11100,18 +13463,18 @@
       </p:sp>
       <p:sp>
         <p:nvSpPr>
-          <p:cNvPr id="9" name="Rounded Rectangle 8"/>
+          <p:cNvPr id="10" name="Rounded Rectangle 9"/>
           <p:cNvSpPr/>
           <p:nvPr/>
         </p:nvSpPr>
         <p:spPr>
           <a:xfrm>
-            <a:off x="841248" y="2999232"/>
-            <a:ext cx="5715000" cy="530352"/>
+            <a:off x="6254496" y="2395728"/>
+            <a:ext cx="5138928" cy="786384"/>
           </a:xfrm>
           <a:prstGeom prst="roundRect">
             <a:avLst>
-              <a:gd name="adj" fmla="val 6000"/>
+              <a:gd name="adj" fmla="val 7000"/>
             </a:avLst>
           </a:prstGeom>
           <a:solidFill>
@@ -11146,9 +13509,55 @@
           </a:p>
         </p:txBody>
       </p:sp>
+      <p:sp>
+        <p:nvSpPr>
+          <p:cNvPr id="11" name="Rounded Rectangle 10"/>
+          <p:cNvSpPr/>
+          <p:nvPr/>
+        </p:nvSpPr>
+        <p:spPr>
+          <a:xfrm>
+            <a:off x="6400800" y="2532888"/>
+            <a:ext cx="512064" cy="512064"/>
+          </a:xfrm>
+          <a:prstGeom prst="roundRect">
+            <a:avLst>
+              <a:gd name="adj" fmla="val 26000"/>
+            </a:avLst>
+          </a:prstGeom>
+          <a:solidFill>
+            <a:srgbClr val="EE0000"/>
+          </a:solidFill>
+          <a:ln>
+            <a:noFill/>
+          </a:ln>
+          <a:effectLst/>
+        </p:spPr>
+        <p:style>
+          <a:lnRef idx="1">
+            <a:schemeClr val="accent1"/>
+          </a:lnRef>
+          <a:fillRef idx="3">
+            <a:schemeClr val="accent1"/>
+          </a:fillRef>
+          <a:effectRef idx="2">
+            <a:schemeClr val="accent1"/>
+          </a:effectRef>
+          <a:fontRef idx="minor">
+            <a:schemeClr val="lt1"/>
+          </a:fontRef>
+        </p:style>
+        <p:txBody>
+          <a:bodyPr rtlCol="0" anchor="ctr"/>
+          <a:lstStyle/>
+          <a:p>
+            <a:pPr algn="ctr"/>
+          </a:p>
+        </p:txBody>
+      </p:sp>
       <p:pic>
         <p:nvPicPr>
-          <p:cNvPr id="10" name="Picture 9" descr="check_steel.png"/>
+          <p:cNvPr id="12" name="Picture 11" descr="check_white.png"/>
           <p:cNvPicPr>
             <a:picLocks noChangeAspect="1"/>
           </p:cNvPicPr>
@@ -11162,8 +13571,8 @@
         </p:blipFill>
         <p:spPr>
           <a:xfrm>
-            <a:off x="987552" y="3145536"/>
-            <a:ext cx="237744" cy="237744"/>
+            <a:off x="6523695" y="2655783"/>
+            <a:ext cx="266273" cy="266273"/>
           </a:xfrm>
           <a:prstGeom prst="rect">
             <a:avLst/>
@@ -11172,14 +13581,14 @@
       </p:pic>
       <p:sp>
         <p:nvSpPr>
-          <p:cNvPr id="11" name="TextBox 10"/>
+          <p:cNvPr id="13" name="TextBox 12"/>
           <p:cNvSpPr txBox="1"/>
           <p:nvPr/>
         </p:nvSpPr>
         <p:spPr>
           <a:xfrm>
-            <a:off x="1353312" y="2999232"/>
-            <a:ext cx="5029200" cy="530352"/>
+            <a:off x="7040880" y="2395728"/>
+            <a:ext cx="4206240" cy="786384"/>
           </a:xfrm>
           <a:prstGeom prst="rect">
             <a:avLst/>
@@ -11204,7 +13613,7 @@
               </a:spcAft>
             </a:pPr>
             <a:r>
-              <a:rPr sz="1200" b="0">
+              <a:rPr sz="1150" b="0">
                 <a:solidFill>
                   <a:srgbClr val="1A1A1A"/>
                 </a:solidFill>
@@ -11217,18 +13626,18 @@
       </p:sp>
       <p:sp>
         <p:nvSpPr>
-          <p:cNvPr id="12" name="Rounded Rectangle 11"/>
+          <p:cNvPr id="14" name="Rounded Rectangle 13"/>
           <p:cNvSpPr/>
           <p:nvPr/>
         </p:nvSpPr>
         <p:spPr>
           <a:xfrm>
-            <a:off x="841248" y="3602736"/>
-            <a:ext cx="5715000" cy="530352"/>
+            <a:off x="841248" y="3328416"/>
+            <a:ext cx="5138928" cy="786384"/>
           </a:xfrm>
           <a:prstGeom prst="roundRect">
             <a:avLst>
-              <a:gd name="adj" fmla="val 6000"/>
+              <a:gd name="adj" fmla="val 7000"/>
             </a:avLst>
           </a:prstGeom>
           <a:solidFill>
@@ -11263,9 +13672,55 @@
           </a:p>
         </p:txBody>
       </p:sp>
+      <p:sp>
+        <p:nvSpPr>
+          <p:cNvPr id="15" name="Rounded Rectangle 14"/>
+          <p:cNvSpPr/>
+          <p:nvPr/>
+        </p:nvSpPr>
+        <p:spPr>
+          <a:xfrm>
+            <a:off x="987552" y="3465576"/>
+            <a:ext cx="512064" cy="512064"/>
+          </a:xfrm>
+          <a:prstGeom prst="roundRect">
+            <a:avLst>
+              <a:gd name="adj" fmla="val 26000"/>
+            </a:avLst>
+          </a:prstGeom>
+          <a:solidFill>
+            <a:srgbClr val="EE0000"/>
+          </a:solidFill>
+          <a:ln>
+            <a:noFill/>
+          </a:ln>
+          <a:effectLst/>
+        </p:spPr>
+        <p:style>
+          <a:lnRef idx="1">
+            <a:schemeClr val="accent1"/>
+          </a:lnRef>
+          <a:fillRef idx="3">
+            <a:schemeClr val="accent1"/>
+          </a:fillRef>
+          <a:effectRef idx="2">
+            <a:schemeClr val="accent1"/>
+          </a:effectRef>
+          <a:fontRef idx="minor">
+            <a:schemeClr val="lt1"/>
+          </a:fontRef>
+        </p:style>
+        <p:txBody>
+          <a:bodyPr rtlCol="0" anchor="ctr"/>
+          <a:lstStyle/>
+          <a:p>
+            <a:pPr algn="ctr"/>
+          </a:p>
+        </p:txBody>
+      </p:sp>
       <p:pic>
         <p:nvPicPr>
-          <p:cNvPr id="13" name="Picture 12" descr="check_steel.png"/>
+          <p:cNvPr id="16" name="Picture 15" descr="check_white.png"/>
           <p:cNvPicPr>
             <a:picLocks noChangeAspect="1"/>
           </p:cNvPicPr>
@@ -11279,8 +13734,8 @@
         </p:blipFill>
         <p:spPr>
           <a:xfrm>
-            <a:off x="987552" y="3749040"/>
-            <a:ext cx="237744" cy="237744"/>
+            <a:off x="1110447" y="3588471"/>
+            <a:ext cx="266273" cy="266273"/>
           </a:xfrm>
           <a:prstGeom prst="rect">
             <a:avLst/>
@@ -11289,14 +13744,14 @@
       </p:pic>
       <p:sp>
         <p:nvSpPr>
-          <p:cNvPr id="14" name="TextBox 13"/>
+          <p:cNvPr id="17" name="TextBox 16"/>
           <p:cNvSpPr txBox="1"/>
           <p:nvPr/>
         </p:nvSpPr>
         <p:spPr>
           <a:xfrm>
-            <a:off x="1353312" y="3602736"/>
-            <a:ext cx="5029200" cy="530352"/>
+            <a:off x="1627632" y="3328416"/>
+            <a:ext cx="4206240" cy="786384"/>
           </a:xfrm>
           <a:prstGeom prst="rect">
             <a:avLst/>
@@ -11321,7 +13776,7 @@
               </a:spcAft>
             </a:pPr>
             <a:r>
-              <a:rPr sz="1200" b="0">
+              <a:rPr sz="1150" b="0">
                 <a:solidFill>
                   <a:srgbClr val="1A1A1A"/>
                 </a:solidFill>
@@ -11334,18 +13789,18 @@
       </p:sp>
       <p:sp>
         <p:nvSpPr>
-          <p:cNvPr id="15" name="Rounded Rectangle 14"/>
+          <p:cNvPr id="18" name="Rounded Rectangle 17"/>
           <p:cNvSpPr/>
           <p:nvPr/>
         </p:nvSpPr>
         <p:spPr>
           <a:xfrm>
-            <a:off x="841248" y="4206240"/>
-            <a:ext cx="5715000" cy="530352"/>
+            <a:off x="6254496" y="3328416"/>
+            <a:ext cx="5138928" cy="786384"/>
           </a:xfrm>
           <a:prstGeom prst="roundRect">
             <a:avLst>
-              <a:gd name="adj" fmla="val 6000"/>
+              <a:gd name="adj" fmla="val 7000"/>
             </a:avLst>
           </a:prstGeom>
           <a:solidFill>
@@ -11380,9 +13835,55 @@
           </a:p>
         </p:txBody>
       </p:sp>
+      <p:sp>
+        <p:nvSpPr>
+          <p:cNvPr id="19" name="Rounded Rectangle 18"/>
+          <p:cNvSpPr/>
+          <p:nvPr/>
+        </p:nvSpPr>
+        <p:spPr>
+          <a:xfrm>
+            <a:off x="6400800" y="3465576"/>
+            <a:ext cx="512064" cy="512064"/>
+          </a:xfrm>
+          <a:prstGeom prst="roundRect">
+            <a:avLst>
+              <a:gd name="adj" fmla="val 26000"/>
+            </a:avLst>
+          </a:prstGeom>
+          <a:solidFill>
+            <a:srgbClr val="EE0000"/>
+          </a:solidFill>
+          <a:ln>
+            <a:noFill/>
+          </a:ln>
+          <a:effectLst/>
+        </p:spPr>
+        <p:style>
+          <a:lnRef idx="1">
+            <a:schemeClr val="accent1"/>
+          </a:lnRef>
+          <a:fillRef idx="3">
+            <a:schemeClr val="accent1"/>
+          </a:fillRef>
+          <a:effectRef idx="2">
+            <a:schemeClr val="accent1"/>
+          </a:effectRef>
+          <a:fontRef idx="minor">
+            <a:schemeClr val="lt1"/>
+          </a:fontRef>
+        </p:style>
+        <p:txBody>
+          <a:bodyPr rtlCol="0" anchor="ctr"/>
+          <a:lstStyle/>
+          <a:p>
+            <a:pPr algn="ctr"/>
+          </a:p>
+        </p:txBody>
+      </p:sp>
       <p:pic>
         <p:nvPicPr>
-          <p:cNvPr id="16" name="Picture 15" descr="check_steel.png"/>
+          <p:cNvPr id="20" name="Picture 19" descr="check_white.png"/>
           <p:cNvPicPr>
             <a:picLocks noChangeAspect="1"/>
           </p:cNvPicPr>
@@ -11396,8 +13897,8 @@
         </p:blipFill>
         <p:spPr>
           <a:xfrm>
-            <a:off x="987552" y="4352544"/>
-            <a:ext cx="237744" cy="237744"/>
+            <a:off x="6523695" y="3588471"/>
+            <a:ext cx="266273" cy="266273"/>
           </a:xfrm>
           <a:prstGeom prst="rect">
             <a:avLst/>
@@ -11406,14 +13907,14 @@
       </p:pic>
       <p:sp>
         <p:nvSpPr>
-          <p:cNvPr id="17" name="TextBox 16"/>
+          <p:cNvPr id="21" name="TextBox 20"/>
           <p:cNvSpPr txBox="1"/>
           <p:nvPr/>
         </p:nvSpPr>
         <p:spPr>
           <a:xfrm>
-            <a:off x="1353312" y="4206240"/>
-            <a:ext cx="5029200" cy="530352"/>
+            <a:off x="7040880" y="3328416"/>
+            <a:ext cx="4206240" cy="786384"/>
           </a:xfrm>
           <a:prstGeom prst="rect">
             <a:avLst/>
@@ -11438,7 +13939,7 @@
               </a:spcAft>
             </a:pPr>
             <a:r>
-              <a:rPr sz="1200" b="0">
+              <a:rPr sz="1150" b="0">
                 <a:solidFill>
                   <a:srgbClr val="1A1A1A"/>
                 </a:solidFill>
@@ -11451,18 +13952,18 @@
       </p:sp>
       <p:sp>
         <p:nvSpPr>
-          <p:cNvPr id="18" name="Rounded Rectangle 17"/>
+          <p:cNvPr id="22" name="Rounded Rectangle 21"/>
           <p:cNvSpPr/>
           <p:nvPr/>
         </p:nvSpPr>
         <p:spPr>
           <a:xfrm>
-            <a:off x="841248" y="4809744"/>
-            <a:ext cx="5715000" cy="530352"/>
+            <a:off x="841248" y="4261104"/>
+            <a:ext cx="5138928" cy="786384"/>
           </a:xfrm>
           <a:prstGeom prst="roundRect">
             <a:avLst>
-              <a:gd name="adj" fmla="val 6000"/>
+              <a:gd name="adj" fmla="val 7000"/>
             </a:avLst>
           </a:prstGeom>
           <a:solidFill>
@@ -11497,9 +13998,55 @@
           </a:p>
         </p:txBody>
       </p:sp>
+      <p:sp>
+        <p:nvSpPr>
+          <p:cNvPr id="23" name="Rounded Rectangle 22"/>
+          <p:cNvSpPr/>
+          <p:nvPr/>
+        </p:nvSpPr>
+        <p:spPr>
+          <a:xfrm>
+            <a:off x="987552" y="4398264"/>
+            <a:ext cx="512064" cy="512064"/>
+          </a:xfrm>
+          <a:prstGeom prst="roundRect">
+            <a:avLst>
+              <a:gd name="adj" fmla="val 26000"/>
+            </a:avLst>
+          </a:prstGeom>
+          <a:solidFill>
+            <a:srgbClr val="EE0000"/>
+          </a:solidFill>
+          <a:ln>
+            <a:noFill/>
+          </a:ln>
+          <a:effectLst/>
+        </p:spPr>
+        <p:style>
+          <a:lnRef idx="1">
+            <a:schemeClr val="accent1"/>
+          </a:lnRef>
+          <a:fillRef idx="3">
+            <a:schemeClr val="accent1"/>
+          </a:fillRef>
+          <a:effectRef idx="2">
+            <a:schemeClr val="accent1"/>
+          </a:effectRef>
+          <a:fontRef idx="minor">
+            <a:schemeClr val="lt1"/>
+          </a:fontRef>
+        </p:style>
+        <p:txBody>
+          <a:bodyPr rtlCol="0" anchor="ctr"/>
+          <a:lstStyle/>
+          <a:p>
+            <a:pPr algn="ctr"/>
+          </a:p>
+        </p:txBody>
+      </p:sp>
       <p:pic>
         <p:nvPicPr>
-          <p:cNvPr id="19" name="Picture 18" descr="check_steel.png"/>
+          <p:cNvPr id="24" name="Picture 23" descr="check_white.png"/>
           <p:cNvPicPr>
             <a:picLocks noChangeAspect="1"/>
           </p:cNvPicPr>
@@ -11513,8 +14060,8 @@
         </p:blipFill>
         <p:spPr>
           <a:xfrm>
-            <a:off x="987552" y="4956048"/>
-            <a:ext cx="237744" cy="237744"/>
+            <a:off x="1110447" y="4521159"/>
+            <a:ext cx="266273" cy="266273"/>
           </a:xfrm>
           <a:prstGeom prst="rect">
             <a:avLst/>
@@ -11523,14 +14070,14 @@
       </p:pic>
       <p:sp>
         <p:nvSpPr>
-          <p:cNvPr id="20" name="TextBox 19"/>
+          <p:cNvPr id="25" name="TextBox 24"/>
           <p:cNvSpPr txBox="1"/>
           <p:nvPr/>
         </p:nvSpPr>
         <p:spPr>
           <a:xfrm>
-            <a:off x="1353312" y="4809744"/>
-            <a:ext cx="5029200" cy="530352"/>
+            <a:off x="1627632" y="4261104"/>
+            <a:ext cx="4206240" cy="786384"/>
           </a:xfrm>
           <a:prstGeom prst="rect">
             <a:avLst/>
@@ -11555,221 +14102,13 @@
               </a:spcAft>
             </a:pPr>
             <a:r>
-              <a:rPr sz="1200" b="0">
+              <a:rPr sz="1150" b="0">
                 <a:solidFill>
                   <a:srgbClr val="1A1A1A"/>
                 </a:solidFill>
                 <a:latin typeface="Red Hat Text"/>
               </a:rPr>
               <a:t>The eviction API refuses the last one: *"Cannot evict pod ... would violate the disruption budget"*</a:t>
-            </a:r>
-          </a:p>
-        </p:txBody>
-      </p:sp>
-      <p:sp>
-        <p:nvSpPr>
-          <p:cNvPr id="21" name="Rounded Rectangle 20"/>
-          <p:cNvSpPr/>
-          <p:nvPr/>
-        </p:nvSpPr>
-        <p:spPr>
-          <a:xfrm>
-            <a:off x="6812280" y="2395728"/>
-            <a:ext cx="4538167" cy="2944368"/>
-          </a:xfrm>
-          <a:prstGeom prst="roundRect">
-            <a:avLst>
-              <a:gd name="adj" fmla="val 4000"/>
-            </a:avLst>
-          </a:prstGeom>
-          <a:solidFill>
-            <a:srgbClr val="FFFFFF"/>
-          </a:solidFill>
-          <a:ln w="15240">
-            <a:solidFill>
-              <a:srgbClr val="DDE1E6"/>
-            </a:solidFill>
-          </a:ln>
-          <a:effectLst/>
-        </p:spPr>
-        <p:style>
-          <a:lnRef idx="1">
-            <a:schemeClr val="accent1"/>
-          </a:lnRef>
-          <a:fillRef idx="3">
-            <a:schemeClr val="accent1"/>
-          </a:fillRef>
-          <a:effectRef idx="2">
-            <a:schemeClr val="accent1"/>
-          </a:effectRef>
-          <a:fontRef idx="minor">
-            <a:schemeClr val="lt1"/>
-          </a:fontRef>
-        </p:style>
-        <p:txBody>
-          <a:bodyPr rtlCol="0" anchor="ctr"/>
-          <a:lstStyle/>
-          <a:p>
-            <a:pPr algn="ctr"/>
-          </a:p>
-        </p:txBody>
-      </p:sp>
-      <p:sp>
-        <p:nvSpPr>
-          <p:cNvPr id="22" name="Rounded Rectangle 21"/>
-          <p:cNvSpPr/>
-          <p:nvPr/>
-        </p:nvSpPr>
-        <p:spPr>
-          <a:xfrm>
-            <a:off x="7013448" y="2596896"/>
-            <a:ext cx="1298448" cy="310896"/>
-          </a:xfrm>
-          <a:prstGeom prst="roundRect">
-            <a:avLst>
-              <a:gd name="adj" fmla="val 50000"/>
-            </a:avLst>
-          </a:prstGeom>
-          <a:solidFill>
-            <a:srgbClr val="FCECEC"/>
-          </a:solidFill>
-          <a:ln>
-            <a:noFill/>
-          </a:ln>
-          <a:effectLst/>
-        </p:spPr>
-        <p:style>
-          <a:lnRef idx="1">
-            <a:schemeClr val="accent1"/>
-          </a:lnRef>
-          <a:fillRef idx="3">
-            <a:schemeClr val="accent1"/>
-          </a:fillRef>
-          <a:effectRef idx="2">
-            <a:schemeClr val="accent1"/>
-          </a:effectRef>
-          <a:fontRef idx="minor">
-            <a:schemeClr val="lt1"/>
-          </a:fontRef>
-        </p:style>
-        <p:txBody>
-          <a:bodyPr rtlCol="0" anchor="ctr"/>
-          <a:lstStyle/>
-          <a:p>
-            <a:pPr algn="ctr"/>
-          </a:p>
-        </p:txBody>
-      </p:sp>
-      <p:sp>
-        <p:nvSpPr>
-          <p:cNvPr id="23" name="TextBox 22"/>
-          <p:cNvSpPr txBox="1"/>
-          <p:nvPr/>
-        </p:nvSpPr>
-        <p:spPr>
-          <a:xfrm>
-            <a:off x="7013448" y="2596896"/>
-            <a:ext cx="1298448" cy="310896"/>
-          </a:xfrm>
-          <a:prstGeom prst="rect">
-            <a:avLst/>
-          </a:prstGeom>
-          <a:noFill/>
-        </p:spPr>
-        <p:txBody>
-          <a:bodyPr wrap="none" anchor="ctr" lIns="0" rIns="0" tIns="0" bIns="0">
-            <a:spAutoFit/>
-          </a:bodyPr>
-          <a:lstStyle/>
-          <a:p>
-            <a:pPr algn="ctr">
-              <a:lnSpc>
-                <a:spcPct val="106000"/>
-              </a:lnSpc>
-              <a:spcBef>
-                <a:spcPts val="0"/>
-              </a:spcBef>
-              <a:spcAft>
-                <a:spcPts val="0"/>
-              </a:spcAft>
-            </a:pPr>
-            <a:r>
-              <a:rPr sz="850" b="1">
-                <a:solidFill>
-                  <a:srgbClr val="B80000"/>
-                </a:solidFill>
-                <a:latin typeface="Red Hat Display"/>
-              </a:rPr>
-              <a:t>MEDIA PASS</a:t>
-            </a:r>
-          </a:p>
-        </p:txBody>
-      </p:sp>
-      <p:pic>
-        <p:nvPicPr>
-          <p:cNvPr id="24" name="Picture 23" descr="eye_slate.png"/>
-          <p:cNvPicPr>
-            <a:picLocks noChangeAspect="1"/>
-          </p:cNvPicPr>
-          <p:nvPr/>
-        </p:nvPicPr>
-        <p:blipFill>
-          <a:blip r:embed="rId4"/>
-          <a:stretch>
-            <a:fillRect/>
-          </a:stretch>
-        </p:blipFill>
-        <p:spPr>
-          <a:xfrm>
-            <a:off x="8843619" y="3108960"/>
-            <a:ext cx="475488" cy="475488"/>
-          </a:xfrm>
-          <a:prstGeom prst="rect">
-            <a:avLst/>
-          </a:prstGeom>
-        </p:spPr>
-      </p:pic>
-      <p:sp>
-        <p:nvSpPr>
-          <p:cNvPr id="25" name="TextBox 24"/>
-          <p:cNvSpPr txBox="1"/>
-          <p:nvPr/>
-        </p:nvSpPr>
-        <p:spPr>
-          <a:xfrm>
-            <a:off x="7050024" y="3721608"/>
-            <a:ext cx="4062679" cy="1481328"/>
-          </a:xfrm>
-          <a:prstGeom prst="rect">
-            <a:avLst/>
-          </a:prstGeom>
-          <a:noFill/>
-        </p:spPr>
-        <p:txBody>
-          <a:bodyPr wrap="square" anchor="t" lIns="0" rIns="0" tIns="0" bIns="0">
-            <a:spAutoFit/>
-          </a:bodyPr>
-          <a:lstStyle/>
-          <a:p>
-            <a:pPr algn="l">
-              <a:lnSpc>
-                <a:spcPct val="120000"/>
-              </a:lnSpc>
-              <a:spcBef>
-                <a:spcPts val="0"/>
-              </a:spcBef>
-              <a:spcAft>
-                <a:spcPts val="0"/>
-              </a:spcAft>
-            </a:pPr>
-            <a:r>
-              <a:rPr sz="950" b="0">
-                <a:solidFill>
-                  <a:srgbClr val="8A9099"/>
-                </a:solidFill>
-                <a:latin typeface="Red Hat Text"/>
-              </a:rPr>
-              <a:t>A node draining, two claims pods; one evicted + rescheduling, the second held with a "budget: wait" lock icon.</a:t>
             </a:r>
           </a:p>
         </p:txBody>
@@ -12077,11 +14416,11 @@
         <p:spPr>
           <a:xfrm>
             <a:off x="841248" y="2395728"/>
-            <a:ext cx="5715000" cy="530352"/>
+            <a:ext cx="5138928" cy="786384"/>
           </a:xfrm>
           <a:prstGeom prst="roundRect">
             <a:avLst>
-              <a:gd name="adj" fmla="val 6000"/>
+              <a:gd name="adj" fmla="val 7000"/>
             </a:avLst>
           </a:prstGeom>
           <a:solidFill>
@@ -12116,9 +14455,55 @@
           </a:p>
         </p:txBody>
       </p:sp>
+      <p:sp>
+        <p:nvSpPr>
+          <p:cNvPr id="7" name="Rounded Rectangle 6"/>
+          <p:cNvSpPr/>
+          <p:nvPr/>
+        </p:nvSpPr>
+        <p:spPr>
+          <a:xfrm>
+            <a:off x="987552" y="2532888"/>
+            <a:ext cx="512064" cy="512064"/>
+          </a:xfrm>
+          <a:prstGeom prst="roundRect">
+            <a:avLst>
+              <a:gd name="adj" fmla="val 26000"/>
+            </a:avLst>
+          </a:prstGeom>
+          <a:solidFill>
+            <a:srgbClr val="EE0000"/>
+          </a:solidFill>
+          <a:ln>
+            <a:noFill/>
+          </a:ln>
+          <a:effectLst/>
+        </p:spPr>
+        <p:style>
+          <a:lnRef idx="1">
+            <a:schemeClr val="accent1"/>
+          </a:lnRef>
+          <a:fillRef idx="3">
+            <a:schemeClr val="accent1"/>
+          </a:fillRef>
+          <a:effectRef idx="2">
+            <a:schemeClr val="accent1"/>
+          </a:effectRef>
+          <a:fontRef idx="minor">
+            <a:schemeClr val="lt1"/>
+          </a:fontRef>
+        </p:style>
+        <p:txBody>
+          <a:bodyPr rtlCol="0" anchor="ctr"/>
+          <a:lstStyle/>
+          <a:p>
+            <a:pPr algn="ctr"/>
+          </a:p>
+        </p:txBody>
+      </p:sp>
       <p:pic>
         <p:nvPicPr>
-          <p:cNvPr id="7" name="Picture 6" descr="check_steel.png"/>
+          <p:cNvPr id="8" name="Picture 7" descr="check_white.png"/>
           <p:cNvPicPr>
             <a:picLocks noChangeAspect="1"/>
           </p:cNvPicPr>
@@ -12132,8 +14517,8 @@
         </p:blipFill>
         <p:spPr>
           <a:xfrm>
-            <a:off x="987552" y="2542032"/>
-            <a:ext cx="237744" cy="237744"/>
+            <a:off x="1110447" y="2655783"/>
+            <a:ext cx="266273" cy="266273"/>
           </a:xfrm>
           <a:prstGeom prst="rect">
             <a:avLst/>
@@ -12142,14 +14527,14 @@
       </p:pic>
       <p:sp>
         <p:nvSpPr>
-          <p:cNvPr id="8" name="TextBox 7"/>
+          <p:cNvPr id="9" name="TextBox 8"/>
           <p:cNvSpPr txBox="1"/>
           <p:nvPr/>
         </p:nvSpPr>
         <p:spPr>
           <a:xfrm>
-            <a:off x="1353312" y="2395728"/>
-            <a:ext cx="5029200" cy="530352"/>
+            <a:off x="1627632" y="2395728"/>
+            <a:ext cx="4206240" cy="786384"/>
           </a:xfrm>
           <a:prstGeom prst="rect">
             <a:avLst/>
@@ -12174,7 +14559,7 @@
               </a:spcAft>
             </a:pPr>
             <a:r>
-              <a:rPr sz="1200" b="0">
+              <a:rPr sz="1150" b="0">
                 <a:solidFill>
                   <a:srgbClr val="1A1A1A"/>
                 </a:solidFill>
@@ -12187,18 +14572,18 @@
       </p:sp>
       <p:sp>
         <p:nvSpPr>
-          <p:cNvPr id="9" name="Rounded Rectangle 8"/>
+          <p:cNvPr id="10" name="Rounded Rectangle 9"/>
           <p:cNvSpPr/>
           <p:nvPr/>
         </p:nvSpPr>
         <p:spPr>
           <a:xfrm>
-            <a:off x="841248" y="2999232"/>
-            <a:ext cx="5715000" cy="530352"/>
+            <a:off x="6254496" y="2395728"/>
+            <a:ext cx="5138928" cy="786384"/>
           </a:xfrm>
           <a:prstGeom prst="roundRect">
             <a:avLst>
-              <a:gd name="adj" fmla="val 6000"/>
+              <a:gd name="adj" fmla="val 7000"/>
             </a:avLst>
           </a:prstGeom>
           <a:solidFill>
@@ -12233,9 +14618,55 @@
           </a:p>
         </p:txBody>
       </p:sp>
+      <p:sp>
+        <p:nvSpPr>
+          <p:cNvPr id="11" name="Rounded Rectangle 10"/>
+          <p:cNvSpPr/>
+          <p:nvPr/>
+        </p:nvSpPr>
+        <p:spPr>
+          <a:xfrm>
+            <a:off x="6400800" y="2532888"/>
+            <a:ext cx="512064" cy="512064"/>
+          </a:xfrm>
+          <a:prstGeom prst="roundRect">
+            <a:avLst>
+              <a:gd name="adj" fmla="val 26000"/>
+            </a:avLst>
+          </a:prstGeom>
+          <a:solidFill>
+            <a:srgbClr val="EE0000"/>
+          </a:solidFill>
+          <a:ln>
+            <a:noFill/>
+          </a:ln>
+          <a:effectLst/>
+        </p:spPr>
+        <p:style>
+          <a:lnRef idx="1">
+            <a:schemeClr val="accent1"/>
+          </a:lnRef>
+          <a:fillRef idx="3">
+            <a:schemeClr val="accent1"/>
+          </a:fillRef>
+          <a:effectRef idx="2">
+            <a:schemeClr val="accent1"/>
+          </a:effectRef>
+          <a:fontRef idx="minor">
+            <a:schemeClr val="lt1"/>
+          </a:fontRef>
+        </p:style>
+        <p:txBody>
+          <a:bodyPr rtlCol="0" anchor="ctr"/>
+          <a:lstStyle/>
+          <a:p>
+            <a:pPr algn="ctr"/>
+          </a:p>
+        </p:txBody>
+      </p:sp>
       <p:pic>
         <p:nvPicPr>
-          <p:cNvPr id="10" name="Picture 9" descr="check_steel.png"/>
+          <p:cNvPr id="12" name="Picture 11" descr="check_white.png"/>
           <p:cNvPicPr>
             <a:picLocks noChangeAspect="1"/>
           </p:cNvPicPr>
@@ -12249,8 +14680,8 @@
         </p:blipFill>
         <p:spPr>
           <a:xfrm>
-            <a:off x="987552" y="3145536"/>
-            <a:ext cx="237744" cy="237744"/>
+            <a:off x="6523695" y="2655783"/>
+            <a:ext cx="266273" cy="266273"/>
           </a:xfrm>
           <a:prstGeom prst="rect">
             <a:avLst/>
@@ -12259,14 +14690,14 @@
       </p:pic>
       <p:sp>
         <p:nvSpPr>
-          <p:cNvPr id="11" name="TextBox 10"/>
+          <p:cNvPr id="13" name="TextBox 12"/>
           <p:cNvSpPr txBox="1"/>
           <p:nvPr/>
         </p:nvSpPr>
         <p:spPr>
           <a:xfrm>
-            <a:off x="1353312" y="2999232"/>
-            <a:ext cx="5029200" cy="530352"/>
+            <a:off x="7040880" y="2395728"/>
+            <a:ext cx="4206240" cy="786384"/>
           </a:xfrm>
           <a:prstGeom prst="rect">
             <a:avLst/>
@@ -12291,7 +14722,7 @@
               </a:spcAft>
             </a:pPr>
             <a:r>
-              <a:rPr sz="1200" b="0">
+              <a:rPr sz="1150" b="0">
                 <a:solidFill>
                   <a:srgbClr val="1A1A1A"/>
                 </a:solidFill>
@@ -12304,18 +14735,18 @@
       </p:sp>
       <p:sp>
         <p:nvSpPr>
-          <p:cNvPr id="12" name="Rounded Rectangle 11"/>
+          <p:cNvPr id="14" name="Rounded Rectangle 13"/>
           <p:cNvSpPr/>
           <p:nvPr/>
         </p:nvSpPr>
         <p:spPr>
           <a:xfrm>
-            <a:off x="841248" y="3602736"/>
-            <a:ext cx="5715000" cy="530352"/>
+            <a:off x="841248" y="3328416"/>
+            <a:ext cx="5138928" cy="786384"/>
           </a:xfrm>
           <a:prstGeom prst="roundRect">
             <a:avLst>
-              <a:gd name="adj" fmla="val 6000"/>
+              <a:gd name="adj" fmla="val 7000"/>
             </a:avLst>
           </a:prstGeom>
           <a:solidFill>
@@ -12350,9 +14781,55 @@
           </a:p>
         </p:txBody>
       </p:sp>
+      <p:sp>
+        <p:nvSpPr>
+          <p:cNvPr id="15" name="Rounded Rectangle 14"/>
+          <p:cNvSpPr/>
+          <p:nvPr/>
+        </p:nvSpPr>
+        <p:spPr>
+          <a:xfrm>
+            <a:off x="987552" y="3465576"/>
+            <a:ext cx="512064" cy="512064"/>
+          </a:xfrm>
+          <a:prstGeom prst="roundRect">
+            <a:avLst>
+              <a:gd name="adj" fmla="val 26000"/>
+            </a:avLst>
+          </a:prstGeom>
+          <a:solidFill>
+            <a:srgbClr val="EE0000"/>
+          </a:solidFill>
+          <a:ln>
+            <a:noFill/>
+          </a:ln>
+          <a:effectLst/>
+        </p:spPr>
+        <p:style>
+          <a:lnRef idx="1">
+            <a:schemeClr val="accent1"/>
+          </a:lnRef>
+          <a:fillRef idx="3">
+            <a:schemeClr val="accent1"/>
+          </a:fillRef>
+          <a:effectRef idx="2">
+            <a:schemeClr val="accent1"/>
+          </a:effectRef>
+          <a:fontRef idx="minor">
+            <a:schemeClr val="lt1"/>
+          </a:fontRef>
+        </p:style>
+        <p:txBody>
+          <a:bodyPr rtlCol="0" anchor="ctr"/>
+          <a:lstStyle/>
+          <a:p>
+            <a:pPr algn="ctr"/>
+          </a:p>
+        </p:txBody>
+      </p:sp>
       <p:pic>
         <p:nvPicPr>
-          <p:cNvPr id="13" name="Picture 12" descr="check_steel.png"/>
+          <p:cNvPr id="16" name="Picture 15" descr="check_white.png"/>
           <p:cNvPicPr>
             <a:picLocks noChangeAspect="1"/>
           </p:cNvPicPr>
@@ -12366,8 +14843,8 @@
         </p:blipFill>
         <p:spPr>
           <a:xfrm>
-            <a:off x="987552" y="3749040"/>
-            <a:ext cx="237744" cy="237744"/>
+            <a:off x="1110447" y="3588471"/>
+            <a:ext cx="266273" cy="266273"/>
           </a:xfrm>
           <a:prstGeom prst="rect">
             <a:avLst/>
@@ -12376,14 +14853,14 @@
       </p:pic>
       <p:sp>
         <p:nvSpPr>
-          <p:cNvPr id="14" name="TextBox 13"/>
+          <p:cNvPr id="17" name="TextBox 16"/>
           <p:cNvSpPr txBox="1"/>
           <p:nvPr/>
         </p:nvSpPr>
         <p:spPr>
           <a:xfrm>
-            <a:off x="1353312" y="3602736"/>
-            <a:ext cx="5029200" cy="530352"/>
+            <a:off x="1627632" y="3328416"/>
+            <a:ext cx="4206240" cy="786384"/>
           </a:xfrm>
           <a:prstGeom prst="rect">
             <a:avLst/>
@@ -12408,7 +14885,7 @@
               </a:spcAft>
             </a:pPr>
             <a:r>
-              <a:rPr sz="1200" b="0">
+              <a:rPr sz="1150" b="0">
                 <a:solidFill>
                   <a:srgbClr val="1A1A1A"/>
                 </a:solidFill>
@@ -12421,18 +14898,18 @@
       </p:sp>
       <p:sp>
         <p:nvSpPr>
-          <p:cNvPr id="15" name="Rounded Rectangle 14"/>
+          <p:cNvPr id="18" name="Rounded Rectangle 17"/>
           <p:cNvSpPr/>
           <p:nvPr/>
         </p:nvSpPr>
         <p:spPr>
           <a:xfrm>
-            <a:off x="841248" y="4206240"/>
-            <a:ext cx="5715000" cy="530352"/>
+            <a:off x="6254496" y="3328416"/>
+            <a:ext cx="5138928" cy="786384"/>
           </a:xfrm>
           <a:prstGeom prst="roundRect">
             <a:avLst>
-              <a:gd name="adj" fmla="val 6000"/>
+              <a:gd name="adj" fmla="val 7000"/>
             </a:avLst>
           </a:prstGeom>
           <a:solidFill>
@@ -12467,9 +14944,55 @@
           </a:p>
         </p:txBody>
       </p:sp>
+      <p:sp>
+        <p:nvSpPr>
+          <p:cNvPr id="19" name="Rounded Rectangle 18"/>
+          <p:cNvSpPr/>
+          <p:nvPr/>
+        </p:nvSpPr>
+        <p:spPr>
+          <a:xfrm>
+            <a:off x="6400800" y="3465576"/>
+            <a:ext cx="512064" cy="512064"/>
+          </a:xfrm>
+          <a:prstGeom prst="roundRect">
+            <a:avLst>
+              <a:gd name="adj" fmla="val 26000"/>
+            </a:avLst>
+          </a:prstGeom>
+          <a:solidFill>
+            <a:srgbClr val="EE0000"/>
+          </a:solidFill>
+          <a:ln>
+            <a:noFill/>
+          </a:ln>
+          <a:effectLst/>
+        </p:spPr>
+        <p:style>
+          <a:lnRef idx="1">
+            <a:schemeClr val="accent1"/>
+          </a:lnRef>
+          <a:fillRef idx="3">
+            <a:schemeClr val="accent1"/>
+          </a:fillRef>
+          <a:effectRef idx="2">
+            <a:schemeClr val="accent1"/>
+          </a:effectRef>
+          <a:fontRef idx="minor">
+            <a:schemeClr val="lt1"/>
+          </a:fontRef>
+        </p:style>
+        <p:txBody>
+          <a:bodyPr rtlCol="0" anchor="ctr"/>
+          <a:lstStyle/>
+          <a:p>
+            <a:pPr algn="ctr"/>
+          </a:p>
+        </p:txBody>
+      </p:sp>
       <p:pic>
         <p:nvPicPr>
-          <p:cNvPr id="16" name="Picture 15" descr="check_steel.png"/>
+          <p:cNvPr id="20" name="Picture 19" descr="check_white.png"/>
           <p:cNvPicPr>
             <a:picLocks noChangeAspect="1"/>
           </p:cNvPicPr>
@@ -12483,8 +15006,8 @@
         </p:blipFill>
         <p:spPr>
           <a:xfrm>
-            <a:off x="987552" y="4352544"/>
-            <a:ext cx="237744" cy="237744"/>
+            <a:off x="6523695" y="3588471"/>
+            <a:ext cx="266273" cy="266273"/>
           </a:xfrm>
           <a:prstGeom prst="rect">
             <a:avLst/>
@@ -12493,14 +15016,14 @@
       </p:pic>
       <p:sp>
         <p:nvSpPr>
-          <p:cNvPr id="17" name="TextBox 16"/>
+          <p:cNvPr id="21" name="TextBox 20"/>
           <p:cNvSpPr txBox="1"/>
           <p:nvPr/>
         </p:nvSpPr>
         <p:spPr>
           <a:xfrm>
-            <a:off x="1353312" y="4206240"/>
-            <a:ext cx="5029200" cy="530352"/>
+            <a:off x="7040880" y="3328416"/>
+            <a:ext cx="4206240" cy="786384"/>
           </a:xfrm>
           <a:prstGeom prst="rect">
             <a:avLst/>
@@ -12525,7 +15048,7 @@
               </a:spcAft>
             </a:pPr>
             <a:r>
-              <a:rPr sz="1200" b="0">
+              <a:rPr sz="1150" b="0">
                 <a:solidFill>
                   <a:srgbClr val="1A1A1A"/>
                 </a:solidFill>
@@ -12538,18 +15061,18 @@
       </p:sp>
       <p:sp>
         <p:nvSpPr>
-          <p:cNvPr id="18" name="Rounded Rectangle 17"/>
+          <p:cNvPr id="22" name="Rounded Rectangle 21"/>
           <p:cNvSpPr/>
           <p:nvPr/>
         </p:nvSpPr>
         <p:spPr>
           <a:xfrm>
-            <a:off x="841248" y="4809744"/>
-            <a:ext cx="5715000" cy="530352"/>
+            <a:off x="841248" y="4261104"/>
+            <a:ext cx="5138928" cy="786384"/>
           </a:xfrm>
           <a:prstGeom prst="roundRect">
             <a:avLst>
-              <a:gd name="adj" fmla="val 6000"/>
+              <a:gd name="adj" fmla="val 7000"/>
             </a:avLst>
           </a:prstGeom>
           <a:solidFill>
@@ -12584,9 +15107,55 @@
           </a:p>
         </p:txBody>
       </p:sp>
+      <p:sp>
+        <p:nvSpPr>
+          <p:cNvPr id="23" name="Rounded Rectangle 22"/>
+          <p:cNvSpPr/>
+          <p:nvPr/>
+        </p:nvSpPr>
+        <p:spPr>
+          <a:xfrm>
+            <a:off x="987552" y="4398264"/>
+            <a:ext cx="512064" cy="512064"/>
+          </a:xfrm>
+          <a:prstGeom prst="roundRect">
+            <a:avLst>
+              <a:gd name="adj" fmla="val 26000"/>
+            </a:avLst>
+          </a:prstGeom>
+          <a:solidFill>
+            <a:srgbClr val="EE0000"/>
+          </a:solidFill>
+          <a:ln>
+            <a:noFill/>
+          </a:ln>
+          <a:effectLst/>
+        </p:spPr>
+        <p:style>
+          <a:lnRef idx="1">
+            <a:schemeClr val="accent1"/>
+          </a:lnRef>
+          <a:fillRef idx="3">
+            <a:schemeClr val="accent1"/>
+          </a:fillRef>
+          <a:effectRef idx="2">
+            <a:schemeClr val="accent1"/>
+          </a:effectRef>
+          <a:fontRef idx="minor">
+            <a:schemeClr val="lt1"/>
+          </a:fontRef>
+        </p:style>
+        <p:txBody>
+          <a:bodyPr rtlCol="0" anchor="ctr"/>
+          <a:lstStyle/>
+          <a:p>
+            <a:pPr algn="ctr"/>
+          </a:p>
+        </p:txBody>
+      </p:sp>
       <p:pic>
         <p:nvPicPr>
-          <p:cNvPr id="19" name="Picture 18" descr="check_steel.png"/>
+          <p:cNvPr id="24" name="Picture 23" descr="check_white.png"/>
           <p:cNvPicPr>
             <a:picLocks noChangeAspect="1"/>
           </p:cNvPicPr>
@@ -12600,8 +15169,8 @@
         </p:blipFill>
         <p:spPr>
           <a:xfrm>
-            <a:off x="987552" y="4956048"/>
-            <a:ext cx="237744" cy="237744"/>
+            <a:off x="1110447" y="4521159"/>
+            <a:ext cx="266273" cy="266273"/>
           </a:xfrm>
           <a:prstGeom prst="rect">
             <a:avLst/>
@@ -12610,14 +15179,14 @@
       </p:pic>
       <p:sp>
         <p:nvSpPr>
-          <p:cNvPr id="20" name="TextBox 19"/>
+          <p:cNvPr id="25" name="TextBox 24"/>
           <p:cNvSpPr txBox="1"/>
           <p:nvPr/>
         </p:nvSpPr>
         <p:spPr>
           <a:xfrm>
-            <a:off x="1353312" y="4809744"/>
-            <a:ext cx="5029200" cy="530352"/>
+            <a:off x="1627632" y="4261104"/>
+            <a:ext cx="4206240" cy="786384"/>
           </a:xfrm>
           <a:prstGeom prst="rect">
             <a:avLst/>
@@ -12642,221 +15211,13 @@
               </a:spcAft>
             </a:pPr>
             <a:r>
-              <a:rPr sz="1200" b="0">
+              <a:rPr sz="1150" b="0">
                 <a:solidFill>
                   <a:srgbClr val="1A1A1A"/>
                 </a:solidFill>
                 <a:latin typeface="Red Hat Text"/>
               </a:rPr>
               <a:t>None of it was a separate product to buy — it ships with the platform</a:t>
-            </a:r>
-          </a:p>
-        </p:txBody>
-      </p:sp>
-      <p:sp>
-        <p:nvSpPr>
-          <p:cNvPr id="21" name="Rounded Rectangle 20"/>
-          <p:cNvSpPr/>
-          <p:nvPr/>
-        </p:nvSpPr>
-        <p:spPr>
-          <a:xfrm>
-            <a:off x="6812280" y="2395728"/>
-            <a:ext cx="4538167" cy="2944368"/>
-          </a:xfrm>
-          <a:prstGeom prst="roundRect">
-            <a:avLst>
-              <a:gd name="adj" fmla="val 4000"/>
-            </a:avLst>
-          </a:prstGeom>
-          <a:solidFill>
-            <a:srgbClr val="FFFFFF"/>
-          </a:solidFill>
-          <a:ln w="15240">
-            <a:solidFill>
-              <a:srgbClr val="DDE1E6"/>
-            </a:solidFill>
-          </a:ln>
-          <a:effectLst/>
-        </p:spPr>
-        <p:style>
-          <a:lnRef idx="1">
-            <a:schemeClr val="accent1"/>
-          </a:lnRef>
-          <a:fillRef idx="3">
-            <a:schemeClr val="accent1"/>
-          </a:fillRef>
-          <a:effectRef idx="2">
-            <a:schemeClr val="accent1"/>
-          </a:effectRef>
-          <a:fontRef idx="minor">
-            <a:schemeClr val="lt1"/>
-          </a:fontRef>
-        </p:style>
-        <p:txBody>
-          <a:bodyPr rtlCol="0" anchor="ctr"/>
-          <a:lstStyle/>
-          <a:p>
-            <a:pPr algn="ctr"/>
-          </a:p>
-        </p:txBody>
-      </p:sp>
-      <p:sp>
-        <p:nvSpPr>
-          <p:cNvPr id="22" name="Rounded Rectangle 21"/>
-          <p:cNvSpPr/>
-          <p:nvPr/>
-        </p:nvSpPr>
-        <p:spPr>
-          <a:xfrm>
-            <a:off x="7013448" y="2596896"/>
-            <a:ext cx="1298448" cy="310896"/>
-          </a:xfrm>
-          <a:prstGeom prst="roundRect">
-            <a:avLst>
-              <a:gd name="adj" fmla="val 50000"/>
-            </a:avLst>
-          </a:prstGeom>
-          <a:solidFill>
-            <a:srgbClr val="FCECEC"/>
-          </a:solidFill>
-          <a:ln>
-            <a:noFill/>
-          </a:ln>
-          <a:effectLst/>
-        </p:spPr>
-        <p:style>
-          <a:lnRef idx="1">
-            <a:schemeClr val="accent1"/>
-          </a:lnRef>
-          <a:fillRef idx="3">
-            <a:schemeClr val="accent1"/>
-          </a:fillRef>
-          <a:effectRef idx="2">
-            <a:schemeClr val="accent1"/>
-          </a:effectRef>
-          <a:fontRef idx="minor">
-            <a:schemeClr val="lt1"/>
-          </a:fontRef>
-        </p:style>
-        <p:txBody>
-          <a:bodyPr rtlCol="0" anchor="ctr"/>
-          <a:lstStyle/>
-          <a:p>
-            <a:pPr algn="ctr"/>
-          </a:p>
-        </p:txBody>
-      </p:sp>
-      <p:sp>
-        <p:nvSpPr>
-          <p:cNvPr id="23" name="TextBox 22"/>
-          <p:cNvSpPr txBox="1"/>
-          <p:nvPr/>
-        </p:nvSpPr>
-        <p:spPr>
-          <a:xfrm>
-            <a:off x="7013448" y="2596896"/>
-            <a:ext cx="1298448" cy="310896"/>
-          </a:xfrm>
-          <a:prstGeom prst="rect">
-            <a:avLst/>
-          </a:prstGeom>
-          <a:noFill/>
-        </p:spPr>
-        <p:txBody>
-          <a:bodyPr wrap="none" anchor="ctr" lIns="0" rIns="0" tIns="0" bIns="0">
-            <a:spAutoFit/>
-          </a:bodyPr>
-          <a:lstStyle/>
-          <a:p>
-            <a:pPr algn="ctr">
-              <a:lnSpc>
-                <a:spcPct val="106000"/>
-              </a:lnSpc>
-              <a:spcBef>
-                <a:spcPts val="0"/>
-              </a:spcBef>
-              <a:spcAft>
-                <a:spcPts val="0"/>
-              </a:spcAft>
-            </a:pPr>
-            <a:r>
-              <a:rPr sz="850" b="1">
-                <a:solidFill>
-                  <a:srgbClr val="B80000"/>
-                </a:solidFill>
-                <a:latin typeface="Red Hat Display"/>
-              </a:rPr>
-              <a:t>MEDIA PASS</a:t>
-            </a:r>
-          </a:p>
-        </p:txBody>
-      </p:sp>
-      <p:pic>
-        <p:nvPicPr>
-          <p:cNvPr id="24" name="Picture 23" descr="eye_slate.png"/>
-          <p:cNvPicPr>
-            <a:picLocks noChangeAspect="1"/>
-          </p:cNvPicPr>
-          <p:nvPr/>
-        </p:nvPicPr>
-        <p:blipFill>
-          <a:blip r:embed="rId4"/>
-          <a:stretch>
-            <a:fillRect/>
-          </a:stretch>
-        </p:blipFill>
-        <p:spPr>
-          <a:xfrm>
-            <a:off x="8843619" y="3108960"/>
-            <a:ext cx="475488" cy="475488"/>
-          </a:xfrm>
-          <a:prstGeom prst="rect">
-            <a:avLst/>
-          </a:prstGeom>
-        </p:spPr>
-      </p:pic>
-      <p:sp>
-        <p:nvSpPr>
-          <p:cNvPr id="25" name="TextBox 24"/>
-          <p:cNvSpPr txBox="1"/>
-          <p:nvPr/>
-        </p:nvSpPr>
-        <p:spPr>
-          <a:xfrm>
-            <a:off x="7050024" y="3721608"/>
-            <a:ext cx="4062679" cy="1481328"/>
-          </a:xfrm>
-          <a:prstGeom prst="rect">
-            <a:avLst/>
-          </a:prstGeom>
-          <a:noFill/>
-        </p:spPr>
-        <p:txBody>
-          <a:bodyPr wrap="square" anchor="t" lIns="0" rIns="0" tIns="0" bIns="0">
-            <a:spAutoFit/>
-          </a:bodyPr>
-          <a:lstStyle/>
-          <a:p>
-            <a:pPr algn="l">
-              <a:lnSpc>
-                <a:spcPct val="120000"/>
-              </a:lnSpc>
-              <a:spcBef>
-                <a:spcPts val="0"/>
-              </a:spcBef>
-              <a:spcAft>
-                <a:spcPts val="0"/>
-              </a:spcAft>
-            </a:pPr>
-            <a:r>
-              <a:rPr sz="950" b="0">
-                <a:solidFill>
-                  <a:srgbClr val="8A9099"/>
-                </a:solidFill>
-                <a:latin typeface="Red Hat Text"/>
-              </a:rPr>
-              <a:t>Concept diagram observability-health-scale-05-what-you-built — the claims service with metrics/alert/trace/HPA/PDB layered on, all green.</a:t>
             </a:r>
           </a:p>
         </p:txBody>
